--- a/tema2/diapositivas/maquinas-virtuales.pptx
+++ b/tema2/diapositivas/maquinas-virtuales.pptx
@@ -4,6 +4,9 @@
   <p:sldMasterIdLst>
     <p:sldMasterId id="2147483648" r:id="rId1"/>
   </p:sldMasterIdLst>
+  <p:notesMasterIdLst>
+    <p:notesMasterId r:id="rId11"/>
+  </p:notesMasterIdLst>
   <p:sldIdLst>
     <p:sldId id="256" r:id="rId2"/>
     <p:sldId id="257" r:id="rId3"/>
@@ -14,12 +17,7 @@
     <p:sldId id="262" r:id="rId8"/>
     <p:sldId id="263" r:id="rId9"/>
     <p:sldId id="264" r:id="rId10"/>
-    <p:sldId id="265" r:id="rId11"/>
-    <p:sldId id="266" r:id="rId12"/>
   </p:sldIdLst>
-  <p:notesMasterIdLst>
-    <p:notesMasterId r:id="rId13"/>
-  </p:notesMasterIdLst>
   <p:sldSz cx="12192000" cy="6858000"/>
   <p:notesSz cx="6858000" cy="12192000"/>
   <p:defaultTextStyle>
@@ -114,6 +112,11 @@
       </a:defRPr>
     </a:lvl9pPr>
   </p:defaultTextStyle>
+  <p:extLst>
+    <p:ext uri="{EFAFB233-063F-42B5-8137-9DF3F51BA10A}">
+      <p15:sldGuideLst xmlns:p15="http://schemas.microsoft.com/office/powerpoint/2012/main"/>
+    </p:ext>
+  </p:extLst>
 </p:presentation>
 </file>
 
@@ -139,234 +142,10 @@
           <a:chExt cx="0" cy="0"/>
         </a:xfrm>
       </p:grpSpPr>
-      <p:sp>
-        <p:nvSpPr>
-          <p:cNvPr id="2" name="Header Placeholder 1"/>
-          <p:cNvSpPr>
-            <a:spLocks noGrp="1"/>
-          </p:cNvSpPr>
-          <p:nvPr>
-            <p:ph type="hdr" sz="quarter"/>
-          </p:nvPr>
-        </p:nvSpPr>
-        <p:spPr>
-          <a:xfrm>
-            <a:off x="0" y="0"/>
-            <a:ext cx="2971800" cy="458788"/>
-          </a:xfrm>
-          <a:prstGeom prst="rect">
-            <a:avLst/>
-          </a:prstGeom>
-        </p:spPr>
-        <p:txBody>
-          <a:bodyPr vert="horz" lIns="91440" tIns="45720" rIns="91440" bIns="45720" rtlCol="0"/>
-          <a:lstStyle>
-            <a:lvl1pPr algn="l">
-              <a:defRPr sz="1200"/>
-            </a:lvl1pPr>
-          </a:lstStyle>
-          <a:p>
-            <a:endParaRPr lang="en-US"/>
-          </a:p>
-        </p:txBody>
-      </p:sp>
-      <p:sp>
-        <p:nvSpPr>
-          <p:cNvPr id="3" name="Date Placeholder 2"/>
-          <p:cNvSpPr>
-            <a:spLocks noGrp="1"/>
-          </p:cNvSpPr>
-          <p:nvPr>
-            <p:ph type="dt" idx="1"/>
-          </p:nvPr>
-        </p:nvSpPr>
-        <p:spPr>
-          <a:xfrm>
-            <a:off x="3884613" y="0"/>
-            <a:ext cx="2971800" cy="458788"/>
-          </a:xfrm>
-          <a:prstGeom prst="rect">
-            <a:avLst/>
-          </a:prstGeom>
-        </p:spPr>
-        <p:txBody>
-          <a:bodyPr vert="horz" lIns="91440" tIns="45720" rIns="91440" bIns="45720" rtlCol="0"/>
-          <a:lstStyle>
-            <a:lvl1pPr algn="r">
-              <a:defRPr sz="1200"/>
-            </a:lvl1pPr>
-          </a:lstStyle>
-          <a:p>
-            <a:fld id="{5282F153-3F37-0F45-9E97-73ACFA13230C}" type="datetimeFigureOut">
-              <a:rPr lang="en-US"/>
-              <a:t>7/23/19</a:t>
-            </a:fld>
-            <a:endParaRPr lang="en-US"/>
-          </a:p>
-        </p:txBody>
-      </p:sp>
-      <p:sp>
-        <p:nvSpPr>
-          <p:cNvPr id="4" name="Slide Image Placeholder 3"/>
-          <p:cNvSpPr>
-            <a:spLocks noGrp="1" noRot="1" noChangeAspect="1"/>
-          </p:cNvSpPr>
-          <p:nvPr>
-            <p:ph type="sldImg" idx="2"/>
-          </p:nvPr>
-        </p:nvSpPr>
-        <p:spPr>
-          <a:xfrm>
-            <a:off x="685800" y="1143000"/>
-            <a:ext cx="5486400" cy="3086100"/>
-          </a:xfrm>
-          <a:prstGeom prst="rect">
-            <a:avLst/>
-          </a:prstGeom>
-          <a:noFill/>
-          <a:ln w="12700">
-            <a:solidFill>
-              <a:prstClr val="black"/>
-            </a:solidFill>
-          </a:ln>
-        </p:spPr>
-        <p:txBody>
-          <a:bodyPr vert="horz" lIns="91440" tIns="45720" rIns="91440" bIns="45720" rtlCol="0" anchor="ctr"/>
-          <a:lstStyle/>
-          <a:p>
-            <a:endParaRPr lang="en-US"/>
-          </a:p>
-        </p:txBody>
-      </p:sp>
-      <p:sp>
-        <p:nvSpPr>
-          <p:cNvPr id="5" name="Notes Placeholder 4"/>
-          <p:cNvSpPr>
-            <a:spLocks noGrp="1"/>
-          </p:cNvSpPr>
-          <p:nvPr>
-            <p:ph type="body" sz="quarter" idx="3"/>
-          </p:nvPr>
-        </p:nvSpPr>
-        <p:spPr>
-          <a:xfrm>
-            <a:off x="685800" y="4400550"/>
-            <a:ext cx="5486400" cy="3600450"/>
-          </a:xfrm>
-          <a:prstGeom prst="rect">
-            <a:avLst/>
-          </a:prstGeom>
-        </p:spPr>
-        <p:txBody>
-          <a:bodyPr vert="horz" lIns="91440" tIns="45720" rIns="91440" bIns="45720" rtlCol="0"/>
-          <a:lstStyle/>
-          <a:p>
-            <a:pPr lvl="0"/>
-            <a:r>
-              <a:rPr lang="en-US"/>
-              <a:t>Click to edit Master text styles</a:t>
-            </a:r>
-          </a:p>
-          <a:p>
-            <a:pPr lvl="1"/>
-            <a:r>
-              <a:rPr lang="en-US"/>
-              <a:t>Second level</a:t>
-            </a:r>
-          </a:p>
-          <a:p>
-            <a:pPr lvl="2"/>
-            <a:r>
-              <a:rPr lang="en-US"/>
-              <a:t>Third level</a:t>
-            </a:r>
-          </a:p>
-          <a:p>
-            <a:pPr lvl="3"/>
-            <a:r>
-              <a:rPr lang="en-US"/>
-              <a:t>Fourth level</a:t>
-            </a:r>
-          </a:p>
-          <a:p>
-            <a:pPr lvl="4"/>
-            <a:r>
-              <a:rPr lang="en-US"/>
-              <a:t>Fifth level</a:t>
-            </a:r>
-          </a:p>
-        </p:txBody>
-      </p:sp>
-      <p:sp>
-        <p:nvSpPr>
-          <p:cNvPr id="6" name="Footer Placeholder 5"/>
-          <p:cNvSpPr>
-            <a:spLocks noGrp="1"/>
-          </p:cNvSpPr>
-          <p:nvPr>
-            <p:ph type="ftr" sz="quarter" idx="4"/>
-          </p:nvPr>
-        </p:nvSpPr>
-        <p:spPr>
-          <a:xfrm>
-            <a:off x="0" y="8685213"/>
-            <a:ext cx="2971800" cy="458787"/>
-          </a:xfrm>
-          <a:prstGeom prst="rect">
-            <a:avLst/>
-          </a:prstGeom>
-        </p:spPr>
-        <p:txBody>
-          <a:bodyPr vert="horz" lIns="91440" tIns="45720" rIns="91440" bIns="45720" rtlCol="0" anchor="b"/>
-          <a:lstStyle>
-            <a:lvl1pPr algn="l">
-              <a:defRPr sz="1200"/>
-            </a:lvl1pPr>
-          </a:lstStyle>
-          <a:p>
-            <a:endParaRPr lang="en-US"/>
-          </a:p>
-        </p:txBody>
-      </p:sp>
-      <p:sp>
-        <p:nvSpPr>
-          <p:cNvPr id="7" name="Slide Number Placeholder 6"/>
-          <p:cNvSpPr>
-            <a:spLocks noGrp="1"/>
-          </p:cNvSpPr>
-          <p:nvPr>
-            <p:ph type="sldNum" sz="quarter" idx="5"/>
-          </p:nvPr>
-        </p:nvSpPr>
-        <p:spPr>
-          <a:xfrm>
-            <a:off x="3884613" y="8685213"/>
-            <a:ext cx="2971800" cy="458787"/>
-          </a:xfrm>
-          <a:prstGeom prst="rect">
-            <a:avLst/>
-          </a:prstGeom>
-        </p:spPr>
-        <p:txBody>
-          <a:bodyPr vert="horz" lIns="91440" tIns="45720" rIns="91440" bIns="45720" rtlCol="0" anchor="b"/>
-          <a:lstStyle>
-            <a:lvl1pPr algn="r">
-              <a:defRPr sz="1200"/>
-            </a:lvl1pPr>
-          </a:lstStyle>
-          <a:p>
-            <a:fld id="{CE5E9CC1-C706-0F49-92D6-E571CC5EEA8F}" type="slidenum">
-              <a:rPr lang="en-US"/>
-              <a:t>‹#›</a:t>
-            </a:fld>
-            <a:endParaRPr lang="en-US"/>
-          </a:p>
-        </p:txBody>
-      </p:sp>
     </p:spTree>
     <p:extLst>
       <p:ext uri="{BB962C8B-B14F-4D97-AF65-F5344CB8AC3E}">
-        <p14:creationId xmlns:p14="http://schemas.microsoft.com/office/powerpoint/2010/main" val="1024086991"/>
+        <p14:creationId xmlns:p14="http://schemas.microsoft.com/office/powerpoint/2010/main" val="3154143269"/>
       </p:ext>
     </p:extLst>
   </p:cSld>
@@ -510,10 +289,6 @@
           <a:bodyPr/>
           <a:lstStyle/>
           <a:p>
-            <a:r>
-              <a:rPr lang="en-US" dirty="0"/>
-              <a:t/>
-            </a:r>
             <a:endParaRPr lang="en-US" dirty="0"/>
           </a:p>
         </p:txBody>
@@ -536,182 +311,6 @@
             <a:fld id="{F7021451-1387-4CA6-816F-3879F97B5CBC}" type="slidenum">
               <a:rPr lang="en-US"/>
               <a:t>1</a:t>
-            </a:fld>
-            <a:endParaRPr lang="en-US"/>
-          </a:p>
-        </p:txBody>
-      </p:sp>
-    </p:spTree>
-    <p:extLst>
-      <p:ext uri="{BB962C8B-B14F-4D97-AF65-F5344CB8AC3E}">
-        <p14:creationId xmlns:p14="http://schemas.microsoft.com/office/powerpoint/2010/main" val="1024086991"/>
-      </p:ext>
-    </p:extLst>
-  </p:cSld>
-  <p:clrMapOvr>
-    <a:masterClrMapping/>
-  </p:clrMapOvr>
-</p:notes>
-</file>
-
-<file path=ppt/notesSlides/notesSlide10.xml><?xml version="1.0" encoding="utf-8"?>
-<p:notes xmlns:a="http://schemas.openxmlformats.org/drawingml/2006/main" xmlns:r="http://schemas.openxmlformats.org/officeDocument/2006/relationships" xmlns:p="http://schemas.openxmlformats.org/presentationml/2006/main">
-  <p:cSld>
-    <p:spTree>
-      <p:nvGrpSpPr>
-        <p:cNvPr id="1" name=""/>
-        <p:cNvGrpSpPr/>
-        <p:nvPr/>
-      </p:nvGrpSpPr>
-      <p:grpSpPr>
-        <a:xfrm>
-          <a:off x="0" y="0"/>
-          <a:ext cx="0" cy="0"/>
-          <a:chOff x="0" y="0"/>
-          <a:chExt cx="0" cy="0"/>
-        </a:xfrm>
-      </p:grpSpPr>
-      <p:sp>
-        <p:nvSpPr>
-          <p:cNvPr id="2" name="Slide Image Placeholder 1"/>
-          <p:cNvSpPr>
-            <a:spLocks noGrp="1" noRot="1" noChangeAspect="1"/>
-          </p:cNvSpPr>
-          <p:nvPr>
-            <p:ph type="sldImg"/>
-          </p:nvPr>
-        </p:nvSpPr>
-        <p:spPr/>
-      </p:sp>
-      <p:sp>
-        <p:nvSpPr>
-          <p:cNvPr id="3" name="Notes Placeholder 2"/>
-          <p:cNvSpPr>
-            <a:spLocks noGrp="1"/>
-          </p:cNvSpPr>
-          <p:nvPr>
-            <p:ph type="body" idx="1"/>
-          </p:nvPr>
-        </p:nvSpPr>
-        <p:spPr/>
-        <p:txBody>
-          <a:bodyPr/>
-          <a:lstStyle/>
-          <a:p>
-            <a:r>
-              <a:rPr lang="en-US" dirty="0"/>
-              <a:t/>
-            </a:r>
-            <a:endParaRPr lang="en-US" dirty="0"/>
-          </a:p>
-        </p:txBody>
-      </p:sp>
-      <p:sp>
-        <p:nvSpPr>
-          <p:cNvPr id="4" name="Slide Number Placeholder 3"/>
-          <p:cNvSpPr>
-            <a:spLocks noGrp="1"/>
-          </p:cNvSpPr>
-          <p:nvPr>
-            <p:ph type="sldNum" sz="quarter" idx="10"/>
-          </p:nvPr>
-        </p:nvSpPr>
-        <p:spPr/>
-        <p:txBody>
-          <a:bodyPr/>
-          <a:lstStyle/>
-          <a:p>
-            <a:fld id="{F7021451-1387-4CA6-816F-3879F97B5CBC}" type="slidenum">
-              <a:rPr lang="en-US"/>
-              <a:t>10</a:t>
-            </a:fld>
-            <a:endParaRPr lang="en-US"/>
-          </a:p>
-        </p:txBody>
-      </p:sp>
-    </p:spTree>
-    <p:extLst>
-      <p:ext uri="{BB962C8B-B14F-4D97-AF65-F5344CB8AC3E}">
-        <p14:creationId xmlns:p14="http://schemas.microsoft.com/office/powerpoint/2010/main" val="1024086991"/>
-      </p:ext>
-    </p:extLst>
-  </p:cSld>
-  <p:clrMapOvr>
-    <a:masterClrMapping/>
-  </p:clrMapOvr>
-</p:notes>
-</file>
-
-<file path=ppt/notesSlides/notesSlide11.xml><?xml version="1.0" encoding="utf-8"?>
-<p:notes xmlns:a="http://schemas.openxmlformats.org/drawingml/2006/main" xmlns:r="http://schemas.openxmlformats.org/officeDocument/2006/relationships" xmlns:p="http://schemas.openxmlformats.org/presentationml/2006/main">
-  <p:cSld>
-    <p:spTree>
-      <p:nvGrpSpPr>
-        <p:cNvPr id="1" name=""/>
-        <p:cNvGrpSpPr/>
-        <p:nvPr/>
-      </p:nvGrpSpPr>
-      <p:grpSpPr>
-        <a:xfrm>
-          <a:off x="0" y="0"/>
-          <a:ext cx="0" cy="0"/>
-          <a:chOff x="0" y="0"/>
-          <a:chExt cx="0" cy="0"/>
-        </a:xfrm>
-      </p:grpSpPr>
-      <p:sp>
-        <p:nvSpPr>
-          <p:cNvPr id="2" name="Slide Image Placeholder 1"/>
-          <p:cNvSpPr>
-            <a:spLocks noGrp="1" noRot="1" noChangeAspect="1"/>
-          </p:cNvSpPr>
-          <p:nvPr>
-            <p:ph type="sldImg"/>
-          </p:nvPr>
-        </p:nvSpPr>
-        <p:spPr/>
-      </p:sp>
-      <p:sp>
-        <p:nvSpPr>
-          <p:cNvPr id="3" name="Notes Placeholder 2"/>
-          <p:cNvSpPr>
-            <a:spLocks noGrp="1"/>
-          </p:cNvSpPr>
-          <p:nvPr>
-            <p:ph type="body" idx="1"/>
-          </p:nvPr>
-        </p:nvSpPr>
-        <p:spPr/>
-        <p:txBody>
-          <a:bodyPr/>
-          <a:lstStyle/>
-          <a:p>
-            <a:r>
-              <a:rPr lang="en-US" dirty="0"/>
-              <a:t/>
-            </a:r>
-            <a:endParaRPr lang="en-US" dirty="0"/>
-          </a:p>
-        </p:txBody>
-      </p:sp>
-      <p:sp>
-        <p:nvSpPr>
-          <p:cNvPr id="4" name="Slide Number Placeholder 3"/>
-          <p:cNvSpPr>
-            <a:spLocks noGrp="1"/>
-          </p:cNvSpPr>
-          <p:nvPr>
-            <p:ph type="sldNum" sz="quarter" idx="10"/>
-          </p:nvPr>
-        </p:nvSpPr>
-        <p:spPr/>
-        <p:txBody>
-          <a:bodyPr/>
-          <a:lstStyle/>
-          <a:p>
-            <a:fld id="{F7021451-1387-4CA6-816F-3879F97B5CBC}" type="slidenum">
-              <a:rPr lang="en-US"/>
-              <a:t>11</a:t>
             </a:fld>
             <a:endParaRPr lang="en-US"/>
           </a:p>
@@ -774,10 +373,6 @@
           <a:bodyPr/>
           <a:lstStyle/>
           <a:p>
-            <a:r>
-              <a:rPr lang="en-US" dirty="0"/>
-              <a:t/>
-            </a:r>
             <a:endParaRPr lang="en-US" dirty="0"/>
           </a:p>
         </p:txBody>
@@ -862,10 +457,6 @@
           <a:bodyPr/>
           <a:lstStyle/>
           <a:p>
-            <a:r>
-              <a:rPr lang="en-US" dirty="0"/>
-              <a:t/>
-            </a:r>
             <a:endParaRPr lang="en-US" dirty="0"/>
           </a:p>
         </p:txBody>
@@ -950,10 +541,6 @@
           <a:bodyPr/>
           <a:lstStyle/>
           <a:p>
-            <a:r>
-              <a:rPr lang="en-US" dirty="0"/>
-              <a:t/>
-            </a:r>
             <a:endParaRPr lang="en-US" dirty="0"/>
           </a:p>
         </p:txBody>
@@ -1038,10 +625,6 @@
           <a:bodyPr/>
           <a:lstStyle/>
           <a:p>
-            <a:r>
-              <a:rPr lang="en-US" dirty="0"/>
-              <a:t/>
-            </a:r>
             <a:endParaRPr lang="en-US" dirty="0"/>
           </a:p>
         </p:txBody>
@@ -1126,10 +709,6 @@
           <a:bodyPr/>
           <a:lstStyle/>
           <a:p>
-            <a:r>
-              <a:rPr lang="en-US" dirty="0"/>
-              <a:t/>
-            </a:r>
             <a:endParaRPr lang="en-US" dirty="0"/>
           </a:p>
         </p:txBody>
@@ -1214,10 +793,6 @@
           <a:bodyPr/>
           <a:lstStyle/>
           <a:p>
-            <a:r>
-              <a:rPr lang="en-US" dirty="0"/>
-              <a:t/>
-            </a:r>
             <a:endParaRPr lang="en-US" dirty="0"/>
           </a:p>
         </p:txBody>
@@ -1302,10 +877,6 @@
           <a:bodyPr/>
           <a:lstStyle/>
           <a:p>
-            <a:r>
-              <a:rPr lang="en-US" dirty="0"/>
-              <a:t/>
-            </a:r>
             <a:endParaRPr lang="en-US" dirty="0"/>
           </a:p>
         </p:txBody>
@@ -1390,10 +961,6 @@
           <a:bodyPr/>
           <a:lstStyle/>
           <a:p>
-            <a:r>
-              <a:rPr lang="en-US" dirty="0"/>
-              <a:t/>
-            </a:r>
             <a:endParaRPr lang="en-US" dirty="0"/>
           </a:p>
         </p:txBody>
@@ -1467,6 +1034,11 @@
 <file path=ppt/slideMasters/slideMaster1.xml><?xml version="1.0" encoding="utf-8"?>
 <p:sldMaster xmlns:a="http://schemas.openxmlformats.org/drawingml/2006/main" xmlns:r="http://schemas.openxmlformats.org/officeDocument/2006/relationships" xmlns:p="http://schemas.openxmlformats.org/presentationml/2006/main">
   <p:cSld>
+    <p:bg>
+      <p:bgRef idx="1001">
+        <a:schemeClr val="bg1"/>
+      </p:bgRef>
+    </p:bg>
     <p:spTree>
       <p:nvGrpSpPr>
         <p:cNvPr id="1" name=""/>
@@ -1749,6 +1321,7 @@
         <a:solidFill>
           <a:srgbClr val="1A237E"/>
         </a:solidFill>
+        <a:effectLst/>
       </p:bgPr>
     </p:bg>
     <p:spTree>
@@ -1786,7 +1359,7 @@
           <a:bodyPr wrap="square" rtlCol="0" anchor="ctr"/>
           <a:lstStyle/>
           <a:p>
-            <a:pPr indent="0" marL="0">
+            <a:pPr marL="0" indent="0">
               <a:buNone/>
             </a:pPr>
             <a:r>
@@ -1825,11 +1398,11 @@
           <a:bodyPr wrap="square" rtlCol="0" anchor="ctr"/>
           <a:lstStyle/>
           <a:p>
-            <a:pPr algn="l" indent="0" marL="0">
+            <a:pPr marL="0" indent="0" algn="l">
               <a:buNone/>
             </a:pPr>
             <a:r>
-              <a:rPr lang="en-US" sz="3800" b="1" dirty="0">
+              <a:rPr lang="en-US" sz="4000" b="1" dirty="0">
                 <a:solidFill>
                   <a:srgbClr val="FFFFFF"/>
                 </a:solidFill>
@@ -1839,7 +1412,7 @@
               </a:rPr>
               <a:t>Máquinas virtuales</a:t>
             </a:r>
-            <a:endParaRPr lang="en-US" sz="3800" dirty="0"/>
+            <a:endParaRPr lang="en-US" sz="4000" dirty="0"/>
           </a:p>
         </p:txBody>
       </p:sp>
@@ -1867,6 +1440,13 @@
             <a:prstDash val="solid"/>
           </a:ln>
         </p:spPr>
+        <p:txBody>
+          <a:bodyPr/>
+          <a:lstStyle/>
+          <a:p>
+            <a:endParaRPr lang="es-ES"/>
+          </a:p>
+        </p:txBody>
       </p:sp>
       <p:sp>
         <p:nvSpPr>
@@ -1889,11 +1469,11 @@
           <a:bodyPr wrap="square" rtlCol="0" anchor="ctr"/>
           <a:lstStyle/>
           <a:p>
-            <a:pPr indent="0" marL="0">
+            <a:pPr marL="0" indent="0">
               <a:buNone/>
             </a:pPr>
             <a:r>
-              <a:rPr lang="en-US" sz="1900" i="1" dirty="0">
+              <a:rPr lang="en-US" sz="2000" i="1" dirty="0">
                 <a:solidFill>
                   <a:srgbClr val="FFFFFF"/>
                 </a:solidFill>
@@ -1902,535 +1482,6 @@
                 <a:cs typeface="Arial" pitchFamily="34" charset="-120"/>
               </a:rPr>
               <a:t>Tema 2 — Redes virtuales y servicios de cómputo</a:t>
-            </a:r>
-            <a:endParaRPr lang="en-US" sz="1900" dirty="0"/>
-          </a:p>
-        </p:txBody>
-      </p:sp>
-    </p:spTree>
-  </p:cSld>
-  <p:clrMapOvr>
-    <a:masterClrMapping/>
-  </p:clrMapOvr>
-</p:sld>
-</file>
-
-<file path=ppt/slides/slide10.xml><?xml version="1.0" encoding="utf-8"?>
-<p:sld xmlns:a="http://schemas.openxmlformats.org/drawingml/2006/main" xmlns:r="http://schemas.openxmlformats.org/officeDocument/2006/relationships" xmlns:p="http://schemas.openxmlformats.org/presentationml/2006/main">
-  <p:cSld name="Slide 10">
-    <p:spTree>
-      <p:nvGrpSpPr>
-        <p:cNvPr id="1" name=""/>
-        <p:cNvGrpSpPr/>
-        <p:nvPr/>
-      </p:nvGrpSpPr>
-      <p:grpSpPr>
-        <a:xfrm>
-          <a:off x="0" y="0"/>
-          <a:ext cx="0" cy="0"/>
-          <a:chOff x="0" y="0"/>
-          <a:chExt cx="0" cy="0"/>
-        </a:xfrm>
-      </p:grpSpPr>
-      <p:sp>
-        <p:nvSpPr>
-          <p:cNvPr id="2" name="Shape 0"/>
-          <p:cNvSpPr/>
-          <p:nvPr/>
-        </p:nvSpPr>
-        <p:spPr>
-          <a:xfrm>
-            <a:off x="0" y="0"/>
-            <a:ext cx="12188952" cy="777240"/>
-          </a:xfrm>
-          <a:prstGeom prst="rect">
-            <a:avLst/>
-          </a:prstGeom>
-          <a:solidFill>
-            <a:srgbClr val="1A237E"/>
-          </a:solidFill>
-          <a:ln w="12700">
-            <a:solidFill>
-              <a:srgbClr val="1A237E"/>
-            </a:solidFill>
-            <a:prstDash val="solid"/>
-          </a:ln>
-        </p:spPr>
-      </p:sp>
-      <p:sp>
-        <p:nvSpPr>
-          <p:cNvPr id="3" name="Text 1"/>
-          <p:cNvSpPr/>
-          <p:nvPr/>
-        </p:nvSpPr>
-        <p:spPr>
-          <a:xfrm>
-            <a:off x="365760" y="0"/>
-            <a:ext cx="11457432" cy="777240"/>
-          </a:xfrm>
-          <a:prstGeom prst="rect">
-            <a:avLst/>
-          </a:prstGeom>
-          <a:noFill/>
-          <a:ln/>
-        </p:spPr>
-        <p:txBody>
-          <a:bodyPr wrap="square" rtlCol="0" anchor="ctr"/>
-          <a:lstStyle/>
-          <a:p>
-            <a:pPr indent="0" marL="0">
-              <a:buNone/>
-            </a:pPr>
-            <a:r>
-              <a:rPr lang="en-US" sz="2400" b="1" dirty="0">
-                <a:solidFill>
-                  <a:srgbClr val="FFFFFF"/>
-                </a:solidFill>
-                <a:latin typeface="Arial" pitchFamily="34" charset="0"/>
-                <a:ea typeface="Arial" pitchFamily="34" charset="-122"/>
-                <a:cs typeface="Arial" pitchFamily="34" charset="-120"/>
-              </a:rPr>
-              <a:t>La base del escalado automático del Tema 4</a:t>
-            </a:r>
-            <a:endParaRPr lang="en-US" sz="2400" dirty="0"/>
-          </a:p>
-        </p:txBody>
-      </p:sp>
-      <p:sp>
-        <p:nvSpPr>
-          <p:cNvPr id="4" name="Text 2"/>
-          <p:cNvSpPr/>
-          <p:nvPr/>
-        </p:nvSpPr>
-        <p:spPr>
-          <a:xfrm>
-            <a:off x="548640" y="6473952"/>
-            <a:ext cx="11091672" cy="292608"/>
-          </a:xfrm>
-          <a:prstGeom prst="rect">
-            <a:avLst/>
-          </a:prstGeom>
-          <a:noFill/>
-          <a:ln/>
-        </p:spPr>
-        <p:txBody>
-          <a:bodyPr wrap="square" rtlCol="0" anchor="ctr"/>
-          <a:lstStyle/>
-          <a:p>
-            <a:pPr algn="r" indent="0" marL="0">
-              <a:buNone/>
-            </a:pPr>
-            <a:r>
-              <a:rPr lang="en-US" sz="1100" dirty="0">
-                <a:solidFill>
-                  <a:srgbClr val="757575"/>
-                </a:solidFill>
-                <a:latin typeface="Arial" pitchFamily="34" charset="0"/>
-                <a:ea typeface="Arial" pitchFamily="34" charset="-122"/>
-                <a:cs typeface="Arial" pitchFamily="34" charset="-120"/>
-              </a:rPr>
-              <a:t>Introducción a la Nube Pública — Tema 2: Máquinas virtuales</a:t>
-            </a:r>
-            <a:endParaRPr lang="en-US" sz="1100" dirty="0"/>
-          </a:p>
-        </p:txBody>
-      </p:sp>
-      <p:sp>
-        <p:nvSpPr>
-          <p:cNvPr id="5" name="Shape 3"/>
-          <p:cNvSpPr/>
-          <p:nvPr/>
-        </p:nvSpPr>
-        <p:spPr>
-          <a:xfrm>
-            <a:off x="548640" y="1371600"/>
-            <a:ext cx="11091672" cy="1554480"/>
-          </a:xfrm>
-          <a:prstGeom prst="roundRect">
-            <a:avLst/>
-          </a:prstGeom>
-          <a:solidFill>
-            <a:srgbClr val="FFF8E1"/>
-          </a:solidFill>
-          <a:ln w="19050">
-            <a:solidFill>
-              <a:srgbClr val="FFA000"/>
-            </a:solidFill>
-            <a:prstDash val="solid"/>
-          </a:ln>
-        </p:spPr>
-      </p:sp>
-      <p:sp>
-        <p:nvSpPr>
-          <p:cNvPr id="6" name="Text 4"/>
-          <p:cNvSpPr/>
-          <p:nvPr/>
-        </p:nvSpPr>
-        <p:spPr>
-          <a:xfrm>
-            <a:off x="822960" y="1463040"/>
-            <a:ext cx="10543032" cy="1371600"/>
-          </a:xfrm>
-          <a:prstGeom prst="rect">
-            <a:avLst/>
-          </a:prstGeom>
-          <a:noFill/>
-          <a:ln/>
-        </p:spPr>
-        <p:txBody>
-          <a:bodyPr wrap="square" rtlCol="0" anchor="ctr"/>
-          <a:lstStyle/>
-          <a:p>
-            <a:pPr indent="0" marL="0">
-              <a:buNone/>
-            </a:pPr>
-            <a:r>
-              <a:rPr lang="en-US" sz="2000" dirty="0">
-                <a:solidFill>
-                  <a:srgbClr val="212121"/>
-                </a:solidFill>
-                <a:latin typeface="Arial" pitchFamily="34" charset="0"/>
-                <a:ea typeface="Arial" pitchFamily="34" charset="-122"/>
-                <a:cs typeface="Arial" pitchFamily="34" charset="-120"/>
-              </a:rPr>
-              <a:t>Una plantilla de lanzamiento parametrizada es exactamente lo que va a usar el grupo de escalado automático del Tema 4 para decidir «necesito una instancia más, ¿con qué características la lanzo?» — sin plantilla, no hay escalado automático posible.</a:t>
-            </a:r>
-            <a:endParaRPr lang="en-US" sz="2000" dirty="0"/>
-          </a:p>
-        </p:txBody>
-      </p:sp>
-      <p:sp>
-        <p:nvSpPr>
-          <p:cNvPr id="7" name="Shape 5"/>
-          <p:cNvSpPr/>
-          <p:nvPr/>
-        </p:nvSpPr>
-        <p:spPr>
-          <a:xfrm>
-            <a:off x="548640" y="3200400"/>
-            <a:ext cx="11091672" cy="1554480"/>
-          </a:xfrm>
-          <a:prstGeom prst="roundRect">
-            <a:avLst/>
-          </a:prstGeom>
-          <a:solidFill>
-            <a:srgbClr val="FFF8E1"/>
-          </a:solidFill>
-          <a:ln w="28575">
-            <a:solidFill>
-              <a:srgbClr val="FFA000"/>
-            </a:solidFill>
-            <a:prstDash val="solid"/>
-          </a:ln>
-        </p:spPr>
-      </p:sp>
-      <p:sp>
-        <p:nvSpPr>
-          <p:cNvPr id="8" name="Text 6"/>
-          <p:cNvSpPr/>
-          <p:nvPr/>
-        </p:nvSpPr>
-        <p:spPr>
-          <a:xfrm>
-            <a:off x="822960" y="3310128"/>
-            <a:ext cx="10543032" cy="1335024"/>
-          </a:xfrm>
-          <a:prstGeom prst="rect">
-            <a:avLst/>
-          </a:prstGeom>
-          <a:noFill/>
-          <a:ln/>
-        </p:spPr>
-        <p:txBody>
-          <a:bodyPr wrap="square" rtlCol="0" anchor="t"/>
-          <a:lstStyle/>
-          <a:p>
-            <a:pPr indent="0" marL="0">
-              <a:buNone/>
-            </a:pPr>
-            <a:r>
-              <a:rPr lang="en-US" sz="1800" b="1" dirty="0">
-                <a:solidFill>
-                  <a:srgbClr val="1A237E"/>
-                </a:solidFill>
-                <a:latin typeface="Arial" pitchFamily="34" charset="0"/>
-                <a:ea typeface="Arial" pitchFamily="34" charset="-122"/>
-                <a:cs typeface="Arial" pitchFamily="34" charset="-120"/>
-              </a:rPr>
-              <a:t>⚠️ Una plantilla no crea infraestructura, solo la reutiliza
-</a:t>
-            </a:r>
-            <a:endParaRPr lang="en-US" sz="1800" dirty="0"/>
-          </a:p>
-          <a:p>
-            <a:pPr indent="0" marL="0">
-              <a:buNone/>
-            </a:pPr>
-            <a:r>
-              <a:rPr lang="en-US" sz="1700" dirty="0">
-                <a:solidFill>
-                  <a:srgbClr val="212121"/>
-                </a:solidFill>
-                <a:latin typeface="Arial" pitchFamily="34" charset="0"/>
-                <a:ea typeface="Arial" pitchFamily="34" charset="-122"/>
-                <a:cs typeface="Arial" pitchFamily="34" charset="-120"/>
-              </a:rPr>
-              <a:t>Guarda los ID de tu subred y tu grupo de seguridad, que solo existen en tu cuenta y tu región. Para replicar toda una infraestructura de una cuenta a otra hace falta infraestructura como código (Tema 6).</a:t>
-            </a:r>
-            <a:endParaRPr lang="en-US" sz="1800" dirty="0"/>
-          </a:p>
-        </p:txBody>
-      </p:sp>
-    </p:spTree>
-  </p:cSld>
-  <p:clrMapOvr>
-    <a:masterClrMapping/>
-  </p:clrMapOvr>
-</p:sld>
-</file>
-
-<file path=ppt/slides/slide11.xml><?xml version="1.0" encoding="utf-8"?>
-<p:sld xmlns:a="http://schemas.openxmlformats.org/drawingml/2006/main" xmlns:r="http://schemas.openxmlformats.org/officeDocument/2006/relationships" xmlns:p="http://schemas.openxmlformats.org/presentationml/2006/main">
-  <p:cSld name="Slide 11">
-    <p:spTree>
-      <p:nvGrpSpPr>
-        <p:cNvPr id="1" name=""/>
-        <p:cNvGrpSpPr/>
-        <p:nvPr/>
-      </p:nvGrpSpPr>
-      <p:grpSpPr>
-        <a:xfrm>
-          <a:off x="0" y="0"/>
-          <a:ext cx="0" cy="0"/>
-          <a:chOff x="0" y="0"/>
-          <a:chExt cx="0" cy="0"/>
-        </a:xfrm>
-      </p:grpSpPr>
-      <p:sp>
-        <p:nvSpPr>
-          <p:cNvPr id="2" name="Shape 0"/>
-          <p:cNvSpPr/>
-          <p:nvPr/>
-        </p:nvSpPr>
-        <p:spPr>
-          <a:xfrm>
-            <a:off x="0" y="0"/>
-            <a:ext cx="12188952" cy="777240"/>
-          </a:xfrm>
-          <a:prstGeom prst="rect">
-            <a:avLst/>
-          </a:prstGeom>
-          <a:solidFill>
-            <a:srgbClr val="1A237E"/>
-          </a:solidFill>
-          <a:ln w="12700">
-            <a:solidFill>
-              <a:srgbClr val="1A237E"/>
-            </a:solidFill>
-            <a:prstDash val="solid"/>
-          </a:ln>
-        </p:spPr>
-      </p:sp>
-      <p:sp>
-        <p:nvSpPr>
-          <p:cNvPr id="3" name="Text 1"/>
-          <p:cNvSpPr/>
-          <p:nvPr/>
-        </p:nvSpPr>
-        <p:spPr>
-          <a:xfrm>
-            <a:off x="365760" y="0"/>
-            <a:ext cx="11457432" cy="777240"/>
-          </a:xfrm>
-          <a:prstGeom prst="rect">
-            <a:avLst/>
-          </a:prstGeom>
-          <a:noFill/>
-          <a:ln/>
-        </p:spPr>
-        <p:txBody>
-          <a:bodyPr wrap="square" rtlCol="0" anchor="ctr"/>
-          <a:lstStyle/>
-          <a:p>
-            <a:pPr indent="0" marL="0">
-              <a:buNone/>
-            </a:pPr>
-            <a:r>
-              <a:rPr lang="en-US" sz="2400" b="1" dirty="0">
-                <a:solidFill>
-                  <a:srgbClr val="FFFFFF"/>
-                </a:solidFill>
-                <a:latin typeface="Arial" pitchFamily="34" charset="0"/>
-                <a:ea typeface="Arial" pitchFamily="34" charset="-122"/>
-                <a:cs typeface="Arial" pitchFamily="34" charset="-120"/>
-              </a:rPr>
-              <a:t>Ideas clave</a:t>
-            </a:r>
-            <a:endParaRPr lang="en-US" sz="2400" dirty="0"/>
-          </a:p>
-        </p:txBody>
-      </p:sp>
-      <p:sp>
-        <p:nvSpPr>
-          <p:cNvPr id="4" name="Text 2"/>
-          <p:cNvSpPr/>
-          <p:nvPr/>
-        </p:nvSpPr>
-        <p:spPr>
-          <a:xfrm>
-            <a:off x="548640" y="6473952"/>
-            <a:ext cx="11091672" cy="292608"/>
-          </a:xfrm>
-          <a:prstGeom prst="rect">
-            <a:avLst/>
-          </a:prstGeom>
-          <a:noFill/>
-          <a:ln/>
-        </p:spPr>
-        <p:txBody>
-          <a:bodyPr wrap="square" rtlCol="0" anchor="ctr"/>
-          <a:lstStyle/>
-          <a:p>
-            <a:pPr algn="r" indent="0" marL="0">
-              <a:buNone/>
-            </a:pPr>
-            <a:r>
-              <a:rPr lang="en-US" sz="1100" dirty="0">
-                <a:solidFill>
-                  <a:srgbClr val="757575"/>
-                </a:solidFill>
-                <a:latin typeface="Arial" pitchFamily="34" charset="0"/>
-                <a:ea typeface="Arial" pitchFamily="34" charset="-122"/>
-                <a:cs typeface="Arial" pitchFamily="34" charset="-120"/>
-              </a:rPr>
-              <a:t>Introducción a la Nube Pública — Tema 2: Máquinas virtuales</a:t>
-            </a:r>
-            <a:endParaRPr lang="en-US" sz="1100" dirty="0"/>
-          </a:p>
-        </p:txBody>
-      </p:sp>
-      <p:sp>
-        <p:nvSpPr>
-          <p:cNvPr id="5" name="Text 3"/>
-          <p:cNvSpPr/>
-          <p:nvPr/>
-        </p:nvSpPr>
-        <p:spPr>
-          <a:xfrm>
-            <a:off x="548640" y="1554480"/>
-            <a:ext cx="11091672" cy="3840480"/>
-          </a:xfrm>
-          <a:prstGeom prst="rect">
-            <a:avLst/>
-          </a:prstGeom>
-          <a:noFill/>
-          <a:ln/>
-        </p:spPr>
-        <p:txBody>
-          <a:bodyPr wrap="square" rtlCol="0" anchor="t"/>
-          <a:lstStyle/>
-          <a:p>
-            <a:pPr marL="190500" indent="-190500">
-              <a:spcAft>
-                <a:spcPts val="2000"/>
-              </a:spcAft>
-              <a:buSzPct val="100000"/>
-              <a:buChar char="•"/>
-            </a:pPr>
-            <a:r>
-              <a:rPr lang="en-US" sz="2000" dirty="0">
-                <a:solidFill>
-                  <a:srgbClr val="212121"/>
-                </a:solidFill>
-                <a:latin typeface="Arial" pitchFamily="34" charset="0"/>
-                <a:ea typeface="Arial" pitchFamily="34" charset="-122"/>
-                <a:cs typeface="Arial" pitchFamily="34" charset="-120"/>
-              </a:rPr>
-              <a:t>El tipo de instancia combina familia (para qué está optimizada) y tamaño (cuánta CPU/memoria) — más grande no siempre es mejor.</a:t>
-            </a:r>
-            <a:endParaRPr lang="en-US" sz="2000" dirty="0"/>
-          </a:p>
-          <a:p>
-            <a:pPr marL="190500" indent="-190500">
-              <a:spcAft>
-                <a:spcPts val="2000"/>
-              </a:spcAft>
-              <a:buSzPct val="100000"/>
-              <a:buChar char="•"/>
-            </a:pPr>
-            <a:r>
-              <a:rPr lang="en-US" sz="2000" dirty="0">
-                <a:solidFill>
-                  <a:srgbClr val="212121"/>
-                </a:solidFill>
-                <a:latin typeface="Arial" pitchFamily="34" charset="0"/>
-                <a:ea typeface="Arial" pitchFamily="34" charset="-122"/>
-                <a:cs typeface="Arial" pitchFamily="34" charset="-120"/>
-              </a:rPr>
-              <a:t>Una AMI es la fotografía completa de un disco de arranque, lista para lanzar instancias idénticas sin reinstalar nada.</a:t>
-            </a:r>
-            <a:endParaRPr lang="en-US" sz="2000" dirty="0"/>
-          </a:p>
-          <a:p>
-            <a:pPr marL="190500" indent="-190500">
-              <a:spcAft>
-                <a:spcPts val="2000"/>
-              </a:spcAft>
-              <a:buSzPct val="100000"/>
-              <a:buChar char="•"/>
-            </a:pPr>
-            <a:r>
-              <a:rPr lang="en-US" sz="2000" dirty="0">
-                <a:solidFill>
-                  <a:srgbClr val="212121"/>
-                </a:solidFill>
-                <a:latin typeface="Arial" pitchFamily="34" charset="0"/>
-                <a:ea typeface="Arial" pitchFamily="34" charset="-122"/>
-                <a:cs typeface="Arial" pitchFamily="34" charset="-120"/>
-              </a:rPr>
-              <a:t>El almacenamiento (EBS) es un recurso independiente conectado a la instancia, no una parte indivisible de ella.</a:t>
-            </a:r>
-            <a:endParaRPr lang="en-US" sz="2000" dirty="0"/>
-          </a:p>
-          <a:p>
-            <a:pPr marL="190500" indent="-190500">
-              <a:spcAft>
-                <a:spcPts val="2000"/>
-              </a:spcAft>
-              <a:buSzPct val="100000"/>
-              <a:buChar char="•"/>
-            </a:pPr>
-            <a:r>
-              <a:rPr lang="en-US" sz="2000" dirty="0">
-                <a:solidFill>
-                  <a:srgbClr val="212121"/>
-                </a:solidFill>
-                <a:latin typeface="Arial" pitchFamily="34" charset="0"/>
-                <a:ea typeface="Arial" pitchFamily="34" charset="-122"/>
-                <a:cs typeface="Arial" pitchFamily="34" charset="-120"/>
-              </a:rPr>
-              <a:t>Parar conserva la instancia y el disco sin facturar cómputo; terminar la elimina por completo.</a:t>
-            </a:r>
-            <a:endParaRPr lang="en-US" sz="2000" dirty="0"/>
-          </a:p>
-          <a:p>
-            <a:pPr marL="190500" indent="-190500">
-              <a:spcAft>
-                <a:spcPts val="2000"/>
-              </a:spcAft>
-              <a:buSzPct val="100000"/>
-              <a:buChar char="•"/>
-            </a:pPr>
-            <a:r>
-              <a:rPr lang="en-US" sz="2000" dirty="0">
-                <a:solidFill>
-                  <a:srgbClr val="212121"/>
-                </a:solidFill>
-                <a:latin typeface="Arial" pitchFamily="34" charset="0"/>
-                <a:ea typeface="Arial" pitchFamily="34" charset="-122"/>
-                <a:cs typeface="Arial" pitchFamily="34" charset="-120"/>
-              </a:rPr>
-              <a:t>Una plantilla de lanzamiento empaqueta todos los parámetros para lanzar muchas instancias idénticas — la base del escalado automático del Tema 4.</a:t>
             </a:r>
             <a:endParaRPr lang="en-US" sz="2000" dirty="0"/>
           </a:p>
@@ -2485,6 +1536,13 @@
             <a:prstDash val="solid"/>
           </a:ln>
         </p:spPr>
+        <p:txBody>
+          <a:bodyPr/>
+          <a:lstStyle/>
+          <a:p>
+            <a:endParaRPr lang="es-ES"/>
+          </a:p>
+        </p:txBody>
       </p:sp>
       <p:sp>
         <p:nvSpPr>
@@ -2507,7 +1565,7 @@
           <a:bodyPr wrap="square" rtlCol="0" anchor="ctr"/>
           <a:lstStyle/>
           <a:p>
-            <a:pPr indent="0" marL="0">
+            <a:pPr marL="0" indent="0">
               <a:buNone/>
             </a:pPr>
             <a:r>
@@ -2519,7 +1577,7 @@
                 <a:ea typeface="Arial" pitchFamily="34" charset="-122"/>
                 <a:cs typeface="Arial" pitchFamily="34" charset="-120"/>
               </a:rPr>
-              <a:t>De repetir a mano a plantillas reutilizables</a:t>
+              <a:t>Máquinas virtuales</a:t>
             </a:r>
             <a:endParaRPr lang="en-US" sz="2400" dirty="0"/>
           </a:p>
@@ -2546,7 +1604,7 @@
           <a:bodyPr wrap="square" rtlCol="0" anchor="ctr"/>
           <a:lstStyle/>
           <a:p>
-            <a:pPr algn="r" indent="0" marL="0">
+            <a:pPr marL="0" indent="0" algn="r">
               <a:buNone/>
             </a:pPr>
             <a:r>
@@ -2566,14 +1624,46 @@
       </p:sp>
       <p:sp>
         <p:nvSpPr>
-          <p:cNvPr id="5" name="Text 3"/>
-          <p:cNvSpPr/>
-          <p:nvPr/>
-        </p:nvSpPr>
-        <p:spPr>
-          <a:xfrm>
-            <a:off x="548640" y="1645920"/>
-            <a:ext cx="11091672" cy="1920240"/>
+          <p:cNvPr id="5" name="Shape 3"/>
+          <p:cNvSpPr/>
+          <p:nvPr/>
+        </p:nvSpPr>
+        <p:spPr>
+          <a:xfrm>
+            <a:off x="548640" y="1188720"/>
+            <a:ext cx="11091672" cy="1691640"/>
+          </a:xfrm>
+          <a:prstGeom prst="roundRect">
+            <a:avLst/>
+          </a:prstGeom>
+          <a:solidFill>
+            <a:srgbClr val="E8EAF6"/>
+          </a:solidFill>
+          <a:ln w="15875">
+            <a:solidFill>
+              <a:srgbClr val="3949AB"/>
+            </a:solidFill>
+            <a:prstDash val="solid"/>
+          </a:ln>
+        </p:spPr>
+        <p:txBody>
+          <a:bodyPr/>
+          <a:lstStyle/>
+          <a:p>
+            <a:endParaRPr lang="es-ES"/>
+          </a:p>
+        </p:txBody>
+      </p:sp>
+      <p:sp>
+        <p:nvSpPr>
+          <p:cNvPr id="6" name="Text 4"/>
+          <p:cNvSpPr/>
+          <p:nvPr/>
+        </p:nvSpPr>
+        <p:spPr>
+          <a:xfrm>
+            <a:off x="731520" y="1261872"/>
+            <a:ext cx="10725912" cy="548640"/>
           </a:xfrm>
           <a:prstGeom prst="rect">
             <a:avLst/>
@@ -2582,14 +1672,53 @@
           <a:ln/>
         </p:spPr>
         <p:txBody>
-          <a:bodyPr wrap="square" rtlCol="0" anchor="t"/>
-          <a:lstStyle/>
-          <a:p>
-            <a:pPr indent="0" marL="0">
+          <a:bodyPr wrap="square" rtlCol="0" anchor="ctr"/>
+          <a:lstStyle/>
+          <a:p>
+            <a:pPr marL="0" indent="0">
               <a:buNone/>
             </a:pPr>
             <a:r>
-              <a:rPr lang="en-US" sz="2100" dirty="0">
+              <a:rPr lang="en-US" sz="2000" b="1" dirty="0">
+                <a:solidFill>
+                  <a:srgbClr val="1A237E"/>
+                </a:solidFill>
+                <a:latin typeface="Arial" pitchFamily="34" charset="0"/>
+                <a:ea typeface="Arial" pitchFamily="34" charset="-122"/>
+                <a:cs typeface="Arial" pitchFamily="34" charset="-120"/>
+              </a:rPr>
+              <a:t>Ya sabes que una instancia es una máquina virtual</a:t>
+            </a:r>
+            <a:endParaRPr lang="en-US" sz="2000" dirty="0"/>
+          </a:p>
+        </p:txBody>
+      </p:sp>
+      <p:sp>
+        <p:nvSpPr>
+          <p:cNvPr id="7" name="Text 5"/>
+          <p:cNvSpPr/>
+          <p:nvPr/>
+        </p:nvSpPr>
+        <p:spPr>
+          <a:xfrm>
+            <a:off x="731520" y="1810512"/>
+            <a:ext cx="10725912" cy="996696"/>
+          </a:xfrm>
+          <a:prstGeom prst="rect">
+            <a:avLst/>
+          </a:prstGeom>
+          <a:noFill/>
+          <a:ln/>
+        </p:spPr>
+        <p:txBody>
+          <a:bodyPr wrap="square" rtlCol="0" anchor="t"/>
+          <a:lstStyle/>
+          <a:p>
+            <a:pPr marL="0" indent="0">
+              <a:buNone/>
+            </a:pPr>
+            <a:r>
+              <a:rPr lang="en-US" sz="1600" dirty="0">
                 <a:solidFill>
                   <a:srgbClr val="212121"/>
                 </a:solidFill>
@@ -2597,22 +1726,22 @@
                 <a:ea typeface="Arial" pitchFamily="34" charset="-122"/>
                 <a:cs typeface="Arial" pitchFamily="34" charset="-120"/>
               </a:rPr>
-              <a:t>Ya sabes que una instancia es una máquina virtual. En las dos sesiones anteriores has lanzado instancias sueltas, una a una, repitiendo a mano los mismos parámetros: la imagen, el tipo, la subred, el grupo de seguridad. Funciona para dos instancias de prueba, pero no escala.</a:t>
+              <a:t>En las dos sesiones anteriores has lanzado instancias sueltas, una a una, repitiendo a mano los mismos parámetros. Funciona para dos instancias de prueba, pero no escala.</a:t>
             </a:r>
-            <a:endParaRPr lang="en-US" sz="2100" dirty="0"/>
-          </a:p>
-        </p:txBody>
-      </p:sp>
-      <p:sp>
-        <p:nvSpPr>
-          <p:cNvPr id="6" name="Shape 4"/>
-          <p:cNvSpPr/>
-          <p:nvPr/>
-        </p:nvSpPr>
-        <p:spPr>
-          <a:xfrm>
-            <a:off x="548640" y="3886200"/>
-            <a:ext cx="11091672" cy="1371600"/>
+            <a:endParaRPr lang="en-US" sz="1600" dirty="0"/>
+          </a:p>
+        </p:txBody>
+      </p:sp>
+      <p:sp>
+        <p:nvSpPr>
+          <p:cNvPr id="8" name="Shape 6"/>
+          <p:cNvSpPr/>
+          <p:nvPr/>
+        </p:nvSpPr>
+        <p:spPr>
+          <a:xfrm>
+            <a:off x="548640" y="3200400"/>
+            <a:ext cx="11091672" cy="1554480"/>
           </a:xfrm>
           <a:prstGeom prst="roundRect">
             <a:avLst/>
@@ -2620,24 +1749,31 @@
           <a:solidFill>
             <a:srgbClr val="FFF8E1"/>
           </a:solidFill>
-          <a:ln w="19050">
+          <a:ln w="28575">
             <a:solidFill>
               <a:srgbClr val="FFA000"/>
             </a:solidFill>
             <a:prstDash val="solid"/>
           </a:ln>
         </p:spPr>
-      </p:sp>
-      <p:sp>
-        <p:nvSpPr>
-          <p:cNvPr id="7" name="Text 5"/>
-          <p:cNvSpPr/>
-          <p:nvPr/>
-        </p:nvSpPr>
-        <p:spPr>
-          <a:xfrm>
-            <a:off x="822960" y="3977640"/>
-            <a:ext cx="10543032" cy="1188720"/>
+        <p:txBody>
+          <a:bodyPr/>
+          <a:lstStyle/>
+          <a:p>
+            <a:endParaRPr lang="es-ES"/>
+          </a:p>
+        </p:txBody>
+      </p:sp>
+      <p:sp>
+        <p:nvSpPr>
+          <p:cNvPr id="9" name="Text 7"/>
+          <p:cNvSpPr/>
+          <p:nvPr/>
+        </p:nvSpPr>
+        <p:spPr>
+          <a:xfrm>
+            <a:off x="822960" y="3310128"/>
+            <a:ext cx="10543032" cy="1335024"/>
           </a:xfrm>
           <a:prstGeom prst="rect">
             <a:avLst/>
@@ -2646,14 +1782,32 @@
           <a:ln/>
         </p:spPr>
         <p:txBody>
-          <a:bodyPr wrap="square" rtlCol="0" anchor="ctr"/>
-          <a:lstStyle/>
-          <a:p>
-            <a:pPr indent="0" marL="0">
+          <a:bodyPr wrap="square" rtlCol="0" anchor="t"/>
+          <a:lstStyle/>
+          <a:p>
+            <a:pPr marL="0" indent="0">
               <a:buNone/>
             </a:pPr>
             <a:r>
-              <a:rPr lang="en-US" sz="1900" dirty="0">
+              <a:rPr lang="en-US" sz="1900" b="1" dirty="0">
+                <a:solidFill>
+                  <a:srgbClr val="1A237E"/>
+                </a:solidFill>
+                <a:latin typeface="Arial" pitchFamily="34" charset="0"/>
+                <a:ea typeface="Arial" pitchFamily="34" charset="-122"/>
+                <a:cs typeface="Arial" pitchFamily="34" charset="-120"/>
+              </a:rPr>
+              <a:t>Hoy dejas de repetir el proceso a mano
+</a:t>
+            </a:r>
+            <a:endParaRPr lang="en-US" sz="1900" dirty="0"/>
+          </a:p>
+          <a:p>
+            <a:pPr marL="0" indent="0">
+              <a:buNone/>
+            </a:pPr>
+            <a:r>
+              <a:rPr lang="en-US" sz="1800" dirty="0">
                 <a:solidFill>
                   <a:srgbClr val="212121"/>
                 </a:solidFill>
@@ -2661,9 +1815,48 @@
                 <a:ea typeface="Arial" pitchFamily="34" charset="-122"/>
                 <a:cs typeface="Arial" pitchFamily="34" charset="-120"/>
               </a:rPr>
-              <a:t>Hoy dejas de repetir ese proceso a mano: entiendes qué decide su rendimiento y precio, cómo se empaqueta en una imagen reutilizable, y cómo se guarda esa receta en una plantilla que lanzas tantas veces como haga falta.</a:t>
+              <a:t>Entiendes qué decide el rendimiento y el precio de una instancia, cómo se empaqueta en una imagen reutilizable, y cómo se guarda esa receta en una plantilla que lanzas tantas veces como haga falta.</a:t>
             </a:r>
             <a:endParaRPr lang="en-US" sz="1900" dirty="0"/>
+          </a:p>
+        </p:txBody>
+      </p:sp>
+      <p:sp>
+        <p:nvSpPr>
+          <p:cNvPr id="10" name="Text 8"/>
+          <p:cNvSpPr/>
+          <p:nvPr/>
+        </p:nvSpPr>
+        <p:spPr>
+          <a:xfrm>
+            <a:off x="548640" y="5029200"/>
+            <a:ext cx="11091672" cy="457200"/>
+          </a:xfrm>
+          <a:prstGeom prst="rect">
+            <a:avLst/>
+          </a:prstGeom>
+          <a:noFill/>
+          <a:ln/>
+        </p:spPr>
+        <p:txBody>
+          <a:bodyPr wrap="square" rtlCol="0" anchor="t"/>
+          <a:lstStyle/>
+          <a:p>
+            <a:pPr marL="0" indent="0" algn="ctr">
+              <a:buNone/>
+            </a:pPr>
+            <a:r>
+              <a:rPr lang="en-US" sz="1600" i="1" dirty="0">
+                <a:solidFill>
+                  <a:srgbClr val="757575"/>
+                </a:solidFill>
+                <a:latin typeface="Arial" pitchFamily="34" charset="0"/>
+                <a:ea typeface="Arial" pitchFamily="34" charset="-122"/>
+                <a:cs typeface="Arial" pitchFamily="34" charset="-120"/>
+              </a:rPr>
+              <a:t>Es la base de la Actividad 2.3 — De instancia a plantilla.</a:t>
+            </a:r>
+            <a:endParaRPr lang="en-US" sz="1600" dirty="0"/>
           </a:p>
         </p:txBody>
       </p:sp>
@@ -2716,6 +1909,13 @@
             <a:prstDash val="solid"/>
           </a:ln>
         </p:spPr>
+        <p:txBody>
+          <a:bodyPr/>
+          <a:lstStyle/>
+          <a:p>
+            <a:endParaRPr lang="es-ES"/>
+          </a:p>
+        </p:txBody>
       </p:sp>
       <p:sp>
         <p:nvSpPr>
@@ -2738,7 +1938,7 @@
           <a:bodyPr wrap="square" rtlCol="0" anchor="ctr"/>
           <a:lstStyle/>
           <a:p>
-            <a:pPr indent="0" marL="0">
+            <a:pPr marL="0" indent="0">
               <a:buNone/>
             </a:pPr>
             <a:r>
@@ -2777,7 +1977,7 @@
           <a:bodyPr wrap="square" rtlCol="0" anchor="ctr"/>
           <a:lstStyle/>
           <a:p>
-            <a:pPr algn="r" indent="0" marL="0">
+            <a:pPr marL="0" indent="0" algn="r">
               <a:buNone/>
             </a:pPr>
             <a:r>
@@ -2797,14 +1997,46 @@
       </p:sp>
       <p:sp>
         <p:nvSpPr>
-          <p:cNvPr id="5" name="Text 3"/>
-          <p:cNvSpPr/>
-          <p:nvPr/>
-        </p:nvSpPr>
-        <p:spPr>
-          <a:xfrm>
-            <a:off x="548640" y="1097280"/>
-            <a:ext cx="11091672" cy="1097280"/>
+          <p:cNvPr id="5" name="Shape 3"/>
+          <p:cNvSpPr/>
+          <p:nvPr/>
+        </p:nvSpPr>
+        <p:spPr>
+          <a:xfrm>
+            <a:off x="548640" y="1143000"/>
+            <a:ext cx="11091672" cy="1051560"/>
+          </a:xfrm>
+          <a:prstGeom prst="roundRect">
+            <a:avLst/>
+          </a:prstGeom>
+          <a:solidFill>
+            <a:srgbClr val="FFF8E1"/>
+          </a:solidFill>
+          <a:ln w="19050">
+            <a:solidFill>
+              <a:srgbClr val="FFA000"/>
+            </a:solidFill>
+            <a:prstDash val="solid"/>
+          </a:ln>
+        </p:spPr>
+        <p:txBody>
+          <a:bodyPr/>
+          <a:lstStyle/>
+          <a:p>
+            <a:endParaRPr lang="es-ES"/>
+          </a:p>
+        </p:txBody>
+      </p:sp>
+      <p:sp>
+        <p:nvSpPr>
+          <p:cNvPr id="6" name="Text 4"/>
+          <p:cNvSpPr/>
+          <p:nvPr/>
+        </p:nvSpPr>
+        <p:spPr>
+          <a:xfrm>
+            <a:off x="822960" y="1234440"/>
+            <a:ext cx="10543032" cy="868680"/>
           </a:xfrm>
           <a:prstGeom prst="rect">
             <a:avLst/>
@@ -2813,14 +2045,14 @@
           <a:ln/>
         </p:spPr>
         <p:txBody>
-          <a:bodyPr wrap="square" rtlCol="0" anchor="t"/>
-          <a:lstStyle/>
-          <a:p>
-            <a:pPr indent="0" marL="0">
+          <a:bodyPr wrap="square" rtlCol="0" anchor="ctr"/>
+          <a:lstStyle/>
+          <a:p>
+            <a:pPr marL="0" indent="0">
               <a:buNone/>
             </a:pPr>
             <a:r>
-              <a:rPr lang="en-US" sz="1600" dirty="0">
+              <a:rPr lang="en-US" sz="1500" dirty="0">
                 <a:solidFill>
                   <a:srgbClr val="212121"/>
                 </a:solidFill>
@@ -2828,15 +2060,15 @@
                 <a:ea typeface="Arial" pitchFamily="34" charset="-122"/>
                 <a:cs typeface="Arial" pitchFamily="34" charset="-120"/>
               </a:rPr>
-              <a:t>El nombre de un tipo (t3.micro, m5.large) tiene tres partes: la familia (para qué está optimizada), la generación (cuanto más alto, más reciente) y el tamaño (cuánta CPU y memoria trae) — este último es el que de verdad decide cuánto pagas.</a:t>
+              <a:t>Un tipo como t3.micro tiene tres partes: la letra es la familia (para qué está optimizada), el número es la generación (más alto, más reciente), y la palabra final es el tamaño — el que de verdad decide cuánto pagas.</a:t>
             </a:r>
-            <a:endParaRPr lang="en-US" sz="1600" dirty="0"/>
+            <a:endParaRPr lang="en-US" sz="1500" dirty="0"/>
           </a:p>
         </p:txBody>
       </p:sp>
       <p:graphicFrame>
         <p:nvGraphicFramePr>
-          <p:cNvPr id="4" name="Table 0"/>
+          <p:cNvPr id="7" name="Table 0"/>
           <p:cNvGraphicFramePr>
             <a:graphicFrameLocks noGrp="1"/>
           </p:cNvGraphicFramePr>
@@ -2849,25 +2081,43 @@
           </p:nvPr>
         </p:nvGraphicFramePr>
         <p:xfrm>
-          <a:off x="548640" y="2377440"/>
-          <a:ext cx="11091672" cy="914400"/>
+          <a:off x="548640" y="2331720"/>
+          <a:ext cx="11091672" cy="2651760"/>
         </p:xfrm>
         <a:graphic>
           <a:graphicData uri="http://schemas.openxmlformats.org/drawingml/2006/table">
             <a:tbl>
               <a:tblPr/>
               <a:tblGrid>
-                <a:gridCol w="2883835"/>
-                <a:gridCol w="3993002"/>
-                <a:gridCol w="4214835"/>
+                <a:gridCol w="3105668">
+                  <a:extLst>
+                    <a:ext uri="{9D8B030D-6E8A-4147-A177-3AD203B41FA5}">
+                      <a16:colId xmlns:a16="http://schemas.microsoft.com/office/drawing/2014/main" val="20000"/>
+                    </a:ext>
+                  </a:extLst>
+                </a:gridCol>
+                <a:gridCol w="4436669">
+                  <a:extLst>
+                    <a:ext uri="{9D8B030D-6E8A-4147-A177-3AD203B41FA5}">
+                      <a16:colId xmlns:a16="http://schemas.microsoft.com/office/drawing/2014/main" val="20001"/>
+                    </a:ext>
+                  </a:extLst>
+                </a:gridCol>
+                <a:gridCol w="3549335">
+                  <a:extLst>
+                    <a:ext uri="{9D8B030D-6E8A-4147-A177-3AD203B41FA5}">
+                      <a16:colId xmlns:a16="http://schemas.microsoft.com/office/drawing/2014/main" val="20002"/>
+                    </a:ext>
+                  </a:extLst>
+                </a:gridCol>
               </a:tblGrid>
-              <a:tr h="566928">
+              <a:tr h="530352">
                 <a:tc>
                   <a:txBody>
                     <a:bodyPr/>
                     <a:lstStyle/>
                     <a:p>
-                      <a:pPr algn="ctr" indent="0" marL="0">
+                      <a:pPr marL="0" indent="0" algn="ctr">
                         <a:buNone/>
                       </a:pPr>
                       <a:r>
@@ -2888,7 +2138,7 @@
                       </a:endParaRPr>
                     </a:p>
                   </a:txBody>
-                  <a:tcPr marL="91440" marR="91440" marT="45720" marB="45720" anchor="ctr">
+                  <a:tcPr anchor="ctr">
                     <a:lnL w="12700" cap="flat" cmpd="sng" algn="ctr">
                       <a:solidFill>
                         <a:srgbClr val="EEEEEE"/>
@@ -2935,7 +2185,7 @@
                     <a:bodyPr/>
                     <a:lstStyle/>
                     <a:p>
-                      <a:pPr algn="ctr" indent="0" marL="0">
+                      <a:pPr marL="0" indent="0" algn="ctr">
                         <a:buNone/>
                       </a:pPr>
                       <a:r>
@@ -2956,7 +2206,7 @@
                       </a:endParaRPr>
                     </a:p>
                   </a:txBody>
-                  <a:tcPr marL="91440" marR="91440" marT="45720" marB="45720" anchor="ctr">
+                  <a:tcPr anchor="ctr">
                     <a:lnL w="12700" cap="flat" cmpd="sng" algn="ctr">
                       <a:solidFill>
                         <a:srgbClr val="EEEEEE"/>
@@ -3003,7 +2253,7 @@
                     <a:bodyPr/>
                     <a:lstStyle/>
                     <a:p>
-                      <a:pPr algn="ctr" indent="0" marL="0">
+                      <a:pPr marL="0" indent="0" algn="ctr">
                         <a:buNone/>
                       </a:pPr>
                       <a:r>
@@ -3015,7 +2265,7 @@
                           <a:ea typeface="Arial" pitchFamily="34" charset="-122"/>
                           <a:cs typeface="Arial" pitchFamily="34" charset="-120"/>
                         </a:rPr>
-                        <a:t>Ejemplo de uso típico</a:t>
+                        <a:t>Ejemplo de uso</a:t>
                       </a:r>
                       <a:endParaRPr lang="en-US" sz="1400" dirty="0">
                         <a:latin typeface="Arial" charset="0"/>
@@ -3024,7 +2274,7 @@
                       </a:endParaRPr>
                     </a:p>
                   </a:txBody>
-                  <a:tcPr marL="91440" marR="91440" marT="45720" marB="45720" anchor="ctr">
+                  <a:tcPr anchor="ctr">
                     <a:lnL w="12700" cap="flat" cmpd="sng" algn="ctr">
                       <a:solidFill>
                         <a:srgbClr val="EEEEEE"/>
@@ -3066,14 +2316,19 @@
                     </a:solidFill>
                   </a:tcPr>
                 </a:tc>
+                <a:extLst>
+                  <a:ext uri="{0D108BD9-81ED-4DB2-BD59-A6C34878D82A}">
+                    <a16:rowId xmlns:a16="http://schemas.microsoft.com/office/drawing/2014/main" val="10000"/>
+                  </a:ext>
+                </a:extLst>
               </a:tr>
-              <a:tr h="566928">
+              <a:tr h="530352">
                 <a:tc>
                   <a:txBody>
                     <a:bodyPr/>
                     <a:lstStyle/>
                     <a:p>
-                      <a:pPr indent="0" marL="0">
+                      <a:pPr marL="0" indent="0">
                         <a:buNone/>
                       </a:pPr>
                       <a:r>
@@ -3094,7 +2349,7 @@
                       </a:endParaRPr>
                     </a:p>
                   </a:txBody>
-                  <a:tcPr marL="91440" marR="91440" marT="45720" marB="45720" anchor="ctr">
+                  <a:tcPr anchor="ctr">
                     <a:lnL w="12700" cap="flat" cmpd="sng" algn="ctr">
                       <a:solidFill>
                         <a:srgbClr val="EEEEEE"/>
@@ -3141,7 +2396,7 @@
                     <a:bodyPr/>
                     <a:lstStyle/>
                     <a:p>
-                      <a:pPr indent="0" marL="0">
+                      <a:pPr marL="0" indent="0">
                         <a:buNone/>
                       </a:pPr>
                       <a:r>
@@ -3162,7 +2417,7 @@
                       </a:endParaRPr>
                     </a:p>
                   </a:txBody>
-                  <a:tcPr marL="91440" marR="91440" marT="45720" marB="45720" anchor="ctr">
+                  <a:tcPr anchor="ctr">
                     <a:lnL w="12700" cap="flat" cmpd="sng" algn="ctr">
                       <a:solidFill>
                         <a:srgbClr val="EEEEEE"/>
@@ -3209,7 +2464,7 @@
                     <a:bodyPr/>
                     <a:lstStyle/>
                     <a:p>
-                      <a:pPr indent="0" marL="0">
+                      <a:pPr marL="0" indent="0">
                         <a:buNone/>
                       </a:pPr>
                       <a:r>
@@ -3221,7 +2476,7 @@
                           <a:ea typeface="Arial" pitchFamily="34" charset="-122"/>
                           <a:cs typeface="Arial" pitchFamily="34" charset="-120"/>
                         </a:rPr>
-                        <a:t>Instancia en desarrollo o pruebas</a:t>
+                        <a:t>Aplicación en desarrollo o pruebas</a:t>
                       </a:r>
                       <a:endParaRPr lang="en-US" sz="1300" dirty="0">
                         <a:latin typeface="Arial" charset="0"/>
@@ -3230,7 +2485,7 @@
                       </a:endParaRPr>
                     </a:p>
                   </a:txBody>
-                  <a:tcPr marL="91440" marR="91440" marT="45720" marB="45720" anchor="ctr">
+                  <a:tcPr anchor="ctr">
                     <a:lnL w="12700" cap="flat" cmpd="sng" algn="ctr">
                       <a:solidFill>
                         <a:srgbClr val="EEEEEE"/>
@@ -3272,14 +2527,19 @@
                     </a:solidFill>
                   </a:tcPr>
                 </a:tc>
+                <a:extLst>
+                  <a:ext uri="{0D108BD9-81ED-4DB2-BD59-A6C34878D82A}">
+                    <a16:rowId xmlns:a16="http://schemas.microsoft.com/office/drawing/2014/main" val="10001"/>
+                  </a:ext>
+                </a:extLst>
               </a:tr>
-              <a:tr h="566928">
+              <a:tr h="530352">
                 <a:tc>
                   <a:txBody>
                     <a:bodyPr/>
                     <a:lstStyle/>
                     <a:p>
-                      <a:pPr indent="0" marL="0">
+                      <a:pPr marL="0" indent="0">
                         <a:buNone/>
                       </a:pPr>
                       <a:r>
@@ -3300,7 +2560,7 @@
                       </a:endParaRPr>
                     </a:p>
                   </a:txBody>
-                  <a:tcPr marL="91440" marR="91440" marT="45720" marB="45720" anchor="ctr">
+                  <a:tcPr anchor="ctr">
                     <a:lnL w="12700" cap="flat" cmpd="sng" algn="ctr">
                       <a:solidFill>
                         <a:srgbClr val="EEEEEE"/>
@@ -3347,7 +2607,7 @@
                     <a:bodyPr/>
                     <a:lstStyle/>
                     <a:p>
-                      <a:pPr indent="0" marL="0">
+                      <a:pPr marL="0" indent="0">
                         <a:buNone/>
                       </a:pPr>
                       <a:r>
@@ -3368,7 +2628,7 @@
                       </a:endParaRPr>
                     </a:p>
                   </a:txBody>
-                  <a:tcPr marL="91440" marR="91440" marT="45720" marB="45720" anchor="ctr">
+                  <a:tcPr anchor="ctr">
                     <a:lnL w="12700" cap="flat" cmpd="sng" algn="ctr">
                       <a:solidFill>
                         <a:srgbClr val="EEEEEE"/>
@@ -3415,7 +2675,7 @@
                     <a:bodyPr/>
                     <a:lstStyle/>
                     <a:p>
-                      <a:pPr indent="0" marL="0">
+                      <a:pPr marL="0" indent="0">
                         <a:buNone/>
                       </a:pPr>
                       <a:r>
@@ -3427,7 +2687,7 @@
                           <a:ea typeface="Arial" pitchFamily="34" charset="-122"/>
                           <a:cs typeface="Arial" pitchFamily="34" charset="-120"/>
                         </a:rPr>
-                        <a:t>Instancia en producción</a:t>
+                        <a:t>Aplicación en producción</a:t>
                       </a:r>
                       <a:endParaRPr lang="en-US" sz="1300" dirty="0">
                         <a:latin typeface="Arial" charset="0"/>
@@ -3436,7 +2696,7 @@
                       </a:endParaRPr>
                     </a:p>
                   </a:txBody>
-                  <a:tcPr marL="91440" marR="91440" marT="45720" marB="45720" anchor="ctr">
+                  <a:tcPr anchor="ctr">
                     <a:lnL w="12700" cap="flat" cmpd="sng" algn="ctr">
                       <a:solidFill>
                         <a:srgbClr val="EEEEEE"/>
@@ -3478,14 +2738,19 @@
                     </a:solidFill>
                   </a:tcPr>
                 </a:tc>
+                <a:extLst>
+                  <a:ext uri="{0D108BD9-81ED-4DB2-BD59-A6C34878D82A}">
+                    <a16:rowId xmlns:a16="http://schemas.microsoft.com/office/drawing/2014/main" val="10002"/>
+                  </a:ext>
+                </a:extLst>
               </a:tr>
-              <a:tr h="566928">
+              <a:tr h="530352">
                 <a:tc>
                   <a:txBody>
                     <a:bodyPr/>
                     <a:lstStyle/>
                     <a:p>
-                      <a:pPr indent="0" marL="0">
+                      <a:pPr marL="0" indent="0">
                         <a:buNone/>
                       </a:pPr>
                       <a:r>
@@ -3506,7 +2771,7 @@
                       </a:endParaRPr>
                     </a:p>
                   </a:txBody>
-                  <a:tcPr marL="91440" marR="91440" marT="45720" marB="45720" anchor="ctr">
+                  <a:tcPr anchor="ctr">
                     <a:lnL w="12700" cap="flat" cmpd="sng" algn="ctr">
                       <a:solidFill>
                         <a:srgbClr val="EEEEEE"/>
@@ -3553,7 +2818,7 @@
                     <a:bodyPr/>
                     <a:lstStyle/>
                     <a:p>
-                      <a:pPr indent="0" marL="0">
+                      <a:pPr marL="0" indent="0">
                         <a:buNone/>
                       </a:pPr>
                       <a:r>
@@ -3574,7 +2839,7 @@
                       </a:endParaRPr>
                     </a:p>
                   </a:txBody>
-                  <a:tcPr marL="91440" marR="91440" marT="45720" marB="45720" anchor="ctr">
+                  <a:tcPr anchor="ctr">
                     <a:lnL w="12700" cap="flat" cmpd="sng" algn="ctr">
                       <a:solidFill>
                         <a:srgbClr val="EEEEEE"/>
@@ -3621,7 +2886,7 @@
                     <a:bodyPr/>
                     <a:lstStyle/>
                     <a:p>
-                      <a:pPr indent="0" marL="0">
+                      <a:pPr marL="0" indent="0">
                         <a:buNone/>
                       </a:pPr>
                       <a:r>
@@ -3633,7 +2898,7 @@
                           <a:ea typeface="Arial" pitchFamily="34" charset="-122"/>
                           <a:cs typeface="Arial" pitchFamily="34" charset="-120"/>
                         </a:rPr>
-                        <a:t>Procesamiento intensivo (fuera del módulo)</a:t>
+                        <a:t>Procesamiento intensivo</a:t>
                       </a:r>
                       <a:endParaRPr lang="en-US" sz="1300" dirty="0">
                         <a:latin typeface="Arial" charset="0"/>
@@ -3642,7 +2907,7 @@
                       </a:endParaRPr>
                     </a:p>
                   </a:txBody>
-                  <a:tcPr marL="91440" marR="91440" marT="45720" marB="45720" anchor="ctr">
+                  <a:tcPr anchor="ctr">
                     <a:lnL w="12700" cap="flat" cmpd="sng" algn="ctr">
                       <a:solidFill>
                         <a:srgbClr val="EEEEEE"/>
@@ -3684,14 +2949,19 @@
                     </a:solidFill>
                   </a:tcPr>
                 </a:tc>
+                <a:extLst>
+                  <a:ext uri="{0D108BD9-81ED-4DB2-BD59-A6C34878D82A}">
+                    <a16:rowId xmlns:a16="http://schemas.microsoft.com/office/drawing/2014/main" val="10003"/>
+                  </a:ext>
+                </a:extLst>
               </a:tr>
-              <a:tr h="566928">
+              <a:tr h="530352">
                 <a:tc>
                   <a:txBody>
                     <a:bodyPr/>
                     <a:lstStyle/>
                     <a:p>
-                      <a:pPr indent="0" marL="0">
+                      <a:pPr marL="0" indent="0">
                         <a:buNone/>
                       </a:pPr>
                       <a:r>
@@ -3712,7 +2982,7 @@
                       </a:endParaRPr>
                     </a:p>
                   </a:txBody>
-                  <a:tcPr marL="91440" marR="91440" marT="45720" marB="45720" anchor="ctr">
+                  <a:tcPr anchor="ctr">
                     <a:lnL w="12700" cap="flat" cmpd="sng" algn="ctr">
                       <a:solidFill>
                         <a:srgbClr val="EEEEEE"/>
@@ -3759,7 +3029,7 @@
                     <a:bodyPr/>
                     <a:lstStyle/>
                     <a:p>
-                      <a:pPr indent="0" marL="0">
+                      <a:pPr marL="0" indent="0">
                         <a:buNone/>
                       </a:pPr>
                       <a:r>
@@ -3780,7 +3050,7 @@
                       </a:endParaRPr>
                     </a:p>
                   </a:txBody>
-                  <a:tcPr marL="91440" marR="91440" marT="45720" marB="45720" anchor="ctr">
+                  <a:tcPr anchor="ctr">
                     <a:lnL w="12700" cap="flat" cmpd="sng" algn="ctr">
                       <a:solidFill>
                         <a:srgbClr val="EEEEEE"/>
@@ -3827,7 +3097,7 @@
                     <a:bodyPr/>
                     <a:lstStyle/>
                     <a:p>
-                      <a:pPr indent="0" marL="0">
+                      <a:pPr marL="0" indent="0">
                         <a:buNone/>
                       </a:pPr>
                       <a:r>
@@ -3839,7 +3109,7 @@
                           <a:ea typeface="Arial" pitchFamily="34" charset="-122"/>
                           <a:cs typeface="Arial" pitchFamily="34" charset="-120"/>
                         </a:rPr>
-                        <a:t>Bases de datos en memoria (fuera del módulo)</a:t>
+                        <a:t>Bases de datos en memoria</a:t>
                       </a:r>
                       <a:endParaRPr lang="en-US" sz="1300" dirty="0">
                         <a:latin typeface="Arial" charset="0"/>
@@ -3848,7 +3118,7 @@
                       </a:endParaRPr>
                     </a:p>
                   </a:txBody>
-                  <a:tcPr marL="91440" marR="91440" marT="45720" marB="45720" anchor="ctr">
+                  <a:tcPr anchor="ctr">
                     <a:lnL w="12700" cap="flat" cmpd="sng" algn="ctr">
                       <a:solidFill>
                         <a:srgbClr val="EEEEEE"/>
@@ -3890,11 +3160,105 @@
                     </a:solidFill>
                   </a:tcPr>
                 </a:tc>
+                <a:extLst>
+                  <a:ext uri="{0D108BD9-81ED-4DB2-BD59-A6C34878D82A}">
+                    <a16:rowId xmlns:a16="http://schemas.microsoft.com/office/drawing/2014/main" val="10004"/>
+                  </a:ext>
+                </a:extLst>
               </a:tr>
             </a:tbl>
           </a:graphicData>
         </a:graphic>
       </p:graphicFrame>
+      <p:sp>
+        <p:nvSpPr>
+          <p:cNvPr id="8" name="Shape 5"/>
+          <p:cNvSpPr/>
+          <p:nvPr/>
+        </p:nvSpPr>
+        <p:spPr>
+          <a:xfrm>
+            <a:off x="548640" y="5255931"/>
+            <a:ext cx="11091672" cy="914400"/>
+          </a:xfrm>
+          <a:prstGeom prst="roundRect">
+            <a:avLst/>
+          </a:prstGeom>
+          <a:solidFill>
+            <a:srgbClr val="FFF8E1"/>
+          </a:solidFill>
+          <a:ln w="28575">
+            <a:solidFill>
+              <a:srgbClr val="FFA000"/>
+            </a:solidFill>
+            <a:prstDash val="solid"/>
+          </a:ln>
+        </p:spPr>
+        <p:txBody>
+          <a:bodyPr/>
+          <a:lstStyle/>
+          <a:p>
+            <a:endParaRPr lang="es-ES"/>
+          </a:p>
+        </p:txBody>
+      </p:sp>
+      <p:sp>
+        <p:nvSpPr>
+          <p:cNvPr id="9" name="Text 6"/>
+          <p:cNvSpPr/>
+          <p:nvPr/>
+        </p:nvSpPr>
+        <p:spPr>
+          <a:xfrm>
+            <a:off x="822960" y="5365659"/>
+            <a:ext cx="10543032" cy="694944"/>
+          </a:xfrm>
+          <a:prstGeom prst="rect">
+            <a:avLst/>
+          </a:prstGeom>
+          <a:noFill/>
+          <a:ln/>
+        </p:spPr>
+        <p:txBody>
+          <a:bodyPr wrap="square" rtlCol="0" anchor="t"/>
+          <a:lstStyle/>
+          <a:p>
+            <a:pPr marL="0" indent="0">
+              <a:buNone/>
+            </a:pPr>
+            <a:r>
+              <a:rPr lang="en-US" sz="1500" b="1" dirty="0">
+                <a:solidFill>
+                  <a:srgbClr val="1A237E"/>
+                </a:solidFill>
+                <a:latin typeface="Arial" pitchFamily="34" charset="0"/>
+                <a:ea typeface="Arial" pitchFamily="34" charset="-122"/>
+                <a:cs typeface="Arial" pitchFamily="34" charset="-120"/>
+              </a:rPr>
+              <a:t>Un error frecuente: la letra no decide solo la CPU
+</a:t>
+            </a:r>
+            <a:endParaRPr lang="en-US" sz="1500" dirty="0"/>
+          </a:p>
+          <a:p>
+            <a:pPr marL="0" indent="0">
+              <a:buNone/>
+            </a:pPr>
+            <a:r>
+              <a:rPr lang="en-US" sz="1400" dirty="0">
+                <a:solidFill>
+                  <a:srgbClr val="212121"/>
+                </a:solidFill>
+                <a:latin typeface="Arial" pitchFamily="34" charset="0"/>
+                <a:ea typeface="Arial" pitchFamily="34" charset="-122"/>
+                <a:cs typeface="Arial" pitchFamily="34" charset="-120"/>
+              </a:rPr>
+              <a:t>Los dos números (vCPU y memoria) dependen de la combinación de las dos partes del nombre, no de una por separado.</a:t>
+            </a:r>
+            <a:endParaRPr lang="en-US" sz="1500" dirty="0"/>
+          </a:p>
+        </p:txBody>
+      </p:sp>
     </p:spTree>
   </p:cSld>
   <p:clrMapOvr>
@@ -3944,6 +3308,13 @@
             <a:prstDash val="solid"/>
           </a:ln>
         </p:spPr>
+        <p:txBody>
+          <a:bodyPr/>
+          <a:lstStyle/>
+          <a:p>
+            <a:endParaRPr lang="es-ES"/>
+          </a:p>
+        </p:txBody>
       </p:sp>
       <p:sp>
         <p:nvSpPr>
@@ -3966,7 +3337,7 @@
           <a:bodyPr wrap="square" rtlCol="0" anchor="ctr"/>
           <a:lstStyle/>
           <a:p>
-            <a:pPr indent="0" marL="0">
+            <a:pPr marL="0" indent="0">
               <a:buNone/>
             </a:pPr>
             <a:r>
@@ -3978,7 +3349,7 @@
                 <a:ea typeface="Arial" pitchFamily="34" charset="-122"/>
                 <a:cs typeface="Arial" pitchFamily="34" charset="-120"/>
               </a:rPr>
-              <a:t>El tamaño no es «solo memoria»</a:t>
+              <a:t>La familia t3, con números reales</a:t>
             </a:r>
             <a:endParaRPr lang="en-US" sz="2400" dirty="0"/>
           </a:p>
@@ -4005,7 +3376,7 @@
           <a:bodyPr wrap="square" rtlCol="0" anchor="ctr"/>
           <a:lstStyle/>
           <a:p>
-            <a:pPr algn="r" indent="0" marL="0">
+            <a:pPr marL="0" indent="0" algn="r">
               <a:buNone/>
             </a:pPr>
             <a:r>
@@ -4020,45 +3391,6 @@
               <a:t>Introducción a la Nube Pública — Tema 2: Máquinas virtuales</a:t>
             </a:r>
             <a:endParaRPr lang="en-US" sz="1100" dirty="0"/>
-          </a:p>
-        </p:txBody>
-      </p:sp>
-      <p:sp>
-        <p:nvSpPr>
-          <p:cNvPr id="5" name="Text 3"/>
-          <p:cNvSpPr/>
-          <p:nvPr/>
-        </p:nvSpPr>
-        <p:spPr>
-          <a:xfrm>
-            <a:off x="548640" y="1097280"/>
-            <a:ext cx="11091672" cy="822960"/>
-          </a:xfrm>
-          <a:prstGeom prst="rect">
-            <a:avLst/>
-          </a:prstGeom>
-          <a:noFill/>
-          <a:ln/>
-        </p:spPr>
-        <p:txBody>
-          <a:bodyPr wrap="square" rtlCol="0" anchor="t"/>
-          <a:lstStyle/>
-          <a:p>
-            <a:pPr indent="0" marL="0">
-              <a:buNone/>
-            </a:pPr>
-            <a:r>
-              <a:rPr lang="en-US" sz="1700" dirty="0">
-                <a:solidFill>
-                  <a:srgbClr val="212121"/>
-                </a:solidFill>
-                <a:latin typeface="Arial" pitchFamily="34" charset="0"/>
-                <a:ea typeface="Arial" pitchFamily="34" charset="-122"/>
-                <a:cs typeface="Arial" pitchFamily="34" charset="-120"/>
-              </a:rPr>
-              <a:t>Es un error frecuente pensar que la letra decide la CPU y el tamaño decide la memoria. Con números reales de la familia t3 (la que vas a usar en este módulo):</a:t>
-            </a:r>
-            <a:endParaRPr lang="en-US" sz="1700" dirty="0"/>
           </a:p>
         </p:txBody>
       </p:sp>
@@ -4077,29 +3409,47 @@
           </p:nvPr>
         </p:nvGraphicFramePr>
         <p:xfrm>
-          <a:off x="548640" y="2057400"/>
-          <a:ext cx="11091672" cy="914400"/>
+          <a:off x="548640" y="1188720"/>
+          <a:ext cx="11091672" cy="2688336"/>
         </p:xfrm>
         <a:graphic>
           <a:graphicData uri="http://schemas.openxmlformats.org/drawingml/2006/table">
             <a:tbl>
               <a:tblPr/>
               <a:tblGrid>
-                <a:gridCol w="4436669"/>
-                <a:gridCol w="3327502"/>
-                <a:gridCol w="3327502"/>
+                <a:gridCol w="3771168">
+                  <a:extLst>
+                    <a:ext uri="{9D8B030D-6E8A-4147-A177-3AD203B41FA5}">
+                      <a16:colId xmlns:a16="http://schemas.microsoft.com/office/drawing/2014/main" val="20000"/>
+                    </a:ext>
+                  </a:extLst>
+                </a:gridCol>
+                <a:gridCol w="3327502">
+                  <a:extLst>
+                    <a:ext uri="{9D8B030D-6E8A-4147-A177-3AD203B41FA5}">
+                      <a16:colId xmlns:a16="http://schemas.microsoft.com/office/drawing/2014/main" val="20001"/>
+                    </a:ext>
+                  </a:extLst>
+                </a:gridCol>
+                <a:gridCol w="3993002">
+                  <a:extLst>
+                    <a:ext uri="{9D8B030D-6E8A-4147-A177-3AD203B41FA5}">
+                      <a16:colId xmlns:a16="http://schemas.microsoft.com/office/drawing/2014/main" val="20002"/>
+                    </a:ext>
+                  </a:extLst>
+                </a:gridCol>
               </a:tblGrid>
-              <a:tr h="420624">
+              <a:tr h="384048">
                 <a:tc>
                   <a:txBody>
                     <a:bodyPr/>
                     <a:lstStyle/>
                     <a:p>
-                      <a:pPr algn="ctr" indent="0" marL="0">
+                      <a:pPr marL="0" indent="0" algn="ctr">
                         <a:buNone/>
                       </a:pPr>
                       <a:r>
-                        <a:rPr lang="en-US" sz="1500" b="1" dirty="0">
+                        <a:rPr lang="en-US" sz="1400" b="1" dirty="0">
                           <a:solidFill>
                             <a:srgbClr val="FFFFFF"/>
                           </a:solidFill>
@@ -4109,14 +3459,14 @@
                         </a:rPr>
                         <a:t>Tipo</a:t>
                       </a:r>
-                      <a:endParaRPr lang="en-US" sz="1500" dirty="0">
+                      <a:endParaRPr lang="en-US" sz="1400" dirty="0">
                         <a:latin typeface="Arial" charset="0"/>
                         <a:ea typeface="Arial" charset="0"/>
                         <a:cs typeface="Arial" charset="0"/>
                       </a:endParaRPr>
                     </a:p>
                   </a:txBody>
-                  <a:tcPr marL="91440" marR="91440" marT="45720" marB="45720" anchor="ctr">
+                  <a:tcPr anchor="ctr">
                     <a:lnL w="12700" cap="flat" cmpd="sng" algn="ctr">
                       <a:solidFill>
                         <a:srgbClr val="EEEEEE"/>
@@ -4163,11 +3513,11 @@
                     <a:bodyPr/>
                     <a:lstStyle/>
                     <a:p>
-                      <a:pPr algn="ctr" indent="0" marL="0">
+                      <a:pPr marL="0" indent="0" algn="ctr">
                         <a:buNone/>
                       </a:pPr>
                       <a:r>
-                        <a:rPr lang="en-US" sz="1500" b="1" dirty="0">
+                        <a:rPr lang="en-US" sz="1400" b="1" dirty="0">
                           <a:solidFill>
                             <a:srgbClr val="FFFFFF"/>
                           </a:solidFill>
@@ -4177,14 +3527,14 @@
                         </a:rPr>
                         <a:t>vCPU</a:t>
                       </a:r>
-                      <a:endParaRPr lang="en-US" sz="1500" dirty="0">
+                      <a:endParaRPr lang="en-US" sz="1400" dirty="0">
                         <a:latin typeface="Arial" charset="0"/>
                         <a:ea typeface="Arial" charset="0"/>
                         <a:cs typeface="Arial" charset="0"/>
                       </a:endParaRPr>
                     </a:p>
                   </a:txBody>
-                  <a:tcPr marL="91440" marR="91440" marT="45720" marB="45720" anchor="ctr">
+                  <a:tcPr anchor="ctr">
                     <a:lnL w="12700" cap="flat" cmpd="sng" algn="ctr">
                       <a:solidFill>
                         <a:srgbClr val="EEEEEE"/>
@@ -4231,11 +3581,11 @@
                     <a:bodyPr/>
                     <a:lstStyle/>
                     <a:p>
-                      <a:pPr algn="ctr" indent="0" marL="0">
+                      <a:pPr marL="0" indent="0" algn="ctr">
                         <a:buNone/>
                       </a:pPr>
                       <a:r>
-                        <a:rPr lang="en-US" sz="1500" b="1" dirty="0">
+                        <a:rPr lang="en-US" sz="1400" b="1" dirty="0">
                           <a:solidFill>
                             <a:srgbClr val="FFFFFF"/>
                           </a:solidFill>
@@ -4245,14 +3595,14 @@
                         </a:rPr>
                         <a:t>Memoria RAM</a:t>
                       </a:r>
-                      <a:endParaRPr lang="en-US" sz="1500" dirty="0">
+                      <a:endParaRPr lang="en-US" sz="1400" dirty="0">
                         <a:latin typeface="Arial" charset="0"/>
                         <a:ea typeface="Arial" charset="0"/>
                         <a:cs typeface="Arial" charset="0"/>
                       </a:endParaRPr>
                     </a:p>
                   </a:txBody>
-                  <a:tcPr marL="91440" marR="91440" marT="45720" marB="45720" anchor="ctr">
+                  <a:tcPr anchor="ctr">
                     <a:lnL w="12700" cap="flat" cmpd="sng" algn="ctr">
                       <a:solidFill>
                         <a:srgbClr val="EEEEEE"/>
@@ -4294,18 +3644,23 @@
                     </a:solidFill>
                   </a:tcPr>
                 </a:tc>
+                <a:extLst>
+                  <a:ext uri="{0D108BD9-81ED-4DB2-BD59-A6C34878D82A}">
+                    <a16:rowId xmlns:a16="http://schemas.microsoft.com/office/drawing/2014/main" val="10000"/>
+                  </a:ext>
+                </a:extLst>
               </a:tr>
-              <a:tr h="420624">
+              <a:tr h="384048">
                 <a:tc>
                   <a:txBody>
                     <a:bodyPr/>
                     <a:lstStyle/>
                     <a:p>
-                      <a:pPr indent="0" marL="0">
+                      <a:pPr marL="0" indent="0">
                         <a:buNone/>
                       </a:pPr>
                       <a:r>
-                        <a:rPr lang="en-US" sz="1400" b="1" dirty="0">
+                        <a:rPr lang="en-US" sz="1300" b="1" dirty="0">
                           <a:solidFill>
                             <a:srgbClr val="212121"/>
                           </a:solidFill>
@@ -4315,14 +3670,14 @@
                         </a:rPr>
                         <a:t>t3.nano</a:t>
                       </a:r>
-                      <a:endParaRPr lang="en-US" sz="1400" dirty="0">
+                      <a:endParaRPr lang="en-US" sz="1300" dirty="0">
                         <a:latin typeface="Arial" charset="0"/>
                         <a:ea typeface="Arial" charset="0"/>
                         <a:cs typeface="Arial" charset="0"/>
                       </a:endParaRPr>
                     </a:p>
                   </a:txBody>
-                  <a:tcPr marL="91440" marR="91440" marT="45720" marB="45720" anchor="ctr">
+                  <a:tcPr anchor="ctr">
                     <a:lnL w="12700" cap="flat" cmpd="sng" algn="ctr">
                       <a:solidFill>
                         <a:srgbClr val="EEEEEE"/>
@@ -4369,11 +3724,11 @@
                     <a:bodyPr/>
                     <a:lstStyle/>
                     <a:p>
-                      <a:pPr indent="0" marL="0">
+                      <a:pPr marL="0" indent="0">
                         <a:buNone/>
                       </a:pPr>
                       <a:r>
-                        <a:rPr lang="en-US" sz="1400" dirty="0">
+                        <a:rPr lang="en-US" sz="1300" dirty="0">
                           <a:solidFill>
                             <a:srgbClr val="212121"/>
                           </a:solidFill>
@@ -4383,14 +3738,14 @@
                         </a:rPr>
                         <a:t>2</a:t>
                       </a:r>
-                      <a:endParaRPr lang="en-US" sz="1400" dirty="0">
+                      <a:endParaRPr lang="en-US" sz="1300" dirty="0">
                         <a:latin typeface="Arial" charset="0"/>
                         <a:ea typeface="Arial" charset="0"/>
                         <a:cs typeface="Arial" charset="0"/>
                       </a:endParaRPr>
                     </a:p>
                   </a:txBody>
-                  <a:tcPr marL="91440" marR="91440" marT="45720" marB="45720" anchor="ctr">
+                  <a:tcPr anchor="ctr">
                     <a:lnL w="12700" cap="flat" cmpd="sng" algn="ctr">
                       <a:solidFill>
                         <a:srgbClr val="EEEEEE"/>
@@ -4437,11 +3792,11 @@
                     <a:bodyPr/>
                     <a:lstStyle/>
                     <a:p>
-                      <a:pPr indent="0" marL="0">
+                      <a:pPr marL="0" indent="0">
                         <a:buNone/>
                       </a:pPr>
                       <a:r>
-                        <a:rPr lang="en-US" sz="1400" dirty="0">
+                        <a:rPr lang="en-US" sz="1300" dirty="0">
                           <a:solidFill>
                             <a:srgbClr val="212121"/>
                           </a:solidFill>
@@ -4451,14 +3806,14 @@
                         </a:rPr>
                         <a:t>0,5 GiB</a:t>
                       </a:r>
-                      <a:endParaRPr lang="en-US" sz="1400" dirty="0">
+                      <a:endParaRPr lang="en-US" sz="1300" dirty="0">
                         <a:latin typeface="Arial" charset="0"/>
                         <a:ea typeface="Arial" charset="0"/>
                         <a:cs typeface="Arial" charset="0"/>
                       </a:endParaRPr>
                     </a:p>
                   </a:txBody>
-                  <a:tcPr marL="91440" marR="91440" marT="45720" marB="45720" anchor="ctr">
+                  <a:tcPr anchor="ctr">
                     <a:lnL w="12700" cap="flat" cmpd="sng" algn="ctr">
                       <a:solidFill>
                         <a:srgbClr val="EEEEEE"/>
@@ -4500,18 +3855,23 @@
                     </a:solidFill>
                   </a:tcPr>
                 </a:tc>
+                <a:extLst>
+                  <a:ext uri="{0D108BD9-81ED-4DB2-BD59-A6C34878D82A}">
+                    <a16:rowId xmlns:a16="http://schemas.microsoft.com/office/drawing/2014/main" val="10001"/>
+                  </a:ext>
+                </a:extLst>
               </a:tr>
-              <a:tr h="420624">
+              <a:tr h="384048">
                 <a:tc>
                   <a:txBody>
                     <a:bodyPr/>
                     <a:lstStyle/>
                     <a:p>
-                      <a:pPr indent="0" marL="0">
+                      <a:pPr marL="0" indent="0">
                         <a:buNone/>
                       </a:pPr>
                       <a:r>
-                        <a:rPr lang="en-US" sz="1400" b="1" dirty="0">
+                        <a:rPr lang="en-US" sz="1300" b="1" dirty="0">
                           <a:solidFill>
                             <a:srgbClr val="212121"/>
                           </a:solidFill>
@@ -4521,14 +3881,14 @@
                         </a:rPr>
                         <a:t>t3.micro</a:t>
                       </a:r>
-                      <a:endParaRPr lang="en-US" sz="1400" dirty="0">
+                      <a:endParaRPr lang="en-US" sz="1300" dirty="0">
                         <a:latin typeface="Arial" charset="0"/>
                         <a:ea typeface="Arial" charset="0"/>
                         <a:cs typeface="Arial" charset="0"/>
                       </a:endParaRPr>
                     </a:p>
                   </a:txBody>
-                  <a:tcPr marL="91440" marR="91440" marT="45720" marB="45720" anchor="ctr">
+                  <a:tcPr anchor="ctr">
                     <a:lnL w="12700" cap="flat" cmpd="sng" algn="ctr">
                       <a:solidFill>
                         <a:srgbClr val="EEEEEE"/>
@@ -4575,11 +3935,11 @@
                     <a:bodyPr/>
                     <a:lstStyle/>
                     <a:p>
-                      <a:pPr indent="0" marL="0">
+                      <a:pPr marL="0" indent="0">
                         <a:buNone/>
                       </a:pPr>
                       <a:r>
-                        <a:rPr lang="en-US" sz="1400" dirty="0">
+                        <a:rPr lang="en-US" sz="1300" dirty="0">
                           <a:solidFill>
                             <a:srgbClr val="212121"/>
                           </a:solidFill>
@@ -4589,14 +3949,14 @@
                         </a:rPr>
                         <a:t>2</a:t>
                       </a:r>
-                      <a:endParaRPr lang="en-US" sz="1400" dirty="0">
+                      <a:endParaRPr lang="en-US" sz="1300" dirty="0">
                         <a:latin typeface="Arial" charset="0"/>
                         <a:ea typeface="Arial" charset="0"/>
                         <a:cs typeface="Arial" charset="0"/>
                       </a:endParaRPr>
                     </a:p>
                   </a:txBody>
-                  <a:tcPr marL="91440" marR="91440" marT="45720" marB="45720" anchor="ctr">
+                  <a:tcPr anchor="ctr">
                     <a:lnL w="12700" cap="flat" cmpd="sng" algn="ctr">
                       <a:solidFill>
                         <a:srgbClr val="EEEEEE"/>
@@ -4643,11 +4003,11 @@
                     <a:bodyPr/>
                     <a:lstStyle/>
                     <a:p>
-                      <a:pPr indent="0" marL="0">
+                      <a:pPr marL="0" indent="0">
                         <a:buNone/>
                       </a:pPr>
                       <a:r>
-                        <a:rPr lang="en-US" sz="1400" dirty="0">
+                        <a:rPr lang="en-US" sz="1300" dirty="0">
                           <a:solidFill>
                             <a:srgbClr val="212121"/>
                           </a:solidFill>
@@ -4657,14 +4017,14 @@
                         </a:rPr>
                         <a:t>1 GiB</a:t>
                       </a:r>
-                      <a:endParaRPr lang="en-US" sz="1400" dirty="0">
+                      <a:endParaRPr lang="en-US" sz="1300" dirty="0">
                         <a:latin typeface="Arial" charset="0"/>
                         <a:ea typeface="Arial" charset="0"/>
                         <a:cs typeface="Arial" charset="0"/>
                       </a:endParaRPr>
                     </a:p>
                   </a:txBody>
-                  <a:tcPr marL="91440" marR="91440" marT="45720" marB="45720" anchor="ctr">
+                  <a:tcPr anchor="ctr">
                     <a:lnL w="12700" cap="flat" cmpd="sng" algn="ctr">
                       <a:solidFill>
                         <a:srgbClr val="EEEEEE"/>
@@ -4706,18 +4066,23 @@
                     </a:solidFill>
                   </a:tcPr>
                 </a:tc>
+                <a:extLst>
+                  <a:ext uri="{0D108BD9-81ED-4DB2-BD59-A6C34878D82A}">
+                    <a16:rowId xmlns:a16="http://schemas.microsoft.com/office/drawing/2014/main" val="10002"/>
+                  </a:ext>
+                </a:extLst>
               </a:tr>
-              <a:tr h="420624">
+              <a:tr h="384048">
                 <a:tc>
                   <a:txBody>
                     <a:bodyPr/>
                     <a:lstStyle/>
                     <a:p>
-                      <a:pPr indent="0" marL="0">
+                      <a:pPr marL="0" indent="0">
                         <a:buNone/>
                       </a:pPr>
                       <a:r>
-                        <a:rPr lang="en-US" sz="1400" b="1" dirty="0">
+                        <a:rPr lang="en-US" sz="1300" b="1" dirty="0">
                           <a:solidFill>
                             <a:srgbClr val="212121"/>
                           </a:solidFill>
@@ -4727,14 +4092,14 @@
                         </a:rPr>
                         <a:t>t3.small</a:t>
                       </a:r>
-                      <a:endParaRPr lang="en-US" sz="1400" dirty="0">
+                      <a:endParaRPr lang="en-US" sz="1300" dirty="0">
                         <a:latin typeface="Arial" charset="0"/>
                         <a:ea typeface="Arial" charset="0"/>
                         <a:cs typeface="Arial" charset="0"/>
                       </a:endParaRPr>
                     </a:p>
                   </a:txBody>
-                  <a:tcPr marL="91440" marR="91440" marT="45720" marB="45720" anchor="ctr">
+                  <a:tcPr anchor="ctr">
                     <a:lnL w="12700" cap="flat" cmpd="sng" algn="ctr">
                       <a:solidFill>
                         <a:srgbClr val="EEEEEE"/>
@@ -4781,11 +4146,11 @@
                     <a:bodyPr/>
                     <a:lstStyle/>
                     <a:p>
-                      <a:pPr indent="0" marL="0">
+                      <a:pPr marL="0" indent="0">
                         <a:buNone/>
                       </a:pPr>
                       <a:r>
-                        <a:rPr lang="en-US" sz="1400" dirty="0">
+                        <a:rPr lang="en-US" sz="1300" dirty="0">
                           <a:solidFill>
                             <a:srgbClr val="212121"/>
                           </a:solidFill>
@@ -4795,14 +4160,14 @@
                         </a:rPr>
                         <a:t>2</a:t>
                       </a:r>
-                      <a:endParaRPr lang="en-US" sz="1400" dirty="0">
+                      <a:endParaRPr lang="en-US" sz="1300" dirty="0">
                         <a:latin typeface="Arial" charset="0"/>
                         <a:ea typeface="Arial" charset="0"/>
                         <a:cs typeface="Arial" charset="0"/>
                       </a:endParaRPr>
                     </a:p>
                   </a:txBody>
-                  <a:tcPr marL="91440" marR="91440" marT="45720" marB="45720" anchor="ctr">
+                  <a:tcPr anchor="ctr">
                     <a:lnL w="12700" cap="flat" cmpd="sng" algn="ctr">
                       <a:solidFill>
                         <a:srgbClr val="EEEEEE"/>
@@ -4849,11 +4214,11 @@
                     <a:bodyPr/>
                     <a:lstStyle/>
                     <a:p>
-                      <a:pPr indent="0" marL="0">
+                      <a:pPr marL="0" indent="0">
                         <a:buNone/>
                       </a:pPr>
                       <a:r>
-                        <a:rPr lang="en-US" sz="1400" dirty="0">
+                        <a:rPr lang="en-US" sz="1300" dirty="0">
                           <a:solidFill>
                             <a:srgbClr val="212121"/>
                           </a:solidFill>
@@ -4863,14 +4228,14 @@
                         </a:rPr>
                         <a:t>2 GiB</a:t>
                       </a:r>
-                      <a:endParaRPr lang="en-US" sz="1400" dirty="0">
+                      <a:endParaRPr lang="en-US" sz="1300" dirty="0">
                         <a:latin typeface="Arial" charset="0"/>
                         <a:ea typeface="Arial" charset="0"/>
                         <a:cs typeface="Arial" charset="0"/>
                       </a:endParaRPr>
                     </a:p>
                   </a:txBody>
-                  <a:tcPr marL="91440" marR="91440" marT="45720" marB="45720" anchor="ctr">
+                  <a:tcPr anchor="ctr">
                     <a:lnL w="12700" cap="flat" cmpd="sng" algn="ctr">
                       <a:solidFill>
                         <a:srgbClr val="EEEEEE"/>
@@ -4912,18 +4277,23 @@
                     </a:solidFill>
                   </a:tcPr>
                 </a:tc>
+                <a:extLst>
+                  <a:ext uri="{0D108BD9-81ED-4DB2-BD59-A6C34878D82A}">
+                    <a16:rowId xmlns:a16="http://schemas.microsoft.com/office/drawing/2014/main" val="10003"/>
+                  </a:ext>
+                </a:extLst>
               </a:tr>
-              <a:tr h="420624">
+              <a:tr h="384048">
                 <a:tc>
                   <a:txBody>
                     <a:bodyPr/>
                     <a:lstStyle/>
                     <a:p>
-                      <a:pPr indent="0" marL="0">
+                      <a:pPr marL="0" indent="0">
                         <a:buNone/>
                       </a:pPr>
                       <a:r>
-                        <a:rPr lang="en-US" sz="1400" b="1" dirty="0">
+                        <a:rPr lang="en-US" sz="1300" b="1" dirty="0">
                           <a:solidFill>
                             <a:srgbClr val="212121"/>
                           </a:solidFill>
@@ -4933,14 +4303,14 @@
                         </a:rPr>
                         <a:t>t3.medium</a:t>
                       </a:r>
-                      <a:endParaRPr lang="en-US" sz="1400" dirty="0">
+                      <a:endParaRPr lang="en-US" sz="1300" dirty="0">
                         <a:latin typeface="Arial" charset="0"/>
                         <a:ea typeface="Arial" charset="0"/>
                         <a:cs typeface="Arial" charset="0"/>
                       </a:endParaRPr>
                     </a:p>
                   </a:txBody>
-                  <a:tcPr marL="91440" marR="91440" marT="45720" marB="45720" anchor="ctr">
+                  <a:tcPr anchor="ctr">
                     <a:lnL w="12700" cap="flat" cmpd="sng" algn="ctr">
                       <a:solidFill>
                         <a:srgbClr val="EEEEEE"/>
@@ -4987,11 +4357,11 @@
                     <a:bodyPr/>
                     <a:lstStyle/>
                     <a:p>
-                      <a:pPr indent="0" marL="0">
+                      <a:pPr marL="0" indent="0">
                         <a:buNone/>
                       </a:pPr>
                       <a:r>
-                        <a:rPr lang="en-US" sz="1400" dirty="0">
+                        <a:rPr lang="en-US" sz="1300" dirty="0">
                           <a:solidFill>
                             <a:srgbClr val="212121"/>
                           </a:solidFill>
@@ -5001,14 +4371,14 @@
                         </a:rPr>
                         <a:t>2</a:t>
                       </a:r>
-                      <a:endParaRPr lang="en-US" sz="1400" dirty="0">
+                      <a:endParaRPr lang="en-US" sz="1300" dirty="0">
                         <a:latin typeface="Arial" charset="0"/>
                         <a:ea typeface="Arial" charset="0"/>
                         <a:cs typeface="Arial" charset="0"/>
                       </a:endParaRPr>
                     </a:p>
                   </a:txBody>
-                  <a:tcPr marL="91440" marR="91440" marT="45720" marB="45720" anchor="ctr">
+                  <a:tcPr anchor="ctr">
                     <a:lnL w="12700" cap="flat" cmpd="sng" algn="ctr">
                       <a:solidFill>
                         <a:srgbClr val="EEEEEE"/>
@@ -5055,11 +4425,11 @@
                     <a:bodyPr/>
                     <a:lstStyle/>
                     <a:p>
-                      <a:pPr indent="0" marL="0">
+                      <a:pPr marL="0" indent="0">
                         <a:buNone/>
                       </a:pPr>
                       <a:r>
-                        <a:rPr lang="en-US" sz="1400" dirty="0">
+                        <a:rPr lang="en-US" sz="1300" dirty="0">
                           <a:solidFill>
                             <a:srgbClr val="212121"/>
                           </a:solidFill>
@@ -5069,14 +4439,14 @@
                         </a:rPr>
                         <a:t>4 GiB</a:t>
                       </a:r>
-                      <a:endParaRPr lang="en-US" sz="1400" dirty="0">
+                      <a:endParaRPr lang="en-US" sz="1300" dirty="0">
                         <a:latin typeface="Arial" charset="0"/>
                         <a:ea typeface="Arial" charset="0"/>
                         <a:cs typeface="Arial" charset="0"/>
                       </a:endParaRPr>
                     </a:p>
                   </a:txBody>
-                  <a:tcPr marL="91440" marR="91440" marT="45720" marB="45720" anchor="ctr">
+                  <a:tcPr anchor="ctr">
                     <a:lnL w="12700" cap="flat" cmpd="sng" algn="ctr">
                       <a:solidFill>
                         <a:srgbClr val="EEEEEE"/>
@@ -5118,18 +4488,23 @@
                     </a:solidFill>
                   </a:tcPr>
                 </a:tc>
+                <a:extLst>
+                  <a:ext uri="{0D108BD9-81ED-4DB2-BD59-A6C34878D82A}">
+                    <a16:rowId xmlns:a16="http://schemas.microsoft.com/office/drawing/2014/main" val="10004"/>
+                  </a:ext>
+                </a:extLst>
               </a:tr>
-              <a:tr h="420624">
+              <a:tr h="384048">
                 <a:tc>
                   <a:txBody>
                     <a:bodyPr/>
                     <a:lstStyle/>
                     <a:p>
-                      <a:pPr indent="0" marL="0">
+                      <a:pPr marL="0" indent="0">
                         <a:buNone/>
                       </a:pPr>
                       <a:r>
-                        <a:rPr lang="en-US" sz="1400" b="1" dirty="0">
+                        <a:rPr lang="en-US" sz="1300" b="1" dirty="0">
                           <a:solidFill>
                             <a:srgbClr val="212121"/>
                           </a:solidFill>
@@ -5139,14 +4514,14 @@
                         </a:rPr>
                         <a:t>t3.large</a:t>
                       </a:r>
-                      <a:endParaRPr lang="en-US" sz="1400" dirty="0">
+                      <a:endParaRPr lang="en-US" sz="1300" dirty="0">
                         <a:latin typeface="Arial" charset="0"/>
                         <a:ea typeface="Arial" charset="0"/>
                         <a:cs typeface="Arial" charset="0"/>
                       </a:endParaRPr>
                     </a:p>
                   </a:txBody>
-                  <a:tcPr marL="91440" marR="91440" marT="45720" marB="45720" anchor="ctr">
+                  <a:tcPr anchor="ctr">
                     <a:lnL w="12700" cap="flat" cmpd="sng" algn="ctr">
                       <a:solidFill>
                         <a:srgbClr val="EEEEEE"/>
@@ -5193,11 +4568,11 @@
                     <a:bodyPr/>
                     <a:lstStyle/>
                     <a:p>
-                      <a:pPr indent="0" marL="0">
+                      <a:pPr marL="0" indent="0">
                         <a:buNone/>
                       </a:pPr>
                       <a:r>
-                        <a:rPr lang="en-US" sz="1400" dirty="0">
+                        <a:rPr lang="en-US" sz="1300" dirty="0">
                           <a:solidFill>
                             <a:srgbClr val="212121"/>
                           </a:solidFill>
@@ -5207,14 +4582,14 @@
                         </a:rPr>
                         <a:t>2</a:t>
                       </a:r>
-                      <a:endParaRPr lang="en-US" sz="1400" dirty="0">
+                      <a:endParaRPr lang="en-US" sz="1300" dirty="0">
                         <a:latin typeface="Arial" charset="0"/>
                         <a:ea typeface="Arial" charset="0"/>
                         <a:cs typeface="Arial" charset="0"/>
                       </a:endParaRPr>
                     </a:p>
                   </a:txBody>
-                  <a:tcPr marL="91440" marR="91440" marT="45720" marB="45720" anchor="ctr">
+                  <a:tcPr anchor="ctr">
                     <a:lnL w="12700" cap="flat" cmpd="sng" algn="ctr">
                       <a:solidFill>
                         <a:srgbClr val="EEEEEE"/>
@@ -5261,11 +4636,11 @@
                     <a:bodyPr/>
                     <a:lstStyle/>
                     <a:p>
-                      <a:pPr indent="0" marL="0">
+                      <a:pPr marL="0" indent="0">
                         <a:buNone/>
                       </a:pPr>
                       <a:r>
-                        <a:rPr lang="en-US" sz="1400" dirty="0">
+                        <a:rPr lang="en-US" sz="1300" dirty="0">
                           <a:solidFill>
                             <a:srgbClr val="212121"/>
                           </a:solidFill>
@@ -5275,14 +4650,14 @@
                         </a:rPr>
                         <a:t>8 GiB</a:t>
                       </a:r>
-                      <a:endParaRPr lang="en-US" sz="1400" dirty="0">
+                      <a:endParaRPr lang="en-US" sz="1300" dirty="0">
                         <a:latin typeface="Arial" charset="0"/>
                         <a:ea typeface="Arial" charset="0"/>
                         <a:cs typeface="Arial" charset="0"/>
                       </a:endParaRPr>
                     </a:p>
                   </a:txBody>
-                  <a:tcPr marL="91440" marR="91440" marT="45720" marB="45720" anchor="ctr">
+                  <a:tcPr anchor="ctr">
                     <a:lnL w="12700" cap="flat" cmpd="sng" algn="ctr">
                       <a:solidFill>
                         <a:srgbClr val="EEEEEE"/>
@@ -5324,18 +4699,23 @@
                     </a:solidFill>
                   </a:tcPr>
                 </a:tc>
+                <a:extLst>
+                  <a:ext uri="{0D108BD9-81ED-4DB2-BD59-A6C34878D82A}">
+                    <a16:rowId xmlns:a16="http://schemas.microsoft.com/office/drawing/2014/main" val="10005"/>
+                  </a:ext>
+                </a:extLst>
               </a:tr>
-              <a:tr h="420624">
+              <a:tr h="384048">
                 <a:tc>
                   <a:txBody>
                     <a:bodyPr/>
                     <a:lstStyle/>
                     <a:p>
-                      <a:pPr indent="0" marL="0">
+                      <a:pPr marL="0" indent="0">
                         <a:buNone/>
                       </a:pPr>
                       <a:r>
-                        <a:rPr lang="en-US" sz="1400" b="1" dirty="0">
+                        <a:rPr lang="en-US" sz="1300" b="1" dirty="0">
                           <a:solidFill>
                             <a:srgbClr val="212121"/>
                           </a:solidFill>
@@ -5345,14 +4725,14 @@
                         </a:rPr>
                         <a:t>t3.xlarge</a:t>
                       </a:r>
-                      <a:endParaRPr lang="en-US" sz="1400" dirty="0">
+                      <a:endParaRPr lang="en-US" sz="1300" dirty="0">
                         <a:latin typeface="Arial" charset="0"/>
                         <a:ea typeface="Arial" charset="0"/>
                         <a:cs typeface="Arial" charset="0"/>
                       </a:endParaRPr>
                     </a:p>
                   </a:txBody>
-                  <a:tcPr marL="91440" marR="91440" marT="45720" marB="45720" anchor="ctr">
+                  <a:tcPr anchor="ctr">
                     <a:lnL w="12700" cap="flat" cmpd="sng" algn="ctr">
                       <a:solidFill>
                         <a:srgbClr val="EEEEEE"/>
@@ -5399,11 +4779,11 @@
                     <a:bodyPr/>
                     <a:lstStyle/>
                     <a:p>
-                      <a:pPr indent="0" marL="0">
+                      <a:pPr marL="0" indent="0">
                         <a:buNone/>
                       </a:pPr>
                       <a:r>
-                        <a:rPr lang="en-US" sz="1400" dirty="0">
+                        <a:rPr lang="en-US" sz="1300" dirty="0">
                           <a:solidFill>
                             <a:srgbClr val="212121"/>
                           </a:solidFill>
@@ -5413,14 +4793,14 @@
                         </a:rPr>
                         <a:t>4</a:t>
                       </a:r>
-                      <a:endParaRPr lang="en-US" sz="1400" dirty="0">
+                      <a:endParaRPr lang="en-US" sz="1300" dirty="0">
                         <a:latin typeface="Arial" charset="0"/>
                         <a:ea typeface="Arial" charset="0"/>
                         <a:cs typeface="Arial" charset="0"/>
                       </a:endParaRPr>
                     </a:p>
                   </a:txBody>
-                  <a:tcPr marL="91440" marR="91440" marT="45720" marB="45720" anchor="ctr">
+                  <a:tcPr anchor="ctr">
                     <a:lnL w="12700" cap="flat" cmpd="sng" algn="ctr">
                       <a:solidFill>
                         <a:srgbClr val="EEEEEE"/>
@@ -5467,11 +4847,11 @@
                     <a:bodyPr/>
                     <a:lstStyle/>
                     <a:p>
-                      <a:pPr indent="0" marL="0">
+                      <a:pPr marL="0" indent="0">
                         <a:buNone/>
                       </a:pPr>
                       <a:r>
-                        <a:rPr lang="en-US" sz="1400" dirty="0">
+                        <a:rPr lang="en-US" sz="1300" dirty="0">
                           <a:solidFill>
                             <a:srgbClr val="212121"/>
                           </a:solidFill>
@@ -5481,14 +4861,14 @@
                         </a:rPr>
                         <a:t>16 GiB</a:t>
                       </a:r>
-                      <a:endParaRPr lang="en-US" sz="1400" dirty="0">
+                      <a:endParaRPr lang="en-US" sz="1300" dirty="0">
                         <a:latin typeface="Arial" charset="0"/>
                         <a:ea typeface="Arial" charset="0"/>
                         <a:cs typeface="Arial" charset="0"/>
                       </a:endParaRPr>
                     </a:p>
                   </a:txBody>
-                  <a:tcPr marL="91440" marR="91440" marT="45720" marB="45720" anchor="ctr">
+                  <a:tcPr anchor="ctr">
                     <a:lnL w="12700" cap="flat" cmpd="sng" algn="ctr">
                       <a:solidFill>
                         <a:srgbClr val="EEEEEE"/>
@@ -5530,6 +4910,11 @@
                     </a:solidFill>
                   </a:tcPr>
                 </a:tc>
+                <a:extLst>
+                  <a:ext uri="{0D108BD9-81ED-4DB2-BD59-A6C34878D82A}">
+                    <a16:rowId xmlns:a16="http://schemas.microsoft.com/office/drawing/2014/main" val="10006"/>
+                  </a:ext>
+                </a:extLst>
               </a:tr>
             </a:tbl>
           </a:graphicData>
@@ -5537,14 +4922,46 @@
       </p:graphicFrame>
       <p:sp>
         <p:nvSpPr>
+          <p:cNvPr id="6" name="Shape 3"/>
+          <p:cNvSpPr/>
+          <p:nvPr/>
+        </p:nvSpPr>
+        <p:spPr>
+          <a:xfrm>
+            <a:off x="548640" y="4206240"/>
+            <a:ext cx="11091672" cy="868680"/>
+          </a:xfrm>
+          <a:prstGeom prst="roundRect">
+            <a:avLst/>
+          </a:prstGeom>
+          <a:solidFill>
+            <a:srgbClr val="E8EAF6"/>
+          </a:solidFill>
+          <a:ln w="15875">
+            <a:solidFill>
+              <a:srgbClr val="3949AB"/>
+            </a:solidFill>
+            <a:prstDash val="solid"/>
+          </a:ln>
+        </p:spPr>
+        <p:txBody>
+          <a:bodyPr/>
+          <a:lstStyle/>
+          <a:p>
+            <a:endParaRPr lang="es-ES"/>
+          </a:p>
+        </p:txBody>
+      </p:sp>
+      <p:sp>
+        <p:nvSpPr>
           <p:cNvPr id="7" name="Text 4"/>
           <p:cNvSpPr/>
           <p:nvPr/>
         </p:nvSpPr>
         <p:spPr>
           <a:xfrm>
-            <a:off x="548640" y="5184648"/>
-            <a:ext cx="11091672" cy="457200"/>
+            <a:off x="731520" y="4279392"/>
+            <a:ext cx="10725912" cy="365760"/>
           </a:xfrm>
           <a:prstGeom prst="rect">
             <a:avLst/>
@@ -5553,22 +4970,150 @@
           <a:ln/>
         </p:spPr>
         <p:txBody>
-          <a:bodyPr wrap="square" rtlCol="0" anchor="t"/>
-          <a:lstStyle/>
-          <a:p>
-            <a:pPr indent="0" marL="0">
+          <a:bodyPr wrap="square" rtlCol="0" anchor="ctr"/>
+          <a:lstStyle/>
+          <a:p>
+            <a:pPr marL="0" indent="0">
               <a:buNone/>
             </a:pPr>
             <a:r>
-              <a:rPr lang="en-US" sz="1400" i="1" dirty="0">
+              <a:rPr lang="en-US" sz="1500" b="1" dirty="0">
                 <a:solidFill>
-                  <a:srgbClr val="757575"/>
+                  <a:srgbClr val="1A237E"/>
                 </a:solidFill>
                 <a:latin typeface="Arial" pitchFamily="34" charset="0"/>
                 <a:ea typeface="Arial" pitchFamily="34" charset="-122"/>
                 <a:cs typeface="Arial" pitchFamily="34" charset="-120"/>
               </a:rPr>
-              <a:t>De nano a large la memoria se multiplica por 16 y la vCPU se mantiene igual — solo en xlarge sube también la CPU.</a:t>
+              <a:t>De nano a large, la memoria se multiplica por 16 y la CPU no sube</a:t>
+            </a:r>
+            <a:endParaRPr lang="en-US" sz="1500" dirty="0"/>
+          </a:p>
+        </p:txBody>
+      </p:sp>
+      <p:sp>
+        <p:nvSpPr>
+          <p:cNvPr id="8" name="Text 5"/>
+          <p:cNvSpPr/>
+          <p:nvPr/>
+        </p:nvSpPr>
+        <p:spPr>
+          <a:xfrm>
+            <a:off x="731520" y="4645152"/>
+            <a:ext cx="10725912" cy="356616"/>
+          </a:xfrm>
+          <a:prstGeom prst="rect">
+            <a:avLst/>
+          </a:prstGeom>
+          <a:noFill/>
+          <a:ln/>
+        </p:spPr>
+        <p:txBody>
+          <a:bodyPr wrap="square" rtlCol="0" anchor="t"/>
+          <a:lstStyle/>
+          <a:p>
+            <a:pPr marL="0" indent="0">
+              <a:buNone/>
+            </a:pPr>
+            <a:r>
+              <a:rPr lang="en-US" sz="1200" dirty="0">
+                <a:solidFill>
+                  <a:srgbClr val="212121"/>
+                </a:solidFill>
+                <a:latin typeface="Arial" pitchFamily="34" charset="0"/>
+                <a:ea typeface="Arial" pitchFamily="34" charset="-122"/>
+                <a:cs typeface="Arial" pitchFamily="34" charset="-120"/>
+              </a:rPr>
+              <a:t>Solo a partir de xlarge empieza a subir también la CPU. El tamaño no es «solo memoria».</a:t>
+            </a:r>
+            <a:endParaRPr lang="en-US" sz="1200" dirty="0"/>
+          </a:p>
+        </p:txBody>
+      </p:sp>
+      <p:sp>
+        <p:nvSpPr>
+          <p:cNvPr id="9" name="Shape 6"/>
+          <p:cNvSpPr/>
+          <p:nvPr/>
+        </p:nvSpPr>
+        <p:spPr>
+          <a:xfrm>
+            <a:off x="548640" y="5166360"/>
+            <a:ext cx="11091672" cy="1097280"/>
+          </a:xfrm>
+          <a:prstGeom prst="roundRect">
+            <a:avLst/>
+          </a:prstGeom>
+          <a:solidFill>
+            <a:srgbClr val="FFF8E1"/>
+          </a:solidFill>
+          <a:ln w="28575">
+            <a:solidFill>
+              <a:srgbClr val="FFA000"/>
+            </a:solidFill>
+            <a:prstDash val="solid"/>
+          </a:ln>
+        </p:spPr>
+        <p:txBody>
+          <a:bodyPr/>
+          <a:lstStyle/>
+          <a:p>
+            <a:endParaRPr lang="es-ES"/>
+          </a:p>
+        </p:txBody>
+      </p:sp>
+      <p:sp>
+        <p:nvSpPr>
+          <p:cNvPr id="10" name="Text 7"/>
+          <p:cNvSpPr/>
+          <p:nvPr/>
+        </p:nvSpPr>
+        <p:spPr>
+          <a:xfrm>
+            <a:off x="822960" y="5276088"/>
+            <a:ext cx="10543032" cy="877824"/>
+          </a:xfrm>
+          <a:prstGeom prst="rect">
+            <a:avLst/>
+          </a:prstGeom>
+          <a:noFill/>
+          <a:ln/>
+        </p:spPr>
+        <p:txBody>
+          <a:bodyPr wrap="square" rtlCol="0" anchor="t"/>
+          <a:lstStyle/>
+          <a:p>
+            <a:pPr marL="0" indent="0">
+              <a:buNone/>
+            </a:pPr>
+            <a:r>
+              <a:rPr lang="en-US" sz="1400" b="1" dirty="0">
+                <a:solidFill>
+                  <a:srgbClr val="1A237E"/>
+                </a:solidFill>
+                <a:latin typeface="Arial" pitchFamily="34" charset="0"/>
+                <a:ea typeface="Arial" pitchFamily="34" charset="-122"/>
+                <a:cs typeface="Arial" pitchFamily="34" charset="-120"/>
+              </a:rPr>
+              <a:t>El coste de sobredimensionar
+</a:t>
+            </a:r>
+            <a:endParaRPr lang="en-US" sz="1400" dirty="0"/>
+          </a:p>
+          <a:p>
+            <a:pPr marL="0" indent="0">
+              <a:buNone/>
+            </a:pPr>
+            <a:r>
+              <a:rPr lang="en-US" sz="1300" dirty="0">
+                <a:solidFill>
+                  <a:srgbClr val="212121"/>
+                </a:solidFill>
+                <a:latin typeface="Arial" pitchFamily="34" charset="0"/>
+                <a:ea typeface="Arial" pitchFamily="34" charset="-122"/>
+                <a:cs typeface="Arial" pitchFamily="34" charset="-120"/>
+              </a:rPr>
+              <a:t>Una t3.micro cuesta una fracción de una t3.large (ocho veces más memoria) — sobra para el front de una clase de 30 alumnos. Lo compararás en la 2.3.</a:t>
             </a:r>
             <a:endParaRPr lang="en-US" sz="1400" dirty="0"/>
           </a:p>
@@ -5623,6 +5168,13 @@
             <a:prstDash val="solid"/>
           </a:ln>
         </p:spPr>
+        <p:txBody>
+          <a:bodyPr/>
+          <a:lstStyle/>
+          <a:p>
+            <a:endParaRPr lang="es-ES"/>
+          </a:p>
+        </p:txBody>
       </p:sp>
       <p:sp>
         <p:nvSpPr>
@@ -5645,7 +5197,7 @@
           <a:bodyPr wrap="square" rtlCol="0" anchor="ctr"/>
           <a:lstStyle/>
           <a:p>
-            <a:pPr indent="0" marL="0">
+            <a:pPr marL="0" indent="0">
               <a:buNone/>
             </a:pPr>
             <a:r>
@@ -5657,7 +5209,7 @@
                 <a:ea typeface="Arial" pitchFamily="34" charset="-122"/>
                 <a:cs typeface="Arial" pitchFamily="34" charset="-120"/>
               </a:rPr>
-              <a:t>El coste de sobredimensionar una instancia</a:t>
+              <a:t>Imágenes de máquina (AMI)</a:t>
             </a:r>
             <a:endParaRPr lang="en-US" sz="2400" dirty="0"/>
           </a:p>
@@ -5684,7 +5236,7 @@
           <a:bodyPr wrap="square" rtlCol="0" anchor="ctr"/>
           <a:lstStyle/>
           <a:p>
-            <a:pPr algn="r" indent="0" marL="0">
+            <a:pPr marL="0" indent="0" algn="r">
               <a:buNone/>
             </a:pPr>
             <a:r>
@@ -5710,22 +5262,29 @@
         </p:nvSpPr>
         <p:spPr>
           <a:xfrm>
-            <a:off x="548640" y="1737360"/>
-            <a:ext cx="11091672" cy="1645920"/>
+            <a:off x="548640" y="1188720"/>
+            <a:ext cx="11091672" cy="1508760"/>
           </a:xfrm>
           <a:prstGeom prst="roundRect">
             <a:avLst/>
           </a:prstGeom>
           <a:solidFill>
-            <a:srgbClr val="FFF8E1"/>
+            <a:srgbClr val="E8EAF6"/>
           </a:solidFill>
-          <a:ln w="19050">
+          <a:ln w="15875">
             <a:solidFill>
-              <a:srgbClr val="FFA000"/>
+              <a:srgbClr val="3949AB"/>
             </a:solidFill>
             <a:prstDash val="solid"/>
           </a:ln>
         </p:spPr>
+        <p:txBody>
+          <a:bodyPr/>
+          <a:lstStyle/>
+          <a:p>
+            <a:endParaRPr lang="es-ES"/>
+          </a:p>
+        </p:txBody>
       </p:sp>
       <p:sp>
         <p:nvSpPr>
@@ -5735,8 +5294,8 @@
         </p:nvSpPr>
         <p:spPr>
           <a:xfrm>
-            <a:off x="822960" y="1828800"/>
-            <a:ext cx="10543032" cy="1463040"/>
+            <a:off x="731520" y="1261872"/>
+            <a:ext cx="10725912" cy="548640"/>
           </a:xfrm>
           <a:prstGeom prst="rect">
             <a:avLst/>
@@ -5748,11 +5307,50 @@
           <a:bodyPr wrap="square" rtlCol="0" anchor="ctr"/>
           <a:lstStyle/>
           <a:p>
-            <a:pPr indent="0" marL="0">
+            <a:pPr marL="0" indent="0">
               <a:buNone/>
             </a:pPr>
             <a:r>
-              <a:rPr lang="en-US" sz="2100" dirty="0">
+              <a:rPr lang="en-US" sz="2000" b="1" dirty="0">
+                <a:solidFill>
+                  <a:srgbClr val="1A237E"/>
+                </a:solidFill>
+                <a:latin typeface="Arial" pitchFamily="34" charset="0"/>
+                <a:ea typeface="Arial" pitchFamily="34" charset="-122"/>
+                <a:cs typeface="Arial" pitchFamily="34" charset="-120"/>
+              </a:rPr>
+              <a:t>AMI (Amazon Machine Image)</a:t>
+            </a:r>
+            <a:endParaRPr lang="en-US" sz="2000" dirty="0"/>
+          </a:p>
+        </p:txBody>
+      </p:sp>
+      <p:sp>
+        <p:nvSpPr>
+          <p:cNvPr id="7" name="Text 5"/>
+          <p:cNvSpPr/>
+          <p:nvPr/>
+        </p:nvSpPr>
+        <p:spPr>
+          <a:xfrm>
+            <a:off x="731520" y="1810512"/>
+            <a:ext cx="10725912" cy="813816"/>
+          </a:xfrm>
+          <a:prstGeom prst="rect">
+            <a:avLst/>
+          </a:prstGeom>
+          <a:noFill/>
+          <a:ln/>
+        </p:spPr>
+        <p:txBody>
+          <a:bodyPr wrap="square" rtlCol="0" anchor="t"/>
+          <a:lstStyle/>
+          <a:p>
+            <a:pPr marL="0" indent="0">
+              <a:buNone/>
+            </a:pPr>
+            <a:r>
+              <a:rPr lang="en-US" sz="1600" dirty="0">
                 <a:solidFill>
                   <a:srgbClr val="212121"/>
                 </a:solidFill>
@@ -5760,22 +5358,54 @@
                 <a:ea typeface="Arial" pitchFamily="34" charset="-122"/>
                 <a:cs typeface="Arial" pitchFamily="34" charset="-120"/>
               </a:rPr>
-              <a:t>Una t3.micro cuesta una fracción de lo que cuesta una t3.large —tres peldaños por encima, con ocho veces más memoria—, y para servir el front estático de una aplicación web durante una clase de treinta alumnos es más que suficiente.</a:t>
+              <a:t>La fotografía completa de un disco de arranque: sistema operativo, paquetes instalados, configuración — todo para que una instancia nueva arranque ya lista, sin reinstalar desde cero.</a:t>
             </a:r>
-            <a:endParaRPr lang="en-US" sz="2100" dirty="0"/>
-          </a:p>
-        </p:txBody>
-      </p:sp>
-      <p:sp>
-        <p:nvSpPr>
-          <p:cNvPr id="7" name="Text 5"/>
-          <p:cNvSpPr/>
-          <p:nvPr/>
-        </p:nvSpPr>
-        <p:spPr>
-          <a:xfrm>
-            <a:off x="548640" y="3703320"/>
-            <a:ext cx="11091672" cy="914400"/>
+            <a:endParaRPr lang="en-US" sz="1600" dirty="0"/>
+          </a:p>
+        </p:txBody>
+      </p:sp>
+      <p:sp>
+        <p:nvSpPr>
+          <p:cNvPr id="8" name="Shape 6"/>
+          <p:cNvSpPr/>
+          <p:nvPr/>
+        </p:nvSpPr>
+        <p:spPr>
+          <a:xfrm>
+            <a:off x="548640" y="2971800"/>
+            <a:ext cx="2464308" cy="1188720"/>
+          </a:xfrm>
+          <a:prstGeom prst="roundRect">
+            <a:avLst/>
+          </a:prstGeom>
+          <a:solidFill>
+            <a:srgbClr val="E8EAF6"/>
+          </a:solidFill>
+          <a:ln w="15875">
+            <a:solidFill>
+              <a:srgbClr val="3949AB"/>
+            </a:solidFill>
+            <a:prstDash val="solid"/>
+          </a:ln>
+        </p:spPr>
+        <p:txBody>
+          <a:bodyPr/>
+          <a:lstStyle/>
+          <a:p>
+            <a:endParaRPr lang="es-ES"/>
+          </a:p>
+        </p:txBody>
+      </p:sp>
+      <p:sp>
+        <p:nvSpPr>
+          <p:cNvPr id="9" name="Text 7"/>
+          <p:cNvSpPr/>
+          <p:nvPr/>
+        </p:nvSpPr>
+        <p:spPr>
+          <a:xfrm>
+            <a:off x="594360" y="3017520"/>
+            <a:ext cx="2372868" cy="1097280"/>
           </a:xfrm>
           <a:prstGeom prst="rect">
             <a:avLst/>
@@ -5784,14 +5414,14 @@
           <a:ln/>
         </p:spPr>
         <p:txBody>
-          <a:bodyPr wrap="square" rtlCol="0" anchor="t"/>
-          <a:lstStyle/>
-          <a:p>
-            <a:pPr indent="0" marL="0">
+          <a:bodyPr wrap="square" rtlCol="0" anchor="ctr"/>
+          <a:lstStyle/>
+          <a:p>
+            <a:pPr marL="0" indent="0" algn="ctr">
               <a:buNone/>
             </a:pPr>
             <a:r>
-              <a:rPr lang="en-US" sz="1900" dirty="0">
+              <a:rPr lang="en-US" sz="1500" dirty="0">
                 <a:solidFill>
                   <a:srgbClr val="212121"/>
                 </a:solidFill>
@@ -5799,9 +5429,496 @@
                 <a:ea typeface="Arial" pitchFamily="34" charset="-122"/>
                 <a:cs typeface="Arial" pitchFamily="34" charset="-120"/>
               </a:rPr>
-              <a:t>Sobredimensionar una instancia es tirar presupuesto del laboratorio a la basura sin ninguna mejora perceptible — vas a comparar el coste real de tres familias en la Actividad 2.3.</a:t>
+              <a:t>AMI pública</a:t>
             </a:r>
-            <a:endParaRPr lang="en-US" sz="1900" dirty="0"/>
+            <a:endParaRPr lang="en-US" sz="1500" dirty="0"/>
+          </a:p>
+          <a:p>
+            <a:pPr marL="0" indent="0" algn="ctr">
+              <a:buNone/>
+            </a:pPr>
+            <a:r>
+              <a:rPr lang="en-US" sz="1500" dirty="0">
+                <a:solidFill>
+                  <a:srgbClr val="212121"/>
+                </a:solidFill>
+                <a:latin typeface="Arial" pitchFamily="34" charset="0"/>
+                <a:ea typeface="Arial" pitchFamily="34" charset="-122"/>
+                <a:cs typeface="Arial" pitchFamily="34" charset="-120"/>
+              </a:rPr>
+              <a:t>(punto de partida)</a:t>
+            </a:r>
+            <a:endParaRPr lang="en-US" sz="1500" dirty="0"/>
+          </a:p>
+        </p:txBody>
+      </p:sp>
+      <p:sp>
+        <p:nvSpPr>
+          <p:cNvPr id="10" name="Text 8"/>
+          <p:cNvSpPr/>
+          <p:nvPr/>
+        </p:nvSpPr>
+        <p:spPr>
+          <a:xfrm>
+            <a:off x="2967228" y="2971800"/>
+            <a:ext cx="502920" cy="1188720"/>
+          </a:xfrm>
+          <a:prstGeom prst="rect">
+            <a:avLst/>
+          </a:prstGeom>
+          <a:noFill/>
+          <a:ln/>
+        </p:spPr>
+        <p:txBody>
+          <a:bodyPr wrap="square" rtlCol="0" anchor="ctr"/>
+          <a:lstStyle/>
+          <a:p>
+            <a:pPr marL="0" indent="0" algn="ctr">
+              <a:buNone/>
+            </a:pPr>
+            <a:r>
+              <a:rPr lang="en-US" sz="2200" b="1" dirty="0">
+                <a:solidFill>
+                  <a:srgbClr val="3949AB"/>
+                </a:solidFill>
+                <a:latin typeface="Arial" pitchFamily="34" charset="0"/>
+                <a:ea typeface="Arial" pitchFamily="34" charset="-122"/>
+                <a:cs typeface="Arial" pitchFamily="34" charset="-120"/>
+              </a:rPr>
+              <a:t>→</a:t>
+            </a:r>
+            <a:endParaRPr lang="en-US" sz="2200" dirty="0"/>
+          </a:p>
+        </p:txBody>
+      </p:sp>
+      <p:sp>
+        <p:nvSpPr>
+          <p:cNvPr id="11" name="Shape 9"/>
+          <p:cNvSpPr/>
+          <p:nvPr/>
+        </p:nvSpPr>
+        <p:spPr>
+          <a:xfrm>
+            <a:off x="3424428" y="2971800"/>
+            <a:ext cx="2464308" cy="1188720"/>
+          </a:xfrm>
+          <a:prstGeom prst="roundRect">
+            <a:avLst/>
+          </a:prstGeom>
+          <a:solidFill>
+            <a:srgbClr val="E8EAF6"/>
+          </a:solidFill>
+          <a:ln w="15875">
+            <a:solidFill>
+              <a:srgbClr val="3949AB"/>
+            </a:solidFill>
+            <a:prstDash val="solid"/>
+          </a:ln>
+        </p:spPr>
+        <p:txBody>
+          <a:bodyPr/>
+          <a:lstStyle/>
+          <a:p>
+            <a:endParaRPr lang="es-ES"/>
+          </a:p>
+        </p:txBody>
+      </p:sp>
+      <p:sp>
+        <p:nvSpPr>
+          <p:cNvPr id="12" name="Text 10"/>
+          <p:cNvSpPr/>
+          <p:nvPr/>
+        </p:nvSpPr>
+        <p:spPr>
+          <a:xfrm>
+            <a:off x="3470148" y="3017520"/>
+            <a:ext cx="2372868" cy="1097280"/>
+          </a:xfrm>
+          <a:prstGeom prst="rect">
+            <a:avLst/>
+          </a:prstGeom>
+          <a:noFill/>
+          <a:ln/>
+        </p:spPr>
+        <p:txBody>
+          <a:bodyPr wrap="square" rtlCol="0" anchor="ctr"/>
+          <a:lstStyle/>
+          <a:p>
+            <a:pPr marL="0" indent="0" algn="ctr">
+              <a:buNone/>
+            </a:pPr>
+            <a:r>
+              <a:rPr lang="en-US" sz="1500" dirty="0">
+                <a:solidFill>
+                  <a:srgbClr val="212121"/>
+                </a:solidFill>
+                <a:latin typeface="Arial" pitchFamily="34" charset="0"/>
+                <a:ea typeface="Arial" pitchFamily="34" charset="-122"/>
+                <a:cs typeface="Arial" pitchFamily="34" charset="-120"/>
+              </a:rPr>
+              <a:t>Instalas y</a:t>
+            </a:r>
+            <a:endParaRPr lang="en-US" sz="1500" dirty="0"/>
+          </a:p>
+          <a:p>
+            <a:pPr marL="0" indent="0" algn="ctr">
+              <a:buNone/>
+            </a:pPr>
+            <a:r>
+              <a:rPr lang="en-US" sz="1500" dirty="0">
+                <a:solidFill>
+                  <a:srgbClr val="212121"/>
+                </a:solidFill>
+                <a:latin typeface="Arial" pitchFamily="34" charset="0"/>
+                <a:ea typeface="Arial" pitchFamily="34" charset="-122"/>
+                <a:cs typeface="Arial" pitchFamily="34" charset="-120"/>
+              </a:rPr>
+              <a:t>configuras</a:t>
+            </a:r>
+            <a:endParaRPr lang="en-US" sz="1500" dirty="0"/>
+          </a:p>
+        </p:txBody>
+      </p:sp>
+      <p:sp>
+        <p:nvSpPr>
+          <p:cNvPr id="13" name="Text 11"/>
+          <p:cNvSpPr/>
+          <p:nvPr/>
+        </p:nvSpPr>
+        <p:spPr>
+          <a:xfrm>
+            <a:off x="5843016" y="2971800"/>
+            <a:ext cx="502920" cy="1188720"/>
+          </a:xfrm>
+          <a:prstGeom prst="rect">
+            <a:avLst/>
+          </a:prstGeom>
+          <a:noFill/>
+          <a:ln/>
+        </p:spPr>
+        <p:txBody>
+          <a:bodyPr wrap="square" rtlCol="0" anchor="ctr"/>
+          <a:lstStyle/>
+          <a:p>
+            <a:pPr marL="0" indent="0" algn="ctr">
+              <a:buNone/>
+            </a:pPr>
+            <a:r>
+              <a:rPr lang="en-US" sz="2200" b="1" dirty="0">
+                <a:solidFill>
+                  <a:srgbClr val="3949AB"/>
+                </a:solidFill>
+                <a:latin typeface="Arial" pitchFamily="34" charset="0"/>
+                <a:ea typeface="Arial" pitchFamily="34" charset="-122"/>
+                <a:cs typeface="Arial" pitchFamily="34" charset="-120"/>
+              </a:rPr>
+              <a:t>→</a:t>
+            </a:r>
+            <a:endParaRPr lang="en-US" sz="2200" dirty="0"/>
+          </a:p>
+        </p:txBody>
+      </p:sp>
+      <p:sp>
+        <p:nvSpPr>
+          <p:cNvPr id="14" name="Shape 12"/>
+          <p:cNvSpPr/>
+          <p:nvPr/>
+        </p:nvSpPr>
+        <p:spPr>
+          <a:xfrm>
+            <a:off x="6300216" y="2971800"/>
+            <a:ext cx="2464308" cy="1188720"/>
+          </a:xfrm>
+          <a:prstGeom prst="roundRect">
+            <a:avLst/>
+          </a:prstGeom>
+          <a:solidFill>
+            <a:srgbClr val="E8EAF6"/>
+          </a:solidFill>
+          <a:ln w="15875">
+            <a:solidFill>
+              <a:srgbClr val="3949AB"/>
+            </a:solidFill>
+            <a:prstDash val="solid"/>
+          </a:ln>
+        </p:spPr>
+        <p:txBody>
+          <a:bodyPr/>
+          <a:lstStyle/>
+          <a:p>
+            <a:endParaRPr lang="es-ES"/>
+          </a:p>
+        </p:txBody>
+      </p:sp>
+      <p:sp>
+        <p:nvSpPr>
+          <p:cNvPr id="15" name="Text 13"/>
+          <p:cNvSpPr/>
+          <p:nvPr/>
+        </p:nvSpPr>
+        <p:spPr>
+          <a:xfrm>
+            <a:off x="6345936" y="3017520"/>
+            <a:ext cx="2372868" cy="1097280"/>
+          </a:xfrm>
+          <a:prstGeom prst="rect">
+            <a:avLst/>
+          </a:prstGeom>
+          <a:noFill/>
+          <a:ln/>
+        </p:spPr>
+        <p:txBody>
+          <a:bodyPr wrap="square" rtlCol="0" anchor="ctr"/>
+          <a:lstStyle/>
+          <a:p>
+            <a:pPr marL="0" indent="0" algn="ctr">
+              <a:buNone/>
+            </a:pPr>
+            <a:r>
+              <a:rPr lang="en-US" sz="1500" dirty="0">
+                <a:solidFill>
+                  <a:srgbClr val="212121"/>
+                </a:solidFill>
+                <a:latin typeface="Arial" pitchFamily="34" charset="0"/>
+                <a:ea typeface="Arial" pitchFamily="34" charset="-122"/>
+                <a:cs typeface="Arial" pitchFamily="34" charset="-120"/>
+              </a:rPr>
+              <a:t>Creas tu</a:t>
+            </a:r>
+            <a:endParaRPr lang="en-US" sz="1500" dirty="0"/>
+          </a:p>
+          <a:p>
+            <a:pPr marL="0" indent="0" algn="ctr">
+              <a:buNone/>
+            </a:pPr>
+            <a:r>
+              <a:rPr lang="en-US" sz="1500" dirty="0">
+                <a:solidFill>
+                  <a:srgbClr val="212121"/>
+                </a:solidFill>
+                <a:latin typeface="Arial" pitchFamily="34" charset="0"/>
+                <a:ea typeface="Arial" pitchFamily="34" charset="-122"/>
+                <a:cs typeface="Arial" pitchFamily="34" charset="-120"/>
+              </a:rPr>
+              <a:t>propia AMI</a:t>
+            </a:r>
+            <a:endParaRPr lang="en-US" sz="1500" dirty="0"/>
+          </a:p>
+        </p:txBody>
+      </p:sp>
+      <p:sp>
+        <p:nvSpPr>
+          <p:cNvPr id="16" name="Text 14"/>
+          <p:cNvSpPr/>
+          <p:nvPr/>
+        </p:nvSpPr>
+        <p:spPr>
+          <a:xfrm>
+            <a:off x="8718804" y="2971800"/>
+            <a:ext cx="502920" cy="1188720"/>
+          </a:xfrm>
+          <a:prstGeom prst="rect">
+            <a:avLst/>
+          </a:prstGeom>
+          <a:noFill/>
+          <a:ln/>
+        </p:spPr>
+        <p:txBody>
+          <a:bodyPr wrap="square" rtlCol="0" anchor="ctr"/>
+          <a:lstStyle/>
+          <a:p>
+            <a:pPr marL="0" indent="0" algn="ctr">
+              <a:buNone/>
+            </a:pPr>
+            <a:r>
+              <a:rPr lang="en-US" sz="2200" b="1" dirty="0">
+                <a:solidFill>
+                  <a:srgbClr val="3949AB"/>
+                </a:solidFill>
+                <a:latin typeface="Arial" pitchFamily="34" charset="0"/>
+                <a:ea typeface="Arial" pitchFamily="34" charset="-122"/>
+                <a:cs typeface="Arial" pitchFamily="34" charset="-120"/>
+              </a:rPr>
+              <a:t>→</a:t>
+            </a:r>
+            <a:endParaRPr lang="en-US" sz="2200" dirty="0"/>
+          </a:p>
+        </p:txBody>
+      </p:sp>
+      <p:sp>
+        <p:nvSpPr>
+          <p:cNvPr id="17" name="Shape 15"/>
+          <p:cNvSpPr/>
+          <p:nvPr/>
+        </p:nvSpPr>
+        <p:spPr>
+          <a:xfrm>
+            <a:off x="9176004" y="2971800"/>
+            <a:ext cx="2464308" cy="1188720"/>
+          </a:xfrm>
+          <a:prstGeom prst="roundRect">
+            <a:avLst/>
+          </a:prstGeom>
+          <a:solidFill>
+            <a:srgbClr val="E8EAF6"/>
+          </a:solidFill>
+          <a:ln w="15875">
+            <a:solidFill>
+              <a:srgbClr val="3949AB"/>
+            </a:solidFill>
+            <a:prstDash val="solid"/>
+          </a:ln>
+        </p:spPr>
+        <p:txBody>
+          <a:bodyPr/>
+          <a:lstStyle/>
+          <a:p>
+            <a:endParaRPr lang="es-ES"/>
+          </a:p>
+        </p:txBody>
+      </p:sp>
+      <p:sp>
+        <p:nvSpPr>
+          <p:cNvPr id="18" name="Text 16"/>
+          <p:cNvSpPr/>
+          <p:nvPr/>
+        </p:nvSpPr>
+        <p:spPr>
+          <a:xfrm>
+            <a:off x="9221724" y="3017520"/>
+            <a:ext cx="2372868" cy="1097280"/>
+          </a:xfrm>
+          <a:prstGeom prst="rect">
+            <a:avLst/>
+          </a:prstGeom>
+          <a:noFill/>
+          <a:ln/>
+        </p:spPr>
+        <p:txBody>
+          <a:bodyPr wrap="square" rtlCol="0" anchor="ctr"/>
+          <a:lstStyle/>
+          <a:p>
+            <a:pPr marL="0" indent="0" algn="ctr">
+              <a:buNone/>
+            </a:pPr>
+            <a:r>
+              <a:rPr lang="en-US" sz="1500" dirty="0">
+                <a:solidFill>
+                  <a:srgbClr val="212121"/>
+                </a:solidFill>
+                <a:latin typeface="Arial" pitchFamily="34" charset="0"/>
+                <a:ea typeface="Arial" pitchFamily="34" charset="-122"/>
+                <a:cs typeface="Arial" pitchFamily="34" charset="-120"/>
+              </a:rPr>
+              <a:t>Lanzas N instancias</a:t>
+            </a:r>
+            <a:endParaRPr lang="en-US" sz="1500" dirty="0"/>
+          </a:p>
+          <a:p>
+            <a:pPr marL="0" indent="0" algn="ctr">
+              <a:buNone/>
+            </a:pPr>
+            <a:r>
+              <a:rPr lang="en-US" sz="1500" dirty="0">
+                <a:solidFill>
+                  <a:srgbClr val="212121"/>
+                </a:solidFill>
+                <a:latin typeface="Arial" pitchFamily="34" charset="0"/>
+                <a:ea typeface="Arial" pitchFamily="34" charset="-122"/>
+                <a:cs typeface="Arial" pitchFamily="34" charset="-120"/>
+              </a:rPr>
+              <a:t>idénticas</a:t>
+            </a:r>
+            <a:endParaRPr lang="en-US" sz="1500" dirty="0"/>
+          </a:p>
+        </p:txBody>
+      </p:sp>
+      <p:sp>
+        <p:nvSpPr>
+          <p:cNvPr id="19" name="Shape 17"/>
+          <p:cNvSpPr/>
+          <p:nvPr/>
+        </p:nvSpPr>
+        <p:spPr>
+          <a:xfrm>
+            <a:off x="548640" y="4434840"/>
+            <a:ext cx="11091672" cy="1280160"/>
+          </a:xfrm>
+          <a:prstGeom prst="roundRect">
+            <a:avLst/>
+          </a:prstGeom>
+          <a:solidFill>
+            <a:srgbClr val="FFF8E1"/>
+          </a:solidFill>
+          <a:ln w="28575">
+            <a:solidFill>
+              <a:srgbClr val="FFA000"/>
+            </a:solidFill>
+            <a:prstDash val="solid"/>
+          </a:ln>
+        </p:spPr>
+        <p:txBody>
+          <a:bodyPr/>
+          <a:lstStyle/>
+          <a:p>
+            <a:endParaRPr lang="es-ES"/>
+          </a:p>
+        </p:txBody>
+      </p:sp>
+      <p:sp>
+        <p:nvSpPr>
+          <p:cNvPr id="20" name="Text 18"/>
+          <p:cNvSpPr/>
+          <p:nvPr/>
+        </p:nvSpPr>
+        <p:spPr>
+          <a:xfrm>
+            <a:off x="822960" y="4544568"/>
+            <a:ext cx="10543032" cy="1060704"/>
+          </a:xfrm>
+          <a:prstGeom prst="rect">
+            <a:avLst/>
+          </a:prstGeom>
+          <a:noFill/>
+          <a:ln/>
+        </p:spPr>
+        <p:txBody>
+          <a:bodyPr wrap="square" rtlCol="0" anchor="t"/>
+          <a:lstStyle/>
+          <a:p>
+            <a:pPr marL="0" indent="0">
+              <a:buNone/>
+            </a:pPr>
+            <a:r>
+              <a:rPr lang="en-US" sz="1700" b="1" dirty="0">
+                <a:solidFill>
+                  <a:srgbClr val="1A237E"/>
+                </a:solidFill>
+                <a:latin typeface="Arial" pitchFamily="34" charset="0"/>
+                <a:ea typeface="Arial" pitchFamily="34" charset="-122"/>
+                <a:cs typeface="Arial" pitchFamily="34" charset="-120"/>
+              </a:rPr>
+              <a:t>La secuencia exacta de la Actividad 2.3
+</a:t>
+            </a:r>
+            <a:endParaRPr lang="en-US" sz="1700" dirty="0"/>
+          </a:p>
+          <a:p>
+            <a:pPr marL="0" indent="0">
+              <a:buNone/>
+            </a:pPr>
+            <a:r>
+              <a:rPr lang="en-US" sz="1600" dirty="0">
+                <a:solidFill>
+                  <a:srgbClr val="212121"/>
+                </a:solidFill>
+                <a:latin typeface="Arial" pitchFamily="34" charset="0"/>
+                <a:ea typeface="Arial" pitchFamily="34" charset="-122"/>
+                <a:cs typeface="Arial" pitchFamily="34" charset="-120"/>
+              </a:rPr>
+              <a:t>Arrancar de una imagen pública, instalar lo necesario para servir una pequeña aplicación web, y capturar el resultado como tu propia imagen.</a:t>
+            </a:r>
+            <a:endParaRPr lang="en-US" sz="1700" dirty="0"/>
           </a:p>
         </p:txBody>
       </p:sp>
@@ -5854,6 +5971,13 @@
             <a:prstDash val="solid"/>
           </a:ln>
         </p:spPr>
+        <p:txBody>
+          <a:bodyPr/>
+          <a:lstStyle/>
+          <a:p>
+            <a:endParaRPr lang="es-ES"/>
+          </a:p>
+        </p:txBody>
       </p:sp>
       <p:sp>
         <p:nvSpPr>
@@ -5876,7 +6000,7 @@
           <a:bodyPr wrap="square" rtlCol="0" anchor="ctr"/>
           <a:lstStyle/>
           <a:p>
-            <a:pPr indent="0" marL="0">
+            <a:pPr marL="0" indent="0">
               <a:buNone/>
             </a:pPr>
             <a:r>
@@ -5888,7 +6012,7 @@
                 <a:ea typeface="Arial" pitchFamily="34" charset="-122"/>
                 <a:cs typeface="Arial" pitchFamily="34" charset="-120"/>
               </a:rPr>
-              <a:t>Imágenes de máquina (AMI)</a:t>
+              <a:t>Almacenamiento asociado</a:t>
             </a:r>
             <a:endParaRPr lang="en-US" sz="2400" dirty="0"/>
           </a:p>
@@ -5915,7 +6039,7 @@
           <a:bodyPr wrap="square" rtlCol="0" anchor="ctr"/>
           <a:lstStyle/>
           <a:p>
-            <a:pPr algn="r" indent="0" marL="0">
+            <a:pPr marL="0" indent="0" algn="r">
               <a:buNone/>
             </a:pPr>
             <a:r>
@@ -5935,53 +6059,14 @@
       </p:sp>
       <p:sp>
         <p:nvSpPr>
-          <p:cNvPr id="5" name="Text 3"/>
+          <p:cNvPr id="5" name="Shape 3"/>
           <p:cNvSpPr/>
           <p:nvPr/>
         </p:nvSpPr>
         <p:spPr>
           <a:xfrm>
             <a:off x="548640" y="1280160"/>
-            <a:ext cx="11091672" cy="1371600"/>
-          </a:xfrm>
-          <a:prstGeom prst="rect">
-            <a:avLst/>
-          </a:prstGeom>
-          <a:noFill/>
-          <a:ln/>
-        </p:spPr>
-        <p:txBody>
-          <a:bodyPr wrap="square" rtlCol="0" anchor="t"/>
-          <a:lstStyle/>
-          <a:p>
-            <a:pPr indent="0" marL="0">
-              <a:buNone/>
-            </a:pPr>
-            <a:r>
-              <a:rPr lang="en-US" sz="2000" dirty="0">
-                <a:solidFill>
-                  <a:srgbClr val="212121"/>
-                </a:solidFill>
-                <a:latin typeface="Arial" pitchFamily="34" charset="0"/>
-                <a:ea typeface="Arial" pitchFamily="34" charset="-122"/>
-                <a:cs typeface="Arial" pitchFamily="34" charset="-120"/>
-              </a:rPr>
-              <a:t>Una AMI (Amazon Machine Image) es la fotografía completa de un disco de arranque: sistema operativo, paquetes instalados, configuración — todo lo que hace falta para que una instancia nueva arranque ya lista, sin repetir la instalación desde cero.</a:t>
-            </a:r>
-            <a:endParaRPr lang="en-US" sz="2000" dirty="0"/>
-          </a:p>
-        </p:txBody>
-      </p:sp>
-      <p:sp>
-        <p:nvSpPr>
-          <p:cNvPr id="6" name="Shape 4"/>
-          <p:cNvSpPr/>
-          <p:nvPr/>
-        </p:nvSpPr>
-        <p:spPr>
-          <a:xfrm>
-            <a:off x="548640" y="3017520"/>
-            <a:ext cx="2464308" cy="1371600"/>
+            <a:ext cx="11091672" cy="1920240"/>
           </a:xfrm>
           <a:prstGeom prst="roundRect">
             <a:avLst/>
@@ -5996,17 +6081,24 @@
             <a:prstDash val="solid"/>
           </a:ln>
         </p:spPr>
-      </p:sp>
-      <p:sp>
-        <p:nvSpPr>
-          <p:cNvPr id="7" name="Text 5"/>
-          <p:cNvSpPr/>
-          <p:nvPr/>
-        </p:nvSpPr>
-        <p:spPr>
-          <a:xfrm>
-            <a:off x="594360" y="3063240"/>
-            <a:ext cx="2372868" cy="1280160"/>
+        <p:txBody>
+          <a:bodyPr/>
+          <a:lstStyle/>
+          <a:p>
+            <a:endParaRPr lang="es-ES"/>
+          </a:p>
+        </p:txBody>
+      </p:sp>
+      <p:sp>
+        <p:nvSpPr>
+          <p:cNvPr id="6" name="Text 4"/>
+          <p:cNvSpPr/>
+          <p:nvPr/>
+        </p:nvSpPr>
+        <p:spPr>
+          <a:xfrm>
+            <a:off x="731520" y="1353312"/>
+            <a:ext cx="10725912" cy="548640"/>
           </a:xfrm>
           <a:prstGeom prst="rect">
             <a:avLst/>
@@ -6018,11 +6110,50 @@
           <a:bodyPr wrap="square" rtlCol="0" anchor="ctr"/>
           <a:lstStyle/>
           <a:p>
-            <a:pPr algn="ctr" indent="0" marL="0">
+            <a:pPr marL="0" indent="0">
               <a:buNone/>
             </a:pPr>
             <a:r>
-              <a:rPr lang="en-US" sz="1600" dirty="0">
+              <a:rPr lang="en-US" sz="2200" b="1" dirty="0">
+                <a:solidFill>
+                  <a:srgbClr val="1A237E"/>
+                </a:solidFill>
+                <a:latin typeface="Arial" pitchFamily="34" charset="0"/>
+                <a:ea typeface="Arial" pitchFamily="34" charset="-122"/>
+                <a:cs typeface="Arial" pitchFamily="34" charset="-120"/>
+              </a:rPr>
+              <a:t>EBS (Elastic Block Store)</a:t>
+            </a:r>
+            <a:endParaRPr lang="en-US" sz="2200" dirty="0"/>
+          </a:p>
+        </p:txBody>
+      </p:sp>
+      <p:sp>
+        <p:nvSpPr>
+          <p:cNvPr id="7" name="Text 5"/>
+          <p:cNvSpPr/>
+          <p:nvPr/>
+        </p:nvSpPr>
+        <p:spPr>
+          <a:xfrm>
+            <a:off x="731520" y="1901952"/>
+            <a:ext cx="10725912" cy="1225296"/>
+          </a:xfrm>
+          <a:prstGeom prst="rect">
+            <a:avLst/>
+          </a:prstGeom>
+          <a:noFill/>
+          <a:ln/>
+        </p:spPr>
+        <p:txBody>
+          <a:bodyPr wrap="square" rtlCol="0" anchor="t"/>
+          <a:lstStyle/>
+          <a:p>
+            <a:pPr marL="0" indent="0">
+              <a:buNone/>
+            </a:pPr>
+            <a:r>
+              <a:rPr lang="en-US" sz="1800" dirty="0">
                 <a:solidFill>
                   <a:srgbClr val="212121"/>
                 </a:solidFill>
@@ -6030,16 +6161,88 @@
                 <a:ea typeface="Arial" pitchFamily="34" charset="-122"/>
                 <a:cs typeface="Arial" pitchFamily="34" charset="-120"/>
               </a:rPr>
-              <a:t>Instancia base</a:t>
+              <a:t>Cada instancia lleva al menos un volumen de disco, que existe como recurso independiente de la instancia, aunque normalmente vaya pegado a ella.</a:t>
             </a:r>
-            <a:endParaRPr lang="en-US" sz="1600" dirty="0"/>
-          </a:p>
-          <a:p>
-            <a:pPr algn="ctr" indent="0" marL="0">
+            <a:endParaRPr lang="en-US" sz="1800" dirty="0"/>
+          </a:p>
+        </p:txBody>
+      </p:sp>
+      <p:sp>
+        <p:nvSpPr>
+          <p:cNvPr id="8" name="Shape 6"/>
+          <p:cNvSpPr/>
+          <p:nvPr/>
+        </p:nvSpPr>
+        <p:spPr>
+          <a:xfrm>
+            <a:off x="548640" y="3520440"/>
+            <a:ext cx="11091672" cy="1691640"/>
+          </a:xfrm>
+          <a:prstGeom prst="roundRect">
+            <a:avLst/>
+          </a:prstGeom>
+          <a:solidFill>
+            <a:srgbClr val="FFF8E1"/>
+          </a:solidFill>
+          <a:ln w="28575">
+            <a:solidFill>
+              <a:srgbClr val="FFA000"/>
+            </a:solidFill>
+            <a:prstDash val="solid"/>
+          </a:ln>
+        </p:spPr>
+        <p:txBody>
+          <a:bodyPr/>
+          <a:lstStyle/>
+          <a:p>
+            <a:endParaRPr lang="es-ES"/>
+          </a:p>
+        </p:txBody>
+      </p:sp>
+      <p:sp>
+        <p:nvSpPr>
+          <p:cNvPr id="9" name="Text 7"/>
+          <p:cNvSpPr/>
+          <p:nvPr/>
+        </p:nvSpPr>
+        <p:spPr>
+          <a:xfrm>
+            <a:off x="822960" y="3630168"/>
+            <a:ext cx="10543032" cy="1472184"/>
+          </a:xfrm>
+          <a:prstGeom prst="rect">
+            <a:avLst/>
+          </a:prstGeom>
+          <a:noFill/>
+          <a:ln/>
+        </p:spPr>
+        <p:txBody>
+          <a:bodyPr wrap="square" rtlCol="0" anchor="t"/>
+          <a:lstStyle/>
+          <a:p>
+            <a:pPr marL="0" indent="0">
               <a:buNone/>
             </a:pPr>
             <a:r>
-              <a:rPr lang="en-US" sz="1600" dirty="0">
+              <a:rPr lang="en-US" sz="1900" b="1" dirty="0">
+                <a:solidFill>
+                  <a:srgbClr val="1A237E"/>
+                </a:solidFill>
+                <a:latin typeface="Arial" pitchFamily="34" charset="0"/>
+                <a:ea typeface="Arial" pitchFamily="34" charset="-122"/>
+                <a:cs typeface="Arial" pitchFamily="34" charset="-120"/>
+              </a:rPr>
+              <a:t>Esa independencia importa
+</a:t>
+            </a:r>
+            <a:endParaRPr lang="en-US" sz="1900" dirty="0"/>
+          </a:p>
+          <a:p>
+            <a:pPr marL="0" indent="0">
+              <a:buNone/>
+            </a:pPr>
+            <a:r>
+              <a:rPr lang="en-US" sz="1800" dirty="0">
                 <a:solidFill>
                   <a:srgbClr val="212121"/>
                 </a:solidFill>
@@ -6047,22 +6250,22 @@
                 <a:ea typeface="Arial" pitchFamily="34" charset="-122"/>
                 <a:cs typeface="Arial" pitchFamily="34" charset="-120"/>
               </a:rPr>
-              <a:t>(AMI pública)</a:t>
+              <a:t>Por defecto, si terminas la instancia, el volumen raíz se borra con ella — pero puedes configurarlo para que sobreviva. El disco no es «parte» indivisible de la instancia, es una pieza aparte que se conecta.</a:t>
             </a:r>
-            <a:endParaRPr lang="en-US" sz="1600" dirty="0"/>
-          </a:p>
-        </p:txBody>
-      </p:sp>
-      <p:sp>
-        <p:nvSpPr>
-          <p:cNvPr id="8" name="Text 6"/>
-          <p:cNvSpPr/>
-          <p:nvPr/>
-        </p:nvSpPr>
-        <p:spPr>
-          <a:xfrm>
-            <a:off x="2967228" y="3017520"/>
-            <a:ext cx="502920" cy="1371600"/>
+            <a:endParaRPr lang="en-US" sz="1900" dirty="0"/>
+          </a:p>
+        </p:txBody>
+      </p:sp>
+      <p:sp>
+        <p:nvSpPr>
+          <p:cNvPr id="10" name="Text 8"/>
+          <p:cNvSpPr/>
+          <p:nvPr/>
+        </p:nvSpPr>
+        <p:spPr>
+          <a:xfrm>
+            <a:off x="548640" y="5486400"/>
+            <a:ext cx="11091672" cy="457200"/>
           </a:xfrm>
           <a:prstGeom prst="rect">
             <a:avLst/>
@@ -6071,345 +6274,24 @@
           <a:ln/>
         </p:spPr>
         <p:txBody>
-          <a:bodyPr wrap="square" rtlCol="0" anchor="ctr"/>
-          <a:lstStyle/>
-          <a:p>
-            <a:pPr algn="ctr" indent="0" marL="0">
+          <a:bodyPr wrap="square" rtlCol="0" anchor="t"/>
+          <a:lstStyle/>
+          <a:p>
+            <a:pPr marL="0" indent="0" algn="ctr">
               <a:buNone/>
             </a:pPr>
             <a:r>
-              <a:rPr lang="en-US" sz="2200" b="1" dirty="0">
+              <a:rPr lang="en-US" sz="1500" i="1" dirty="0">
                 <a:solidFill>
-                  <a:srgbClr val="3949AB"/>
+                  <a:srgbClr val="757575"/>
                 </a:solidFill>
                 <a:latin typeface="Arial" pitchFamily="34" charset="0"/>
                 <a:ea typeface="Arial" pitchFamily="34" charset="-122"/>
                 <a:cs typeface="Arial" pitchFamily="34" charset="-120"/>
               </a:rPr>
-              <a:t>→</a:t>
+              <a:t>Verás la familia de almacenamiento en bloque con más detalle en el Tema 3.</a:t>
             </a:r>
-            <a:endParaRPr lang="en-US" sz="2200" dirty="0"/>
-          </a:p>
-        </p:txBody>
-      </p:sp>
-      <p:sp>
-        <p:nvSpPr>
-          <p:cNvPr id="9" name="Shape 7"/>
-          <p:cNvSpPr/>
-          <p:nvPr/>
-        </p:nvSpPr>
-        <p:spPr>
-          <a:xfrm>
-            <a:off x="3424428" y="3017520"/>
-            <a:ext cx="2464308" cy="1371600"/>
-          </a:xfrm>
-          <a:prstGeom prst="roundRect">
-            <a:avLst/>
-          </a:prstGeom>
-          <a:solidFill>
-            <a:srgbClr val="E8EAF6"/>
-          </a:solidFill>
-          <a:ln w="15875">
-            <a:solidFill>
-              <a:srgbClr val="3949AB"/>
-            </a:solidFill>
-            <a:prstDash val="solid"/>
-          </a:ln>
-        </p:spPr>
-      </p:sp>
-      <p:sp>
-        <p:nvSpPr>
-          <p:cNvPr id="10" name="Text 8"/>
-          <p:cNvSpPr/>
-          <p:nvPr/>
-        </p:nvSpPr>
-        <p:spPr>
-          <a:xfrm>
-            <a:off x="3470148" y="3063240"/>
-            <a:ext cx="2372868" cy="1280160"/>
-          </a:xfrm>
-          <a:prstGeom prst="rect">
-            <a:avLst/>
-          </a:prstGeom>
-          <a:noFill/>
-          <a:ln/>
-        </p:spPr>
-        <p:txBody>
-          <a:bodyPr wrap="square" rtlCol="0" anchor="ctr"/>
-          <a:lstStyle/>
-          <a:p>
-            <a:pPr algn="ctr" indent="0" marL="0">
-              <a:buNone/>
-            </a:pPr>
-            <a:r>
-              <a:rPr lang="en-US" sz="1600" dirty="0">
-                <a:solidFill>
-                  <a:srgbClr val="212121"/>
-                </a:solidFill>
-                <a:latin typeface="Arial" pitchFamily="34" charset="0"/>
-                <a:ea typeface="Arial" pitchFamily="34" charset="-122"/>
-                <a:cs typeface="Arial" pitchFamily="34" charset="-120"/>
-              </a:rPr>
-              <a:t>Instalas y configuras</a:t>
-            </a:r>
-            <a:endParaRPr lang="en-US" sz="1600" dirty="0"/>
-          </a:p>
-          <a:p>
-            <a:pPr algn="ctr" indent="0" marL="0">
-              <a:buNone/>
-            </a:pPr>
-            <a:r>
-              <a:rPr lang="en-US" sz="1600" dirty="0">
-                <a:solidFill>
-                  <a:srgbClr val="212121"/>
-                </a:solidFill>
-                <a:latin typeface="Arial" pitchFamily="34" charset="0"/>
-                <a:ea typeface="Arial" pitchFamily="34" charset="-122"/>
-                <a:cs typeface="Arial" pitchFamily="34" charset="-120"/>
-              </a:rPr>
-              <a:t>lo que necesitas</a:t>
-            </a:r>
-            <a:endParaRPr lang="en-US" sz="1600" dirty="0"/>
-          </a:p>
-        </p:txBody>
-      </p:sp>
-      <p:sp>
-        <p:nvSpPr>
-          <p:cNvPr id="11" name="Text 9"/>
-          <p:cNvSpPr/>
-          <p:nvPr/>
-        </p:nvSpPr>
-        <p:spPr>
-          <a:xfrm>
-            <a:off x="5843016" y="3017520"/>
-            <a:ext cx="502920" cy="1371600"/>
-          </a:xfrm>
-          <a:prstGeom prst="rect">
-            <a:avLst/>
-          </a:prstGeom>
-          <a:noFill/>
-          <a:ln/>
-        </p:spPr>
-        <p:txBody>
-          <a:bodyPr wrap="square" rtlCol="0" anchor="ctr"/>
-          <a:lstStyle/>
-          <a:p>
-            <a:pPr algn="ctr" indent="0" marL="0">
-              <a:buNone/>
-            </a:pPr>
-            <a:r>
-              <a:rPr lang="en-US" sz="2200" b="1" dirty="0">
-                <a:solidFill>
-                  <a:srgbClr val="3949AB"/>
-                </a:solidFill>
-                <a:latin typeface="Arial" pitchFamily="34" charset="0"/>
-                <a:ea typeface="Arial" pitchFamily="34" charset="-122"/>
-                <a:cs typeface="Arial" pitchFamily="34" charset="-120"/>
-              </a:rPr>
-              <a:t>→</a:t>
-            </a:r>
-            <a:endParaRPr lang="en-US" sz="2200" dirty="0"/>
-          </a:p>
-        </p:txBody>
-      </p:sp>
-      <p:sp>
-        <p:nvSpPr>
-          <p:cNvPr id="12" name="Shape 10"/>
-          <p:cNvSpPr/>
-          <p:nvPr/>
-        </p:nvSpPr>
-        <p:spPr>
-          <a:xfrm>
-            <a:off x="6300216" y="3017520"/>
-            <a:ext cx="2464308" cy="1371600"/>
-          </a:xfrm>
-          <a:prstGeom prst="roundRect">
-            <a:avLst/>
-          </a:prstGeom>
-          <a:solidFill>
-            <a:srgbClr val="E8EAF6"/>
-          </a:solidFill>
-          <a:ln w="15875">
-            <a:solidFill>
-              <a:srgbClr val="3949AB"/>
-            </a:solidFill>
-            <a:prstDash val="solid"/>
-          </a:ln>
-        </p:spPr>
-      </p:sp>
-      <p:sp>
-        <p:nvSpPr>
-          <p:cNvPr id="13" name="Text 11"/>
-          <p:cNvSpPr/>
-          <p:nvPr/>
-        </p:nvSpPr>
-        <p:spPr>
-          <a:xfrm>
-            <a:off x="6345936" y="3063240"/>
-            <a:ext cx="2372868" cy="1280160"/>
-          </a:xfrm>
-          <a:prstGeom prst="rect">
-            <a:avLst/>
-          </a:prstGeom>
-          <a:noFill/>
-          <a:ln/>
-        </p:spPr>
-        <p:txBody>
-          <a:bodyPr wrap="square" rtlCol="0" anchor="ctr"/>
-          <a:lstStyle/>
-          <a:p>
-            <a:pPr algn="ctr" indent="0" marL="0">
-              <a:buNone/>
-            </a:pPr>
-            <a:r>
-              <a:rPr lang="en-US" sz="1600" dirty="0">
-                <a:solidFill>
-                  <a:srgbClr val="212121"/>
-                </a:solidFill>
-                <a:latin typeface="Arial" pitchFamily="34" charset="0"/>
-                <a:ea typeface="Arial" pitchFamily="34" charset="-122"/>
-                <a:cs typeface="Arial" pitchFamily="34" charset="-120"/>
-              </a:rPr>
-              <a:t>Creas tu propia</a:t>
-            </a:r>
-            <a:endParaRPr lang="en-US" sz="1600" dirty="0"/>
-          </a:p>
-          <a:p>
-            <a:pPr algn="ctr" indent="0" marL="0">
-              <a:buNone/>
-            </a:pPr>
-            <a:r>
-              <a:rPr lang="en-US" sz="1600" dirty="0">
-                <a:solidFill>
-                  <a:srgbClr val="212121"/>
-                </a:solidFill>
-                <a:latin typeface="Arial" pitchFamily="34" charset="0"/>
-                <a:ea typeface="Arial" pitchFamily="34" charset="-122"/>
-                <a:cs typeface="Arial" pitchFamily="34" charset="-120"/>
-              </a:rPr>
-              <a:t>AMI</a:t>
-            </a:r>
-            <a:endParaRPr lang="en-US" sz="1600" dirty="0"/>
-          </a:p>
-        </p:txBody>
-      </p:sp>
-      <p:sp>
-        <p:nvSpPr>
-          <p:cNvPr id="14" name="Text 12"/>
-          <p:cNvSpPr/>
-          <p:nvPr/>
-        </p:nvSpPr>
-        <p:spPr>
-          <a:xfrm>
-            <a:off x="8718804" y="3017520"/>
-            <a:ext cx="502920" cy="1371600"/>
-          </a:xfrm>
-          <a:prstGeom prst="rect">
-            <a:avLst/>
-          </a:prstGeom>
-          <a:noFill/>
-          <a:ln/>
-        </p:spPr>
-        <p:txBody>
-          <a:bodyPr wrap="square" rtlCol="0" anchor="ctr"/>
-          <a:lstStyle/>
-          <a:p>
-            <a:pPr algn="ctr" indent="0" marL="0">
-              <a:buNone/>
-            </a:pPr>
-            <a:r>
-              <a:rPr lang="en-US" sz="2200" b="1" dirty="0">
-                <a:solidFill>
-                  <a:srgbClr val="3949AB"/>
-                </a:solidFill>
-                <a:latin typeface="Arial" pitchFamily="34" charset="0"/>
-                <a:ea typeface="Arial" pitchFamily="34" charset="-122"/>
-                <a:cs typeface="Arial" pitchFamily="34" charset="-120"/>
-              </a:rPr>
-              <a:t>→</a:t>
-            </a:r>
-            <a:endParaRPr lang="en-US" sz="2200" dirty="0"/>
-          </a:p>
-        </p:txBody>
-      </p:sp>
-      <p:sp>
-        <p:nvSpPr>
-          <p:cNvPr id="15" name="Shape 13"/>
-          <p:cNvSpPr/>
-          <p:nvPr/>
-        </p:nvSpPr>
-        <p:spPr>
-          <a:xfrm>
-            <a:off x="9176004" y="3017520"/>
-            <a:ext cx="2464308" cy="1371600"/>
-          </a:xfrm>
-          <a:prstGeom prst="roundRect">
-            <a:avLst/>
-          </a:prstGeom>
-          <a:solidFill>
-            <a:srgbClr val="E8EAF6"/>
-          </a:solidFill>
-          <a:ln w="15875">
-            <a:solidFill>
-              <a:srgbClr val="3949AB"/>
-            </a:solidFill>
-            <a:prstDash val="solid"/>
-          </a:ln>
-        </p:spPr>
-      </p:sp>
-      <p:sp>
-        <p:nvSpPr>
-          <p:cNvPr id="16" name="Text 14"/>
-          <p:cNvSpPr/>
-          <p:nvPr/>
-        </p:nvSpPr>
-        <p:spPr>
-          <a:xfrm>
-            <a:off x="9221724" y="3063240"/>
-            <a:ext cx="2372868" cy="1280160"/>
-          </a:xfrm>
-          <a:prstGeom prst="rect">
-            <a:avLst/>
-          </a:prstGeom>
-          <a:noFill/>
-          <a:ln/>
-        </p:spPr>
-        <p:txBody>
-          <a:bodyPr wrap="square" rtlCol="0" anchor="ctr"/>
-          <a:lstStyle/>
-          <a:p>
-            <a:pPr algn="ctr" indent="0" marL="0">
-              <a:buNone/>
-            </a:pPr>
-            <a:r>
-              <a:rPr lang="en-US" sz="1600" dirty="0">
-                <a:solidFill>
-                  <a:srgbClr val="212121"/>
-                </a:solidFill>
-                <a:latin typeface="Arial" pitchFamily="34" charset="0"/>
-                <a:ea typeface="Arial" pitchFamily="34" charset="-122"/>
-                <a:cs typeface="Arial" pitchFamily="34" charset="-120"/>
-              </a:rPr>
-              <a:t>Lanzas N instancias</a:t>
-            </a:r>
-            <a:endParaRPr lang="en-US" sz="1600" dirty="0"/>
-          </a:p>
-          <a:p>
-            <a:pPr algn="ctr" indent="0" marL="0">
-              <a:buNone/>
-            </a:pPr>
-            <a:r>
-              <a:rPr lang="en-US" sz="1600" dirty="0">
-                <a:solidFill>
-                  <a:srgbClr val="212121"/>
-                </a:solidFill>
-                <a:latin typeface="Arial" pitchFamily="34" charset="0"/>
-                <a:ea typeface="Arial" pitchFamily="34" charset="-122"/>
-                <a:cs typeface="Arial" pitchFamily="34" charset="-120"/>
-              </a:rPr>
-              <a:t>idénticas desde tu AMI</a:t>
-            </a:r>
-            <a:endParaRPr lang="en-US" sz="1600" dirty="0"/>
+            <a:endParaRPr lang="en-US" sz="1500" dirty="0"/>
           </a:p>
         </p:txBody>
       </p:sp>
@@ -6462,6 +6344,13 @@
             <a:prstDash val="solid"/>
           </a:ln>
         </p:spPr>
+        <p:txBody>
+          <a:bodyPr/>
+          <a:lstStyle/>
+          <a:p>
+            <a:endParaRPr lang="es-ES"/>
+          </a:p>
+        </p:txBody>
       </p:sp>
       <p:sp>
         <p:nvSpPr>
@@ -6484,7 +6373,7 @@
           <a:bodyPr wrap="square" rtlCol="0" anchor="ctr"/>
           <a:lstStyle/>
           <a:p>
-            <a:pPr indent="0" marL="0">
+            <a:pPr marL="0" indent="0">
               <a:buNone/>
             </a:pPr>
             <a:r>
@@ -6496,7 +6385,7 @@
                 <a:ea typeface="Arial" pitchFamily="34" charset="-122"/>
                 <a:cs typeface="Arial" pitchFamily="34" charset="-120"/>
               </a:rPr>
-              <a:t>Almacenamiento asociado (EBS)</a:t>
+              <a:t>Ciclo de vida: parar no es terminar</a:t>
             </a:r>
             <a:endParaRPr lang="en-US" sz="2400" dirty="0"/>
           </a:p>
@@ -6523,7 +6412,7 @@
           <a:bodyPr wrap="square" rtlCol="0" anchor="ctr"/>
           <a:lstStyle/>
           <a:p>
-            <a:pPr algn="r" indent="0" marL="0">
+            <a:pPr marL="0" indent="0" algn="r">
               <a:buNone/>
             </a:pPr>
             <a:r>
@@ -6543,53 +6432,14 @@
       </p:sp>
       <p:sp>
         <p:nvSpPr>
-          <p:cNvPr id="5" name="Text 3"/>
-          <p:cNvSpPr/>
-          <p:nvPr/>
-        </p:nvSpPr>
-        <p:spPr>
-          <a:xfrm>
-            <a:off x="548640" y="1920240"/>
-            <a:ext cx="11091672" cy="1645920"/>
-          </a:xfrm>
-          <a:prstGeom prst="rect">
-            <a:avLst/>
-          </a:prstGeom>
-          <a:noFill/>
-          <a:ln/>
-        </p:spPr>
-        <p:txBody>
-          <a:bodyPr wrap="square" rtlCol="0" anchor="t"/>
-          <a:lstStyle/>
-          <a:p>
-            <a:pPr indent="0" marL="0">
-              <a:buNone/>
-            </a:pPr>
-            <a:r>
-              <a:rPr lang="en-US" sz="2200" dirty="0">
-                <a:solidFill>
-                  <a:srgbClr val="212121"/>
-                </a:solidFill>
-                <a:latin typeface="Arial" pitchFamily="34" charset="0"/>
-                <a:ea typeface="Arial" pitchFamily="34" charset="-122"/>
-                <a:cs typeface="Arial" pitchFamily="34" charset="-120"/>
-              </a:rPr>
-              <a:t>Cada instancia EC2 lleva asociado al menos un volumen de disco — un EBS (Elastic Block Store), que existe como recurso independiente de la instancia, aunque normalmente vaya pegado a ella.</a:t>
-            </a:r>
-            <a:endParaRPr lang="en-US" sz="2200" dirty="0"/>
-          </a:p>
-        </p:txBody>
-      </p:sp>
-      <p:sp>
-        <p:nvSpPr>
-          <p:cNvPr id="6" name="Shape 4"/>
-          <p:cNvSpPr/>
-          <p:nvPr/>
-        </p:nvSpPr>
-        <p:spPr>
-          <a:xfrm>
-            <a:off x="548640" y="3886200"/>
-            <a:ext cx="11091672" cy="1280160"/>
+          <p:cNvPr id="5" name="Shape 3"/>
+          <p:cNvSpPr/>
+          <p:nvPr/>
+        </p:nvSpPr>
+        <p:spPr>
+          <a:xfrm>
+            <a:off x="548640" y="1143000"/>
+            <a:ext cx="11091672" cy="731520"/>
           </a:xfrm>
           <a:prstGeom prst="roundRect">
             <a:avLst/>
@@ -6604,17 +6454,24 @@
             <a:prstDash val="solid"/>
           </a:ln>
         </p:spPr>
-      </p:sp>
-      <p:sp>
-        <p:nvSpPr>
-          <p:cNvPr id="7" name="Text 5"/>
-          <p:cNvSpPr/>
-          <p:nvPr/>
-        </p:nvSpPr>
-        <p:spPr>
-          <a:xfrm>
-            <a:off x="822960" y="3977640"/>
-            <a:ext cx="10543032" cy="1097280"/>
+        <p:txBody>
+          <a:bodyPr/>
+          <a:lstStyle/>
+          <a:p>
+            <a:endParaRPr lang="es-ES"/>
+          </a:p>
+        </p:txBody>
+      </p:sp>
+      <p:sp>
+        <p:nvSpPr>
+          <p:cNvPr id="6" name="Text 4"/>
+          <p:cNvSpPr/>
+          <p:nvPr/>
+        </p:nvSpPr>
+        <p:spPr>
+          <a:xfrm>
+            <a:off x="822960" y="1234440"/>
+            <a:ext cx="10543032" cy="548640"/>
           </a:xfrm>
           <a:prstGeom prst="rect">
             <a:avLst/>
@@ -6626,11 +6483,11 @@
           <a:bodyPr wrap="square" rtlCol="0" anchor="ctr"/>
           <a:lstStyle/>
           <a:p>
-            <a:pPr indent="0" marL="0">
+            <a:pPr marL="0" indent="0">
               <a:buNone/>
             </a:pPr>
             <a:r>
-              <a:rPr lang="en-US" sz="2000" dirty="0">
+              <a:rPr lang="en-US" sz="1700" dirty="0">
                 <a:solidFill>
                   <a:srgbClr val="212121"/>
                 </a:solidFill>
@@ -6638,9 +6495,1270 @@
                 <a:ea typeface="Arial" pitchFamily="34" charset="-122"/>
                 <a:cs typeface="Arial" pitchFamily="34" charset="-120"/>
               </a:rPr>
-              <a:t>Por defecto, si terminas la instancia, el volumen raíz se borra con ella, pero puedes configurarlo para que sobreviva. El disco de tu instancia no es una parte indivisible de ella: es una pieza aparte que se conecta.</a:t>
+              <a:t>Confundir parar (stop) y terminar (terminate) es el error de facturación más común entre quien empieza con AWS.</a:t>
             </a:r>
-            <a:endParaRPr lang="en-US" sz="2000" dirty="0"/>
+            <a:endParaRPr lang="en-US" sz="1700" dirty="0"/>
+          </a:p>
+        </p:txBody>
+      </p:sp>
+      <p:graphicFrame>
+        <p:nvGraphicFramePr>
+          <p:cNvPr id="8" name="Table 0"/>
+          <p:cNvGraphicFramePr>
+            <a:graphicFrameLocks noGrp="1"/>
+          </p:cNvGraphicFramePr>
+          <p:nvPr>
+            <p:extLst>
+              <p:ext uri="{D42A27DB-BD31-4B8C-83A1-F6EECF244321}">
+                <p14:modId xmlns:p14="http://schemas.microsoft.com/office/powerpoint/2010/main" val="1579011935"/>
+              </p:ext>
+            </p:extLst>
+          </p:nvPr>
+        </p:nvGraphicFramePr>
+        <p:xfrm>
+          <a:off x="548640" y="2011680"/>
+          <a:ext cx="11091673" cy="2121408"/>
+        </p:xfrm>
+        <a:graphic>
+          <a:graphicData uri="http://schemas.openxmlformats.org/drawingml/2006/table">
+            <a:tbl>
+              <a:tblPr/>
+              <a:tblGrid>
+                <a:gridCol w="1774668">
+                  <a:extLst>
+                    <a:ext uri="{9D8B030D-6E8A-4147-A177-3AD203B41FA5}">
+                      <a16:colId xmlns:a16="http://schemas.microsoft.com/office/drawing/2014/main" val="20000"/>
+                    </a:ext>
+                  </a:extLst>
+                </a:gridCol>
+                <a:gridCol w="3327502">
+                  <a:extLst>
+                    <a:ext uri="{9D8B030D-6E8A-4147-A177-3AD203B41FA5}">
+                      <a16:colId xmlns:a16="http://schemas.microsoft.com/office/drawing/2014/main" val="20001"/>
+                    </a:ext>
+                  </a:extLst>
+                </a:gridCol>
+                <a:gridCol w="3327502">
+                  <a:extLst>
+                    <a:ext uri="{9D8B030D-6E8A-4147-A177-3AD203B41FA5}">
+                      <a16:colId xmlns:a16="http://schemas.microsoft.com/office/drawing/2014/main" val="20002"/>
+                    </a:ext>
+                  </a:extLst>
+                </a:gridCol>
+                <a:gridCol w="2662001">
+                  <a:extLst>
+                    <a:ext uri="{9D8B030D-6E8A-4147-A177-3AD203B41FA5}">
+                      <a16:colId xmlns:a16="http://schemas.microsoft.com/office/drawing/2014/main" val="20003"/>
+                    </a:ext>
+                  </a:extLst>
+                </a:gridCol>
+              </a:tblGrid>
+              <a:tr h="530352">
+                <a:tc>
+                  <a:txBody>
+                    <a:bodyPr/>
+                    <a:lstStyle/>
+                    <a:p>
+                      <a:pPr marL="0" indent="0" algn="ctr">
+                        <a:buNone/>
+                      </a:pPr>
+                      <a:r>
+                        <a:rPr lang="en-US" sz="1300" b="1" dirty="0">
+                          <a:solidFill>
+                            <a:srgbClr val="FFFFFF"/>
+                          </a:solidFill>
+                          <a:latin typeface="Arial" pitchFamily="34" charset="0"/>
+                          <a:ea typeface="Arial" pitchFamily="34" charset="-122"/>
+                          <a:cs typeface="Arial" pitchFamily="34" charset="-120"/>
+                        </a:rPr>
+                        <a:t>Estado</a:t>
+                      </a:r>
+                      <a:endParaRPr lang="en-US" sz="1300" dirty="0">
+                        <a:latin typeface="Arial" charset="0"/>
+                        <a:ea typeface="Arial" charset="0"/>
+                        <a:cs typeface="Arial" charset="0"/>
+                      </a:endParaRPr>
+                    </a:p>
+                  </a:txBody>
+                  <a:tcPr anchor="ctr">
+                    <a:lnL w="12700" cap="flat" cmpd="sng" algn="ctr">
+                      <a:solidFill>
+                        <a:srgbClr val="EEEEEE"/>
+                      </a:solidFill>
+                      <a:prstDash val="solid"/>
+                      <a:round/>
+                      <a:headEnd type="none" w="med" len="med"/>
+                      <a:tailEnd type="none" w="med" len="med"/>
+                    </a:lnL>
+                    <a:lnR w="12700" cap="flat" cmpd="sng" algn="ctr">
+                      <a:solidFill>
+                        <a:srgbClr val="EEEEEE"/>
+                      </a:solidFill>
+                      <a:prstDash val="solid"/>
+                      <a:round/>
+                      <a:headEnd type="none" w="med" len="med"/>
+                      <a:tailEnd type="none" w="med" len="med"/>
+                    </a:lnR>
+                    <a:lnT w="12700" cap="flat" cmpd="sng" algn="ctr">
+                      <a:solidFill>
+                        <a:srgbClr val="EEEEEE"/>
+                      </a:solidFill>
+                      <a:prstDash val="solid"/>
+                      <a:round/>
+                      <a:headEnd type="none" w="med" len="med"/>
+                      <a:tailEnd type="none" w="med" len="med"/>
+                    </a:lnT>
+                    <a:lnB w="12700" cap="flat" cmpd="sng" algn="ctr">
+                      <a:solidFill>
+                        <a:srgbClr val="EEEEEE"/>
+                      </a:solidFill>
+                      <a:prstDash val="solid"/>
+                      <a:round/>
+                      <a:headEnd type="none" w="med" len="med"/>
+                      <a:tailEnd type="none" w="med" len="med"/>
+                    </a:lnB>
+                    <a:solidFill>
+                      <a:srgbClr val="3949AB"/>
+                    </a:solidFill>
+                  </a:tcPr>
+                </a:tc>
+                <a:tc>
+                  <a:txBody>
+                    <a:bodyPr/>
+                    <a:lstStyle/>
+                    <a:p>
+                      <a:pPr marL="0" indent="0" algn="ctr">
+                        <a:buNone/>
+                      </a:pPr>
+                      <a:r>
+                        <a:rPr lang="en-US" sz="1300" b="1" dirty="0">
+                          <a:solidFill>
+                            <a:srgbClr val="FFFFFF"/>
+                          </a:solidFill>
+                          <a:latin typeface="Arial" pitchFamily="34" charset="0"/>
+                          <a:ea typeface="Arial" pitchFamily="34" charset="-122"/>
+                          <a:cs typeface="Arial" pitchFamily="34" charset="-120"/>
+                        </a:rPr>
+                        <a:t>Qué pasa con la instancia</a:t>
+                      </a:r>
+                      <a:endParaRPr lang="en-US" sz="1300" dirty="0">
+                        <a:latin typeface="Arial" charset="0"/>
+                        <a:ea typeface="Arial" charset="0"/>
+                        <a:cs typeface="Arial" charset="0"/>
+                      </a:endParaRPr>
+                    </a:p>
+                  </a:txBody>
+                  <a:tcPr anchor="ctr">
+                    <a:lnL w="12700" cap="flat" cmpd="sng" algn="ctr">
+                      <a:solidFill>
+                        <a:srgbClr val="EEEEEE"/>
+                      </a:solidFill>
+                      <a:prstDash val="solid"/>
+                      <a:round/>
+                      <a:headEnd type="none" w="med" len="med"/>
+                      <a:tailEnd type="none" w="med" len="med"/>
+                    </a:lnL>
+                    <a:lnR w="12700" cap="flat" cmpd="sng" algn="ctr">
+                      <a:solidFill>
+                        <a:srgbClr val="EEEEEE"/>
+                      </a:solidFill>
+                      <a:prstDash val="solid"/>
+                      <a:round/>
+                      <a:headEnd type="none" w="med" len="med"/>
+                      <a:tailEnd type="none" w="med" len="med"/>
+                    </a:lnR>
+                    <a:lnT w="12700" cap="flat" cmpd="sng" algn="ctr">
+                      <a:solidFill>
+                        <a:srgbClr val="EEEEEE"/>
+                      </a:solidFill>
+                      <a:prstDash val="solid"/>
+                      <a:round/>
+                      <a:headEnd type="none" w="med" len="med"/>
+                      <a:tailEnd type="none" w="med" len="med"/>
+                    </a:lnT>
+                    <a:lnB w="12700" cap="flat" cmpd="sng" algn="ctr">
+                      <a:solidFill>
+                        <a:srgbClr val="EEEEEE"/>
+                      </a:solidFill>
+                      <a:prstDash val="solid"/>
+                      <a:round/>
+                      <a:headEnd type="none" w="med" len="med"/>
+                      <a:tailEnd type="none" w="med" len="med"/>
+                    </a:lnB>
+                    <a:solidFill>
+                      <a:srgbClr val="3949AB"/>
+                    </a:solidFill>
+                  </a:tcPr>
+                </a:tc>
+                <a:tc>
+                  <a:txBody>
+                    <a:bodyPr/>
+                    <a:lstStyle/>
+                    <a:p>
+                      <a:pPr marL="0" indent="0" algn="ctr">
+                        <a:buNone/>
+                      </a:pPr>
+                      <a:r>
+                        <a:rPr lang="en-US" sz="1300" b="1" dirty="0">
+                          <a:solidFill>
+                            <a:srgbClr val="FFFFFF"/>
+                          </a:solidFill>
+                          <a:latin typeface="Arial" pitchFamily="34" charset="0"/>
+                          <a:ea typeface="Arial" pitchFamily="34" charset="-122"/>
+                          <a:cs typeface="Arial" pitchFamily="34" charset="-120"/>
+                        </a:rPr>
+                        <a:t>Qué pasa con el disco</a:t>
+                      </a:r>
+                      <a:endParaRPr lang="en-US" sz="1300" dirty="0">
+                        <a:latin typeface="Arial" charset="0"/>
+                        <a:ea typeface="Arial" charset="0"/>
+                        <a:cs typeface="Arial" charset="0"/>
+                      </a:endParaRPr>
+                    </a:p>
+                  </a:txBody>
+                  <a:tcPr anchor="ctr">
+                    <a:lnL w="12700" cap="flat" cmpd="sng" algn="ctr">
+                      <a:solidFill>
+                        <a:srgbClr val="EEEEEE"/>
+                      </a:solidFill>
+                      <a:prstDash val="solid"/>
+                      <a:round/>
+                      <a:headEnd type="none" w="med" len="med"/>
+                      <a:tailEnd type="none" w="med" len="med"/>
+                    </a:lnL>
+                    <a:lnR w="12700" cap="flat" cmpd="sng" algn="ctr">
+                      <a:solidFill>
+                        <a:srgbClr val="EEEEEE"/>
+                      </a:solidFill>
+                      <a:prstDash val="solid"/>
+                      <a:round/>
+                      <a:headEnd type="none" w="med" len="med"/>
+                      <a:tailEnd type="none" w="med" len="med"/>
+                    </a:lnR>
+                    <a:lnT w="12700" cap="flat" cmpd="sng" algn="ctr">
+                      <a:solidFill>
+                        <a:srgbClr val="EEEEEE"/>
+                      </a:solidFill>
+                      <a:prstDash val="solid"/>
+                      <a:round/>
+                      <a:headEnd type="none" w="med" len="med"/>
+                      <a:tailEnd type="none" w="med" len="med"/>
+                    </a:lnT>
+                    <a:lnB w="12700" cap="flat" cmpd="sng" algn="ctr">
+                      <a:solidFill>
+                        <a:srgbClr val="EEEEEE"/>
+                      </a:solidFill>
+                      <a:prstDash val="solid"/>
+                      <a:round/>
+                      <a:headEnd type="none" w="med" len="med"/>
+                      <a:tailEnd type="none" w="med" len="med"/>
+                    </a:lnB>
+                    <a:solidFill>
+                      <a:srgbClr val="3949AB"/>
+                    </a:solidFill>
+                  </a:tcPr>
+                </a:tc>
+                <a:tc>
+                  <a:txBody>
+                    <a:bodyPr/>
+                    <a:lstStyle/>
+                    <a:p>
+                      <a:pPr marL="0" indent="0" algn="ctr">
+                        <a:buNone/>
+                      </a:pPr>
+                      <a:r>
+                        <a:rPr lang="en-US" sz="1300" b="1" dirty="0">
+                          <a:solidFill>
+                            <a:srgbClr val="FFFFFF"/>
+                          </a:solidFill>
+                          <a:latin typeface="Arial" pitchFamily="34" charset="0"/>
+                          <a:ea typeface="Arial" pitchFamily="34" charset="-122"/>
+                          <a:cs typeface="Arial" pitchFamily="34" charset="-120"/>
+                        </a:rPr>
+                        <a:t>¿Factura cómputo?</a:t>
+                      </a:r>
+                      <a:endParaRPr lang="en-US" sz="1300" dirty="0">
+                        <a:latin typeface="Arial" charset="0"/>
+                        <a:ea typeface="Arial" charset="0"/>
+                        <a:cs typeface="Arial" charset="0"/>
+                      </a:endParaRPr>
+                    </a:p>
+                  </a:txBody>
+                  <a:tcPr anchor="ctr">
+                    <a:lnL w="12700" cap="flat" cmpd="sng" algn="ctr">
+                      <a:solidFill>
+                        <a:srgbClr val="EEEEEE"/>
+                      </a:solidFill>
+                      <a:prstDash val="solid"/>
+                      <a:round/>
+                      <a:headEnd type="none" w="med" len="med"/>
+                      <a:tailEnd type="none" w="med" len="med"/>
+                    </a:lnL>
+                    <a:lnR w="12700" cap="flat" cmpd="sng" algn="ctr">
+                      <a:solidFill>
+                        <a:srgbClr val="EEEEEE"/>
+                      </a:solidFill>
+                      <a:prstDash val="solid"/>
+                      <a:round/>
+                      <a:headEnd type="none" w="med" len="med"/>
+                      <a:tailEnd type="none" w="med" len="med"/>
+                    </a:lnR>
+                    <a:lnT w="12700" cap="flat" cmpd="sng" algn="ctr">
+                      <a:solidFill>
+                        <a:srgbClr val="EEEEEE"/>
+                      </a:solidFill>
+                      <a:prstDash val="solid"/>
+                      <a:round/>
+                      <a:headEnd type="none" w="med" len="med"/>
+                      <a:tailEnd type="none" w="med" len="med"/>
+                    </a:lnT>
+                    <a:lnB w="12700" cap="flat" cmpd="sng" algn="ctr">
+                      <a:solidFill>
+                        <a:srgbClr val="EEEEEE"/>
+                      </a:solidFill>
+                      <a:prstDash val="solid"/>
+                      <a:round/>
+                      <a:headEnd type="none" w="med" len="med"/>
+                      <a:tailEnd type="none" w="med" len="med"/>
+                    </a:lnB>
+                    <a:solidFill>
+                      <a:srgbClr val="3949AB"/>
+                    </a:solidFill>
+                  </a:tcPr>
+                </a:tc>
+                <a:extLst>
+                  <a:ext uri="{0D108BD9-81ED-4DB2-BD59-A6C34878D82A}">
+                    <a16:rowId xmlns:a16="http://schemas.microsoft.com/office/drawing/2014/main" val="10000"/>
+                  </a:ext>
+                </a:extLst>
+              </a:tr>
+              <a:tr h="530352">
+                <a:tc>
+                  <a:txBody>
+                    <a:bodyPr/>
+                    <a:lstStyle/>
+                    <a:p>
+                      <a:pPr marL="0" indent="0">
+                        <a:buNone/>
+                      </a:pPr>
+                      <a:r>
+                        <a:rPr lang="en-US" sz="1200" b="1" dirty="0">
+                          <a:solidFill>
+                            <a:srgbClr val="212121"/>
+                          </a:solidFill>
+                          <a:latin typeface="Arial" pitchFamily="34" charset="0"/>
+                          <a:ea typeface="Arial" pitchFamily="34" charset="-122"/>
+                          <a:cs typeface="Arial" pitchFamily="34" charset="-120"/>
+                        </a:rPr>
+                        <a:t>En marcha</a:t>
+                      </a:r>
+                      <a:endParaRPr lang="en-US" sz="1200" dirty="0">
+                        <a:latin typeface="Arial" charset="0"/>
+                        <a:ea typeface="Arial" charset="0"/>
+                        <a:cs typeface="Arial" charset="0"/>
+                      </a:endParaRPr>
+                    </a:p>
+                  </a:txBody>
+                  <a:tcPr anchor="ctr">
+                    <a:lnL w="12700" cap="flat" cmpd="sng" algn="ctr">
+                      <a:solidFill>
+                        <a:srgbClr val="EEEEEE"/>
+                      </a:solidFill>
+                      <a:prstDash val="solid"/>
+                      <a:round/>
+                      <a:headEnd type="none" w="med" len="med"/>
+                      <a:tailEnd type="none" w="med" len="med"/>
+                    </a:lnL>
+                    <a:lnR w="12700" cap="flat" cmpd="sng" algn="ctr">
+                      <a:solidFill>
+                        <a:srgbClr val="EEEEEE"/>
+                      </a:solidFill>
+                      <a:prstDash val="solid"/>
+                      <a:round/>
+                      <a:headEnd type="none" w="med" len="med"/>
+                      <a:tailEnd type="none" w="med" len="med"/>
+                    </a:lnR>
+                    <a:lnT w="12700" cap="flat" cmpd="sng" algn="ctr">
+                      <a:solidFill>
+                        <a:srgbClr val="EEEEEE"/>
+                      </a:solidFill>
+                      <a:prstDash val="solid"/>
+                      <a:round/>
+                      <a:headEnd type="none" w="med" len="med"/>
+                      <a:tailEnd type="none" w="med" len="med"/>
+                    </a:lnT>
+                    <a:lnB w="12700" cap="flat" cmpd="sng" algn="ctr">
+                      <a:solidFill>
+                        <a:srgbClr val="EEEEEE"/>
+                      </a:solidFill>
+                      <a:prstDash val="solid"/>
+                      <a:round/>
+                      <a:headEnd type="none" w="med" len="med"/>
+                      <a:tailEnd type="none" w="med" len="med"/>
+                    </a:lnB>
+                    <a:solidFill>
+                      <a:srgbClr val="FFFFFF"/>
+                    </a:solidFill>
+                  </a:tcPr>
+                </a:tc>
+                <a:tc>
+                  <a:txBody>
+                    <a:bodyPr/>
+                    <a:lstStyle/>
+                    <a:p>
+                      <a:pPr marL="0" indent="0">
+                        <a:buNone/>
+                      </a:pPr>
+                      <a:r>
+                        <a:rPr lang="en-US" sz="1200" dirty="0">
+                          <a:solidFill>
+                            <a:srgbClr val="212121"/>
+                          </a:solidFill>
+                          <a:latin typeface="Arial" pitchFamily="34" charset="0"/>
+                          <a:ea typeface="Arial" pitchFamily="34" charset="-122"/>
+                          <a:cs typeface="Arial" pitchFamily="34" charset="-120"/>
+                        </a:rPr>
+                        <a:t>Activa, consumiendo recursos</a:t>
+                      </a:r>
+                      <a:endParaRPr lang="en-US" sz="1200" dirty="0">
+                        <a:latin typeface="Arial" charset="0"/>
+                        <a:ea typeface="Arial" charset="0"/>
+                        <a:cs typeface="Arial" charset="0"/>
+                      </a:endParaRPr>
+                    </a:p>
+                  </a:txBody>
+                  <a:tcPr anchor="ctr">
+                    <a:lnL w="12700" cap="flat" cmpd="sng" algn="ctr">
+                      <a:solidFill>
+                        <a:srgbClr val="EEEEEE"/>
+                      </a:solidFill>
+                      <a:prstDash val="solid"/>
+                      <a:round/>
+                      <a:headEnd type="none" w="med" len="med"/>
+                      <a:tailEnd type="none" w="med" len="med"/>
+                    </a:lnL>
+                    <a:lnR w="12700" cap="flat" cmpd="sng" algn="ctr">
+                      <a:solidFill>
+                        <a:srgbClr val="EEEEEE"/>
+                      </a:solidFill>
+                      <a:prstDash val="solid"/>
+                      <a:round/>
+                      <a:headEnd type="none" w="med" len="med"/>
+                      <a:tailEnd type="none" w="med" len="med"/>
+                    </a:lnR>
+                    <a:lnT w="12700" cap="flat" cmpd="sng" algn="ctr">
+                      <a:solidFill>
+                        <a:srgbClr val="EEEEEE"/>
+                      </a:solidFill>
+                      <a:prstDash val="solid"/>
+                      <a:round/>
+                      <a:headEnd type="none" w="med" len="med"/>
+                      <a:tailEnd type="none" w="med" len="med"/>
+                    </a:lnT>
+                    <a:lnB w="12700" cap="flat" cmpd="sng" algn="ctr">
+                      <a:solidFill>
+                        <a:srgbClr val="EEEEEE"/>
+                      </a:solidFill>
+                      <a:prstDash val="solid"/>
+                      <a:round/>
+                      <a:headEnd type="none" w="med" len="med"/>
+                      <a:tailEnd type="none" w="med" len="med"/>
+                    </a:lnB>
+                    <a:solidFill>
+                      <a:srgbClr val="FFFFFF"/>
+                    </a:solidFill>
+                  </a:tcPr>
+                </a:tc>
+                <a:tc>
+                  <a:txBody>
+                    <a:bodyPr/>
+                    <a:lstStyle/>
+                    <a:p>
+                      <a:pPr marL="0" indent="0">
+                        <a:buNone/>
+                      </a:pPr>
+                      <a:r>
+                        <a:rPr lang="en-US" sz="1200" dirty="0">
+                          <a:solidFill>
+                            <a:srgbClr val="212121"/>
+                          </a:solidFill>
+                          <a:latin typeface="Arial" pitchFamily="34" charset="0"/>
+                          <a:ea typeface="Arial" pitchFamily="34" charset="-122"/>
+                          <a:cs typeface="Arial" pitchFamily="34" charset="-120"/>
+                        </a:rPr>
+                        <a:t>Activo</a:t>
+                      </a:r>
+                      <a:endParaRPr lang="en-US" sz="1200" dirty="0">
+                        <a:latin typeface="Arial" charset="0"/>
+                        <a:ea typeface="Arial" charset="0"/>
+                        <a:cs typeface="Arial" charset="0"/>
+                      </a:endParaRPr>
+                    </a:p>
+                  </a:txBody>
+                  <a:tcPr anchor="ctr">
+                    <a:lnL w="12700" cap="flat" cmpd="sng" algn="ctr">
+                      <a:solidFill>
+                        <a:srgbClr val="EEEEEE"/>
+                      </a:solidFill>
+                      <a:prstDash val="solid"/>
+                      <a:round/>
+                      <a:headEnd type="none" w="med" len="med"/>
+                      <a:tailEnd type="none" w="med" len="med"/>
+                    </a:lnL>
+                    <a:lnR w="12700" cap="flat" cmpd="sng" algn="ctr">
+                      <a:solidFill>
+                        <a:srgbClr val="EEEEEE"/>
+                      </a:solidFill>
+                      <a:prstDash val="solid"/>
+                      <a:round/>
+                      <a:headEnd type="none" w="med" len="med"/>
+                      <a:tailEnd type="none" w="med" len="med"/>
+                    </a:lnR>
+                    <a:lnT w="12700" cap="flat" cmpd="sng" algn="ctr">
+                      <a:solidFill>
+                        <a:srgbClr val="EEEEEE"/>
+                      </a:solidFill>
+                      <a:prstDash val="solid"/>
+                      <a:round/>
+                      <a:headEnd type="none" w="med" len="med"/>
+                      <a:tailEnd type="none" w="med" len="med"/>
+                    </a:lnT>
+                    <a:lnB w="12700" cap="flat" cmpd="sng" algn="ctr">
+                      <a:solidFill>
+                        <a:srgbClr val="EEEEEE"/>
+                      </a:solidFill>
+                      <a:prstDash val="solid"/>
+                      <a:round/>
+                      <a:headEnd type="none" w="med" len="med"/>
+                      <a:tailEnd type="none" w="med" len="med"/>
+                    </a:lnB>
+                    <a:solidFill>
+                      <a:srgbClr val="FFFFFF"/>
+                    </a:solidFill>
+                  </a:tcPr>
+                </a:tc>
+                <a:tc>
+                  <a:txBody>
+                    <a:bodyPr/>
+                    <a:lstStyle/>
+                    <a:p>
+                      <a:pPr marL="0" indent="0">
+                        <a:buNone/>
+                      </a:pPr>
+                      <a:r>
+                        <a:rPr lang="en-US" sz="1200" dirty="0">
+                          <a:solidFill>
+                            <a:srgbClr val="212121"/>
+                          </a:solidFill>
+                          <a:latin typeface="Arial" pitchFamily="34" charset="0"/>
+                          <a:ea typeface="Arial" pitchFamily="34" charset="-122"/>
+                          <a:cs typeface="Arial" pitchFamily="34" charset="-120"/>
+                        </a:rPr>
+                        <a:t>Sí</a:t>
+                      </a:r>
+                      <a:endParaRPr lang="en-US" sz="1200" dirty="0">
+                        <a:latin typeface="Arial" charset="0"/>
+                        <a:ea typeface="Arial" charset="0"/>
+                        <a:cs typeface="Arial" charset="0"/>
+                      </a:endParaRPr>
+                    </a:p>
+                  </a:txBody>
+                  <a:tcPr anchor="ctr">
+                    <a:lnL w="12700" cap="flat" cmpd="sng" algn="ctr">
+                      <a:solidFill>
+                        <a:srgbClr val="EEEEEE"/>
+                      </a:solidFill>
+                      <a:prstDash val="solid"/>
+                      <a:round/>
+                      <a:headEnd type="none" w="med" len="med"/>
+                      <a:tailEnd type="none" w="med" len="med"/>
+                    </a:lnL>
+                    <a:lnR w="12700" cap="flat" cmpd="sng" algn="ctr">
+                      <a:solidFill>
+                        <a:srgbClr val="EEEEEE"/>
+                      </a:solidFill>
+                      <a:prstDash val="solid"/>
+                      <a:round/>
+                      <a:headEnd type="none" w="med" len="med"/>
+                      <a:tailEnd type="none" w="med" len="med"/>
+                    </a:lnR>
+                    <a:lnT w="12700" cap="flat" cmpd="sng" algn="ctr">
+                      <a:solidFill>
+                        <a:srgbClr val="EEEEEE"/>
+                      </a:solidFill>
+                      <a:prstDash val="solid"/>
+                      <a:round/>
+                      <a:headEnd type="none" w="med" len="med"/>
+                      <a:tailEnd type="none" w="med" len="med"/>
+                    </a:lnT>
+                    <a:lnB w="12700" cap="flat" cmpd="sng" algn="ctr">
+                      <a:solidFill>
+                        <a:srgbClr val="EEEEEE"/>
+                      </a:solidFill>
+                      <a:prstDash val="solid"/>
+                      <a:round/>
+                      <a:headEnd type="none" w="med" len="med"/>
+                      <a:tailEnd type="none" w="med" len="med"/>
+                    </a:lnB>
+                    <a:solidFill>
+                      <a:srgbClr val="FFFFFF"/>
+                    </a:solidFill>
+                  </a:tcPr>
+                </a:tc>
+                <a:extLst>
+                  <a:ext uri="{0D108BD9-81ED-4DB2-BD59-A6C34878D82A}">
+                    <a16:rowId xmlns:a16="http://schemas.microsoft.com/office/drawing/2014/main" val="10001"/>
+                  </a:ext>
+                </a:extLst>
+              </a:tr>
+              <a:tr h="530352">
+                <a:tc>
+                  <a:txBody>
+                    <a:bodyPr/>
+                    <a:lstStyle/>
+                    <a:p>
+                      <a:pPr marL="0" indent="0">
+                        <a:buNone/>
+                      </a:pPr>
+                      <a:r>
+                        <a:rPr lang="en-US" sz="1200" b="1" dirty="0">
+                          <a:solidFill>
+                            <a:srgbClr val="212121"/>
+                          </a:solidFill>
+                          <a:latin typeface="Arial" pitchFamily="34" charset="0"/>
+                          <a:ea typeface="Arial" pitchFamily="34" charset="-122"/>
+                          <a:cs typeface="Arial" pitchFamily="34" charset="-120"/>
+                        </a:rPr>
+                        <a:t>Parada</a:t>
+                      </a:r>
+                      <a:endParaRPr lang="en-US" sz="1200" dirty="0">
+                        <a:latin typeface="Arial" charset="0"/>
+                        <a:ea typeface="Arial" charset="0"/>
+                        <a:cs typeface="Arial" charset="0"/>
+                      </a:endParaRPr>
+                    </a:p>
+                  </a:txBody>
+                  <a:tcPr anchor="ctr">
+                    <a:lnL w="12700" cap="flat" cmpd="sng" algn="ctr">
+                      <a:solidFill>
+                        <a:srgbClr val="EEEEEE"/>
+                      </a:solidFill>
+                      <a:prstDash val="solid"/>
+                      <a:round/>
+                      <a:headEnd type="none" w="med" len="med"/>
+                      <a:tailEnd type="none" w="med" len="med"/>
+                    </a:lnL>
+                    <a:lnR w="12700" cap="flat" cmpd="sng" algn="ctr">
+                      <a:solidFill>
+                        <a:srgbClr val="EEEEEE"/>
+                      </a:solidFill>
+                      <a:prstDash val="solid"/>
+                      <a:round/>
+                      <a:headEnd type="none" w="med" len="med"/>
+                      <a:tailEnd type="none" w="med" len="med"/>
+                    </a:lnR>
+                    <a:lnT w="12700" cap="flat" cmpd="sng" algn="ctr">
+                      <a:solidFill>
+                        <a:srgbClr val="EEEEEE"/>
+                      </a:solidFill>
+                      <a:prstDash val="solid"/>
+                      <a:round/>
+                      <a:headEnd type="none" w="med" len="med"/>
+                      <a:tailEnd type="none" w="med" len="med"/>
+                    </a:lnT>
+                    <a:lnB w="12700" cap="flat" cmpd="sng" algn="ctr">
+                      <a:solidFill>
+                        <a:srgbClr val="EEEEEE"/>
+                      </a:solidFill>
+                      <a:prstDash val="solid"/>
+                      <a:round/>
+                      <a:headEnd type="none" w="med" len="med"/>
+                      <a:tailEnd type="none" w="med" len="med"/>
+                    </a:lnB>
+                    <a:solidFill>
+                      <a:srgbClr val="F5F5F5"/>
+                    </a:solidFill>
+                  </a:tcPr>
+                </a:tc>
+                <a:tc>
+                  <a:txBody>
+                    <a:bodyPr/>
+                    <a:lstStyle/>
+                    <a:p>
+                      <a:pPr marL="0" indent="0">
+                        <a:buNone/>
+                      </a:pPr>
+                      <a:r>
+                        <a:rPr lang="en-US" sz="1200" dirty="0">
+                          <a:solidFill>
+                            <a:srgbClr val="212121"/>
+                          </a:solidFill>
+                          <a:latin typeface="Arial" pitchFamily="34" charset="0"/>
+                          <a:ea typeface="Arial" pitchFamily="34" charset="-122"/>
+                          <a:cs typeface="Arial" pitchFamily="34" charset="-120"/>
+                        </a:rPr>
+                        <a:t>Apagada, pero sigue existiendo</a:t>
+                      </a:r>
+                      <a:endParaRPr lang="en-US" sz="1200" dirty="0">
+                        <a:latin typeface="Arial" charset="0"/>
+                        <a:ea typeface="Arial" charset="0"/>
+                        <a:cs typeface="Arial" charset="0"/>
+                      </a:endParaRPr>
+                    </a:p>
+                  </a:txBody>
+                  <a:tcPr anchor="ctr">
+                    <a:lnL w="12700" cap="flat" cmpd="sng" algn="ctr">
+                      <a:solidFill>
+                        <a:srgbClr val="EEEEEE"/>
+                      </a:solidFill>
+                      <a:prstDash val="solid"/>
+                      <a:round/>
+                      <a:headEnd type="none" w="med" len="med"/>
+                      <a:tailEnd type="none" w="med" len="med"/>
+                    </a:lnL>
+                    <a:lnR w="12700" cap="flat" cmpd="sng" algn="ctr">
+                      <a:solidFill>
+                        <a:srgbClr val="EEEEEE"/>
+                      </a:solidFill>
+                      <a:prstDash val="solid"/>
+                      <a:round/>
+                      <a:headEnd type="none" w="med" len="med"/>
+                      <a:tailEnd type="none" w="med" len="med"/>
+                    </a:lnR>
+                    <a:lnT w="12700" cap="flat" cmpd="sng" algn="ctr">
+                      <a:solidFill>
+                        <a:srgbClr val="EEEEEE"/>
+                      </a:solidFill>
+                      <a:prstDash val="solid"/>
+                      <a:round/>
+                      <a:headEnd type="none" w="med" len="med"/>
+                      <a:tailEnd type="none" w="med" len="med"/>
+                    </a:lnT>
+                    <a:lnB w="12700" cap="flat" cmpd="sng" algn="ctr">
+                      <a:solidFill>
+                        <a:srgbClr val="EEEEEE"/>
+                      </a:solidFill>
+                      <a:prstDash val="solid"/>
+                      <a:round/>
+                      <a:headEnd type="none" w="med" len="med"/>
+                      <a:tailEnd type="none" w="med" len="med"/>
+                    </a:lnB>
+                    <a:solidFill>
+                      <a:srgbClr val="F5F5F5"/>
+                    </a:solidFill>
+                  </a:tcPr>
+                </a:tc>
+                <a:tc>
+                  <a:txBody>
+                    <a:bodyPr/>
+                    <a:lstStyle/>
+                    <a:p>
+                      <a:pPr marL="0" indent="0">
+                        <a:buNone/>
+                      </a:pPr>
+                      <a:r>
+                        <a:rPr lang="en-US" sz="1200" dirty="0">
+                          <a:solidFill>
+                            <a:srgbClr val="212121"/>
+                          </a:solidFill>
+                          <a:latin typeface="Arial" pitchFamily="34" charset="0"/>
+                          <a:ea typeface="Arial" pitchFamily="34" charset="-122"/>
+                          <a:cs typeface="Arial" pitchFamily="34" charset="-120"/>
+                        </a:rPr>
+                        <a:t>Sigue existiendo y facturándose</a:t>
+                      </a:r>
+                      <a:endParaRPr lang="en-US" sz="1200" dirty="0">
+                        <a:latin typeface="Arial" charset="0"/>
+                        <a:ea typeface="Arial" charset="0"/>
+                        <a:cs typeface="Arial" charset="0"/>
+                      </a:endParaRPr>
+                    </a:p>
+                  </a:txBody>
+                  <a:tcPr anchor="ctr">
+                    <a:lnL w="12700" cap="flat" cmpd="sng" algn="ctr">
+                      <a:solidFill>
+                        <a:srgbClr val="EEEEEE"/>
+                      </a:solidFill>
+                      <a:prstDash val="solid"/>
+                      <a:round/>
+                      <a:headEnd type="none" w="med" len="med"/>
+                      <a:tailEnd type="none" w="med" len="med"/>
+                    </a:lnL>
+                    <a:lnR w="12700" cap="flat" cmpd="sng" algn="ctr">
+                      <a:solidFill>
+                        <a:srgbClr val="EEEEEE"/>
+                      </a:solidFill>
+                      <a:prstDash val="solid"/>
+                      <a:round/>
+                      <a:headEnd type="none" w="med" len="med"/>
+                      <a:tailEnd type="none" w="med" len="med"/>
+                    </a:lnR>
+                    <a:lnT w="12700" cap="flat" cmpd="sng" algn="ctr">
+                      <a:solidFill>
+                        <a:srgbClr val="EEEEEE"/>
+                      </a:solidFill>
+                      <a:prstDash val="solid"/>
+                      <a:round/>
+                      <a:headEnd type="none" w="med" len="med"/>
+                      <a:tailEnd type="none" w="med" len="med"/>
+                    </a:lnT>
+                    <a:lnB w="12700" cap="flat" cmpd="sng" algn="ctr">
+                      <a:solidFill>
+                        <a:srgbClr val="EEEEEE"/>
+                      </a:solidFill>
+                      <a:prstDash val="solid"/>
+                      <a:round/>
+                      <a:headEnd type="none" w="med" len="med"/>
+                      <a:tailEnd type="none" w="med" len="med"/>
+                    </a:lnB>
+                    <a:solidFill>
+                      <a:srgbClr val="F5F5F5"/>
+                    </a:solidFill>
+                  </a:tcPr>
+                </a:tc>
+                <a:tc>
+                  <a:txBody>
+                    <a:bodyPr/>
+                    <a:lstStyle/>
+                    <a:p>
+                      <a:pPr marL="0" indent="0">
+                        <a:buNone/>
+                      </a:pPr>
+                      <a:r>
+                        <a:rPr lang="en-US" sz="1200" dirty="0">
+                          <a:solidFill>
+                            <a:srgbClr val="212121"/>
+                          </a:solidFill>
+                          <a:latin typeface="Arial" pitchFamily="34" charset="0"/>
+                          <a:ea typeface="Arial" pitchFamily="34" charset="-122"/>
+                          <a:cs typeface="Arial" pitchFamily="34" charset="-120"/>
+                        </a:rPr>
+                        <a:t>No el cómputo, sí el disco</a:t>
+                      </a:r>
+                      <a:endParaRPr lang="en-US" sz="1200" dirty="0">
+                        <a:latin typeface="Arial" charset="0"/>
+                        <a:ea typeface="Arial" charset="0"/>
+                        <a:cs typeface="Arial" charset="0"/>
+                      </a:endParaRPr>
+                    </a:p>
+                  </a:txBody>
+                  <a:tcPr anchor="ctr">
+                    <a:lnL w="12700" cap="flat" cmpd="sng" algn="ctr">
+                      <a:solidFill>
+                        <a:srgbClr val="EEEEEE"/>
+                      </a:solidFill>
+                      <a:prstDash val="solid"/>
+                      <a:round/>
+                      <a:headEnd type="none" w="med" len="med"/>
+                      <a:tailEnd type="none" w="med" len="med"/>
+                    </a:lnL>
+                    <a:lnR w="12700" cap="flat" cmpd="sng" algn="ctr">
+                      <a:solidFill>
+                        <a:srgbClr val="EEEEEE"/>
+                      </a:solidFill>
+                      <a:prstDash val="solid"/>
+                      <a:round/>
+                      <a:headEnd type="none" w="med" len="med"/>
+                      <a:tailEnd type="none" w="med" len="med"/>
+                    </a:lnR>
+                    <a:lnT w="12700" cap="flat" cmpd="sng" algn="ctr">
+                      <a:solidFill>
+                        <a:srgbClr val="EEEEEE"/>
+                      </a:solidFill>
+                      <a:prstDash val="solid"/>
+                      <a:round/>
+                      <a:headEnd type="none" w="med" len="med"/>
+                      <a:tailEnd type="none" w="med" len="med"/>
+                    </a:lnT>
+                    <a:lnB w="12700" cap="flat" cmpd="sng" algn="ctr">
+                      <a:solidFill>
+                        <a:srgbClr val="EEEEEE"/>
+                      </a:solidFill>
+                      <a:prstDash val="solid"/>
+                      <a:round/>
+                      <a:headEnd type="none" w="med" len="med"/>
+                      <a:tailEnd type="none" w="med" len="med"/>
+                    </a:lnB>
+                    <a:solidFill>
+                      <a:srgbClr val="F5F5F5"/>
+                    </a:solidFill>
+                  </a:tcPr>
+                </a:tc>
+                <a:extLst>
+                  <a:ext uri="{0D108BD9-81ED-4DB2-BD59-A6C34878D82A}">
+                    <a16:rowId xmlns:a16="http://schemas.microsoft.com/office/drawing/2014/main" val="10002"/>
+                  </a:ext>
+                </a:extLst>
+              </a:tr>
+              <a:tr h="530352">
+                <a:tc>
+                  <a:txBody>
+                    <a:bodyPr/>
+                    <a:lstStyle/>
+                    <a:p>
+                      <a:pPr marL="0" indent="0">
+                        <a:buNone/>
+                      </a:pPr>
+                      <a:r>
+                        <a:rPr lang="en-US" sz="1200" b="1" dirty="0">
+                          <a:solidFill>
+                            <a:srgbClr val="212121"/>
+                          </a:solidFill>
+                          <a:latin typeface="Arial" pitchFamily="34" charset="0"/>
+                          <a:ea typeface="Arial" pitchFamily="34" charset="-122"/>
+                          <a:cs typeface="Arial" pitchFamily="34" charset="-120"/>
+                        </a:rPr>
+                        <a:t>Terminada</a:t>
+                      </a:r>
+                      <a:endParaRPr lang="en-US" sz="1200" dirty="0">
+                        <a:latin typeface="Arial" charset="0"/>
+                        <a:ea typeface="Arial" charset="0"/>
+                        <a:cs typeface="Arial" charset="0"/>
+                      </a:endParaRPr>
+                    </a:p>
+                  </a:txBody>
+                  <a:tcPr anchor="ctr">
+                    <a:lnL w="12700" cap="flat" cmpd="sng" algn="ctr">
+                      <a:solidFill>
+                        <a:srgbClr val="EEEEEE"/>
+                      </a:solidFill>
+                      <a:prstDash val="solid"/>
+                      <a:round/>
+                      <a:headEnd type="none" w="med" len="med"/>
+                      <a:tailEnd type="none" w="med" len="med"/>
+                    </a:lnL>
+                    <a:lnR w="12700" cap="flat" cmpd="sng" algn="ctr">
+                      <a:solidFill>
+                        <a:srgbClr val="EEEEEE"/>
+                      </a:solidFill>
+                      <a:prstDash val="solid"/>
+                      <a:round/>
+                      <a:headEnd type="none" w="med" len="med"/>
+                      <a:tailEnd type="none" w="med" len="med"/>
+                    </a:lnR>
+                    <a:lnT w="12700" cap="flat" cmpd="sng" algn="ctr">
+                      <a:solidFill>
+                        <a:srgbClr val="EEEEEE"/>
+                      </a:solidFill>
+                      <a:prstDash val="solid"/>
+                      <a:round/>
+                      <a:headEnd type="none" w="med" len="med"/>
+                      <a:tailEnd type="none" w="med" len="med"/>
+                    </a:lnT>
+                    <a:lnB w="12700" cap="flat" cmpd="sng" algn="ctr">
+                      <a:solidFill>
+                        <a:srgbClr val="EEEEEE"/>
+                      </a:solidFill>
+                      <a:prstDash val="solid"/>
+                      <a:round/>
+                      <a:headEnd type="none" w="med" len="med"/>
+                      <a:tailEnd type="none" w="med" len="med"/>
+                    </a:lnB>
+                    <a:solidFill>
+                      <a:srgbClr val="FFFFFF"/>
+                    </a:solidFill>
+                  </a:tcPr>
+                </a:tc>
+                <a:tc>
+                  <a:txBody>
+                    <a:bodyPr/>
+                    <a:lstStyle/>
+                    <a:p>
+                      <a:pPr marL="0" indent="0">
+                        <a:buNone/>
+                      </a:pPr>
+                      <a:r>
+                        <a:rPr lang="en-US" sz="1200" dirty="0">
+                          <a:solidFill>
+                            <a:srgbClr val="212121"/>
+                          </a:solidFill>
+                          <a:latin typeface="Arial" pitchFamily="34" charset="0"/>
+                          <a:ea typeface="Arial" pitchFamily="34" charset="-122"/>
+                          <a:cs typeface="Arial" pitchFamily="34" charset="-120"/>
+                        </a:rPr>
+                        <a:t>Eliminada por completo</a:t>
+                      </a:r>
+                      <a:endParaRPr lang="en-US" sz="1200" dirty="0">
+                        <a:latin typeface="Arial" charset="0"/>
+                        <a:ea typeface="Arial" charset="0"/>
+                        <a:cs typeface="Arial" charset="0"/>
+                      </a:endParaRPr>
+                    </a:p>
+                  </a:txBody>
+                  <a:tcPr anchor="ctr">
+                    <a:lnL w="12700" cap="flat" cmpd="sng" algn="ctr">
+                      <a:solidFill>
+                        <a:srgbClr val="EEEEEE"/>
+                      </a:solidFill>
+                      <a:prstDash val="solid"/>
+                      <a:round/>
+                      <a:headEnd type="none" w="med" len="med"/>
+                      <a:tailEnd type="none" w="med" len="med"/>
+                    </a:lnL>
+                    <a:lnR w="12700" cap="flat" cmpd="sng" algn="ctr">
+                      <a:solidFill>
+                        <a:srgbClr val="EEEEEE"/>
+                      </a:solidFill>
+                      <a:prstDash val="solid"/>
+                      <a:round/>
+                      <a:headEnd type="none" w="med" len="med"/>
+                      <a:tailEnd type="none" w="med" len="med"/>
+                    </a:lnR>
+                    <a:lnT w="12700" cap="flat" cmpd="sng" algn="ctr">
+                      <a:solidFill>
+                        <a:srgbClr val="EEEEEE"/>
+                      </a:solidFill>
+                      <a:prstDash val="solid"/>
+                      <a:round/>
+                      <a:headEnd type="none" w="med" len="med"/>
+                      <a:tailEnd type="none" w="med" len="med"/>
+                    </a:lnT>
+                    <a:lnB w="12700" cap="flat" cmpd="sng" algn="ctr">
+                      <a:solidFill>
+                        <a:srgbClr val="EEEEEE"/>
+                      </a:solidFill>
+                      <a:prstDash val="solid"/>
+                      <a:round/>
+                      <a:headEnd type="none" w="med" len="med"/>
+                      <a:tailEnd type="none" w="med" len="med"/>
+                    </a:lnB>
+                    <a:solidFill>
+                      <a:srgbClr val="FFFFFF"/>
+                    </a:solidFill>
+                  </a:tcPr>
+                </a:tc>
+                <a:tc>
+                  <a:txBody>
+                    <a:bodyPr/>
+                    <a:lstStyle/>
+                    <a:p>
+                      <a:pPr marL="0" indent="0">
+                        <a:buNone/>
+                      </a:pPr>
+                      <a:r>
+                        <a:rPr lang="en-US" sz="1200" dirty="0">
+                          <a:solidFill>
+                            <a:srgbClr val="212121"/>
+                          </a:solidFill>
+                          <a:latin typeface="Arial" pitchFamily="34" charset="0"/>
+                          <a:ea typeface="Arial" pitchFamily="34" charset="-122"/>
+                          <a:cs typeface="Arial" pitchFamily="34" charset="-120"/>
+                        </a:rPr>
+                        <a:t>Se borra (salvo que persista)</a:t>
+                      </a:r>
+                      <a:endParaRPr lang="en-US" sz="1200" dirty="0">
+                        <a:latin typeface="Arial" charset="0"/>
+                        <a:ea typeface="Arial" charset="0"/>
+                        <a:cs typeface="Arial" charset="0"/>
+                      </a:endParaRPr>
+                    </a:p>
+                  </a:txBody>
+                  <a:tcPr anchor="ctr">
+                    <a:lnL w="12700" cap="flat" cmpd="sng" algn="ctr">
+                      <a:solidFill>
+                        <a:srgbClr val="EEEEEE"/>
+                      </a:solidFill>
+                      <a:prstDash val="solid"/>
+                      <a:round/>
+                      <a:headEnd type="none" w="med" len="med"/>
+                      <a:tailEnd type="none" w="med" len="med"/>
+                    </a:lnL>
+                    <a:lnR w="12700" cap="flat" cmpd="sng" algn="ctr">
+                      <a:solidFill>
+                        <a:srgbClr val="EEEEEE"/>
+                      </a:solidFill>
+                      <a:prstDash val="solid"/>
+                      <a:round/>
+                      <a:headEnd type="none" w="med" len="med"/>
+                      <a:tailEnd type="none" w="med" len="med"/>
+                    </a:lnR>
+                    <a:lnT w="12700" cap="flat" cmpd="sng" algn="ctr">
+                      <a:solidFill>
+                        <a:srgbClr val="EEEEEE"/>
+                      </a:solidFill>
+                      <a:prstDash val="solid"/>
+                      <a:round/>
+                      <a:headEnd type="none" w="med" len="med"/>
+                      <a:tailEnd type="none" w="med" len="med"/>
+                    </a:lnT>
+                    <a:lnB w="12700" cap="flat" cmpd="sng" algn="ctr">
+                      <a:solidFill>
+                        <a:srgbClr val="EEEEEE"/>
+                      </a:solidFill>
+                      <a:prstDash val="solid"/>
+                      <a:round/>
+                      <a:headEnd type="none" w="med" len="med"/>
+                      <a:tailEnd type="none" w="med" len="med"/>
+                    </a:lnB>
+                    <a:solidFill>
+                      <a:srgbClr val="FFFFFF"/>
+                    </a:solidFill>
+                  </a:tcPr>
+                </a:tc>
+                <a:tc>
+                  <a:txBody>
+                    <a:bodyPr/>
+                    <a:lstStyle/>
+                    <a:p>
+                      <a:pPr marL="0" indent="0">
+                        <a:buNone/>
+                      </a:pPr>
+                      <a:r>
+                        <a:rPr lang="en-US" sz="1200" dirty="0">
+                          <a:solidFill>
+                            <a:srgbClr val="212121"/>
+                          </a:solidFill>
+                          <a:latin typeface="Arial" pitchFamily="34" charset="0"/>
+                          <a:ea typeface="Arial" pitchFamily="34" charset="-122"/>
+                          <a:cs typeface="Arial" pitchFamily="34" charset="-120"/>
+                        </a:rPr>
+                        <a:t>No, nada</a:t>
+                      </a:r>
+                      <a:endParaRPr lang="en-US" sz="1200" dirty="0">
+                        <a:latin typeface="Arial" charset="0"/>
+                        <a:ea typeface="Arial" charset="0"/>
+                        <a:cs typeface="Arial" charset="0"/>
+                      </a:endParaRPr>
+                    </a:p>
+                  </a:txBody>
+                  <a:tcPr anchor="ctr">
+                    <a:lnL w="12700" cap="flat" cmpd="sng" algn="ctr">
+                      <a:solidFill>
+                        <a:srgbClr val="EEEEEE"/>
+                      </a:solidFill>
+                      <a:prstDash val="solid"/>
+                      <a:round/>
+                      <a:headEnd type="none" w="med" len="med"/>
+                      <a:tailEnd type="none" w="med" len="med"/>
+                    </a:lnL>
+                    <a:lnR w="12700" cap="flat" cmpd="sng" algn="ctr">
+                      <a:solidFill>
+                        <a:srgbClr val="EEEEEE"/>
+                      </a:solidFill>
+                      <a:prstDash val="solid"/>
+                      <a:round/>
+                      <a:headEnd type="none" w="med" len="med"/>
+                      <a:tailEnd type="none" w="med" len="med"/>
+                    </a:lnR>
+                    <a:lnT w="12700" cap="flat" cmpd="sng" algn="ctr">
+                      <a:solidFill>
+                        <a:srgbClr val="EEEEEE"/>
+                      </a:solidFill>
+                      <a:prstDash val="solid"/>
+                      <a:round/>
+                      <a:headEnd type="none" w="med" len="med"/>
+                      <a:tailEnd type="none" w="med" len="med"/>
+                    </a:lnT>
+                    <a:lnB w="12700" cap="flat" cmpd="sng" algn="ctr">
+                      <a:solidFill>
+                        <a:srgbClr val="EEEEEE"/>
+                      </a:solidFill>
+                      <a:prstDash val="solid"/>
+                      <a:round/>
+                      <a:headEnd type="none" w="med" len="med"/>
+                      <a:tailEnd type="none" w="med" len="med"/>
+                    </a:lnB>
+                    <a:solidFill>
+                      <a:srgbClr val="FFFFFF"/>
+                    </a:solidFill>
+                  </a:tcPr>
+                </a:tc>
+                <a:extLst>
+                  <a:ext uri="{0D108BD9-81ED-4DB2-BD59-A6C34878D82A}">
+                    <a16:rowId xmlns:a16="http://schemas.microsoft.com/office/drawing/2014/main" val="10003"/>
+                  </a:ext>
+                </a:extLst>
+              </a:tr>
+            </a:tbl>
+          </a:graphicData>
+        </a:graphic>
+      </p:graphicFrame>
+      <p:sp>
+        <p:nvSpPr>
+          <p:cNvPr id="7" name="Shape 5"/>
+          <p:cNvSpPr/>
+          <p:nvPr/>
+        </p:nvSpPr>
+        <p:spPr>
+          <a:xfrm>
+            <a:off x="548640" y="4206240"/>
+            <a:ext cx="11091672" cy="1600200"/>
+          </a:xfrm>
+          <a:prstGeom prst="roundRect">
+            <a:avLst/>
+          </a:prstGeom>
+          <a:solidFill>
+            <a:srgbClr val="FFF8E1"/>
+          </a:solidFill>
+          <a:ln w="28575">
+            <a:solidFill>
+              <a:srgbClr val="FFA000"/>
+            </a:solidFill>
+            <a:prstDash val="solid"/>
+          </a:ln>
+        </p:spPr>
+        <p:txBody>
+          <a:bodyPr/>
+          <a:lstStyle/>
+          <a:p>
+            <a:endParaRPr lang="es-ES"/>
+          </a:p>
+        </p:txBody>
+      </p:sp>
+      <p:sp>
+        <p:nvSpPr>
+          <p:cNvPr id="9" name="Text 6"/>
+          <p:cNvSpPr/>
+          <p:nvPr/>
+        </p:nvSpPr>
+        <p:spPr>
+          <a:xfrm>
+            <a:off x="822960" y="4315968"/>
+            <a:ext cx="10543032" cy="1380744"/>
+          </a:xfrm>
+          <a:prstGeom prst="rect">
+            <a:avLst/>
+          </a:prstGeom>
+          <a:noFill/>
+          <a:ln/>
+        </p:spPr>
+        <p:txBody>
+          <a:bodyPr wrap="square" rtlCol="0" anchor="t"/>
+          <a:lstStyle/>
+          <a:p>
+            <a:pPr marL="0" indent="0">
+              <a:buNone/>
+            </a:pPr>
+            <a:r>
+              <a:rPr lang="en-US" sz="1800" b="1" dirty="0">
+                <a:solidFill>
+                  <a:srgbClr val="1A237E"/>
+                </a:solidFill>
+                <a:latin typeface="Arial" pitchFamily="34" charset="0"/>
+                <a:ea typeface="Arial" pitchFamily="34" charset="-122"/>
+                <a:cs typeface="Arial" pitchFamily="34" charset="-120"/>
+              </a:rPr>
+              <a:t>Parar no vacía tu factura, solo la reduce
+</a:t>
+            </a:r>
+            <a:endParaRPr lang="en-US" sz="1800" dirty="0"/>
+          </a:p>
+          <a:p>
+            <a:pPr marL="0" indent="0">
+              <a:buNone/>
+            </a:pPr>
+            <a:r>
+              <a:rPr lang="en-US" sz="1700" dirty="0">
+                <a:solidFill>
+                  <a:srgbClr val="212121"/>
+                </a:solidFill>
+                <a:latin typeface="Arial" pitchFamily="34" charset="0"/>
+                <a:ea typeface="Arial" pitchFamily="34" charset="-122"/>
+                <a:cs typeface="Arial" pitchFamily="34" charset="-120"/>
+              </a:rPr>
+              <a:t>El volumen de disco asociado sigue existiendo y teniendo coste. El ritual de apagado significa parar lo que quieras conservar, y terminar de verdad lo que ya no necesitas.</a:t>
+            </a:r>
+            <a:endParaRPr lang="en-US" sz="1800" dirty="0"/>
           </a:p>
         </p:txBody>
       </p:sp>
@@ -6693,6 +7811,13 @@
             <a:prstDash val="solid"/>
           </a:ln>
         </p:spPr>
+        <p:txBody>
+          <a:bodyPr/>
+          <a:lstStyle/>
+          <a:p>
+            <a:endParaRPr lang="es-ES"/>
+          </a:p>
+        </p:txBody>
       </p:sp>
       <p:sp>
         <p:nvSpPr>
@@ -6715,7 +7840,7 @@
           <a:bodyPr wrap="square" rtlCol="0" anchor="ctr"/>
           <a:lstStyle/>
           <a:p>
-            <a:pPr indent="0" marL="0">
+            <a:pPr marL="0" indent="0">
               <a:buNone/>
             </a:pPr>
             <a:r>
@@ -6727,7 +7852,7 @@
                 <a:ea typeface="Arial" pitchFamily="34" charset="-122"/>
                 <a:cs typeface="Arial" pitchFamily="34" charset="-120"/>
               </a:rPr>
-              <a:t>Ciclo de vida: parar no es terminar</a:t>
+              <a:t>User data y plantillas de lanzamiento</a:t>
             </a:r>
             <a:endParaRPr lang="en-US" sz="2400" dirty="0"/>
           </a:p>
@@ -6754,7 +7879,7 @@
           <a:bodyPr wrap="square" rtlCol="0" anchor="ctr"/>
           <a:lstStyle/>
           <a:p>
-            <a:pPr algn="r" indent="0" marL="0">
+            <a:pPr marL="0" indent="0" algn="r">
               <a:buNone/>
             </a:pPr>
             <a:r>
@@ -6772,1143 +7897,409 @@
           </a:p>
         </p:txBody>
       </p:sp>
-      <p:graphicFrame>
-        <p:nvGraphicFramePr>
-          <p:cNvPr id="9" name="Table 0"/>
-          <p:cNvGraphicFramePr>
-            <a:graphicFrameLocks noGrp="1"/>
-          </p:cNvGraphicFramePr>
-          <p:nvPr>
-            <p:extLst>
-              <p:ext uri="{D42A27DB-BD31-4B8C-83A1-F6EECF244321}">
-                <p14:modId xmlns:p14="http://schemas.microsoft.com/office/powerpoint/2010/main" val="1579011935"/>
-              </p:ext>
-            </p:extLst>
-          </p:nvPr>
-        </p:nvGraphicFramePr>
-        <p:xfrm>
-          <a:off x="548640" y="1188720"/>
-          <a:ext cx="11091672" cy="914400"/>
-        </p:xfrm>
-        <a:graphic>
-          <a:graphicData uri="http://schemas.openxmlformats.org/drawingml/2006/table">
-            <a:tbl>
-              <a:tblPr/>
-              <a:tblGrid>
-                <a:gridCol w="2440168"/>
-                <a:gridCol w="3105668"/>
-                <a:gridCol w="3105668"/>
-                <a:gridCol w="2440168"/>
-              </a:tblGrid>
-              <a:tr h="868680">
-                <a:tc>
-                  <a:txBody>
-                    <a:bodyPr/>
-                    <a:lstStyle/>
-                    <a:p>
-                      <a:pPr algn="ctr" indent="0" marL="0">
-                        <a:buNone/>
-                      </a:pPr>
-                      <a:r>
-                        <a:rPr lang="en-US" sz="1400" b="1" dirty="0">
-                          <a:solidFill>
-                            <a:srgbClr val="FFFFFF"/>
-                          </a:solidFill>
-                          <a:latin typeface="Arial" pitchFamily="34" charset="0"/>
-                          <a:ea typeface="Arial" pitchFamily="34" charset="-122"/>
-                          <a:cs typeface="Arial" pitchFamily="34" charset="-120"/>
-                        </a:rPr>
-                        <a:t>Estado</a:t>
-                      </a:r>
-                      <a:endParaRPr lang="en-US" sz="1400" dirty="0">
-                        <a:latin typeface="Arial" charset="0"/>
-                        <a:ea typeface="Arial" charset="0"/>
-                        <a:cs typeface="Arial" charset="0"/>
-                      </a:endParaRPr>
-                    </a:p>
-                  </a:txBody>
-                  <a:tcPr marL="91440" marR="91440" marT="45720" marB="45720" anchor="ctr">
-                    <a:lnL w="12700" cap="flat" cmpd="sng" algn="ctr">
-                      <a:solidFill>
-                        <a:srgbClr val="EEEEEE"/>
-                      </a:solidFill>
-                      <a:prstDash val="solid"/>
-                      <a:round/>
-                      <a:headEnd type="none" w="med" len="med"/>
-                      <a:tailEnd type="none" w="med" len="med"/>
-                    </a:lnL>
-                    <a:lnR w="12700" cap="flat" cmpd="sng" algn="ctr">
-                      <a:solidFill>
-                        <a:srgbClr val="EEEEEE"/>
-                      </a:solidFill>
-                      <a:prstDash val="solid"/>
-                      <a:round/>
-                      <a:headEnd type="none" w="med" len="med"/>
-                      <a:tailEnd type="none" w="med" len="med"/>
-                    </a:lnR>
-                    <a:lnT w="12700" cap="flat" cmpd="sng" algn="ctr">
-                      <a:solidFill>
-                        <a:srgbClr val="EEEEEE"/>
-                      </a:solidFill>
-                      <a:prstDash val="solid"/>
-                      <a:round/>
-                      <a:headEnd type="none" w="med" len="med"/>
-                      <a:tailEnd type="none" w="med" len="med"/>
-                    </a:lnT>
-                    <a:lnB w="12700" cap="flat" cmpd="sng" algn="ctr">
-                      <a:solidFill>
-                        <a:srgbClr val="EEEEEE"/>
-                      </a:solidFill>
-                      <a:prstDash val="solid"/>
-                      <a:round/>
-                      <a:headEnd type="none" w="med" len="med"/>
-                      <a:tailEnd type="none" w="med" len="med"/>
-                    </a:lnB>
-                    <a:solidFill>
-                      <a:srgbClr val="3949AB"/>
-                    </a:solidFill>
-                  </a:tcPr>
-                </a:tc>
-                <a:tc>
-                  <a:txBody>
-                    <a:bodyPr/>
-                    <a:lstStyle/>
-                    <a:p>
-                      <a:pPr algn="ctr" indent="0" marL="0">
-                        <a:buNone/>
-                      </a:pPr>
-                      <a:r>
-                        <a:rPr lang="en-US" sz="1400" b="1" dirty="0">
-                          <a:solidFill>
-                            <a:srgbClr val="FFFFFF"/>
-                          </a:solidFill>
-                          <a:latin typeface="Arial" pitchFamily="34" charset="0"/>
-                          <a:ea typeface="Arial" pitchFamily="34" charset="-122"/>
-                          <a:cs typeface="Arial" pitchFamily="34" charset="-120"/>
-                        </a:rPr>
-                        <a:t>Qué pasa con la instancia</a:t>
-                      </a:r>
-                      <a:endParaRPr lang="en-US" sz="1400" dirty="0">
-                        <a:latin typeface="Arial" charset="0"/>
-                        <a:ea typeface="Arial" charset="0"/>
-                        <a:cs typeface="Arial" charset="0"/>
-                      </a:endParaRPr>
-                    </a:p>
-                  </a:txBody>
-                  <a:tcPr marL="91440" marR="91440" marT="45720" marB="45720" anchor="ctr">
-                    <a:lnL w="12700" cap="flat" cmpd="sng" algn="ctr">
-                      <a:solidFill>
-                        <a:srgbClr val="EEEEEE"/>
-                      </a:solidFill>
-                      <a:prstDash val="solid"/>
-                      <a:round/>
-                      <a:headEnd type="none" w="med" len="med"/>
-                      <a:tailEnd type="none" w="med" len="med"/>
-                    </a:lnL>
-                    <a:lnR w="12700" cap="flat" cmpd="sng" algn="ctr">
-                      <a:solidFill>
-                        <a:srgbClr val="EEEEEE"/>
-                      </a:solidFill>
-                      <a:prstDash val="solid"/>
-                      <a:round/>
-                      <a:headEnd type="none" w="med" len="med"/>
-                      <a:tailEnd type="none" w="med" len="med"/>
-                    </a:lnR>
-                    <a:lnT w="12700" cap="flat" cmpd="sng" algn="ctr">
-                      <a:solidFill>
-                        <a:srgbClr val="EEEEEE"/>
-                      </a:solidFill>
-                      <a:prstDash val="solid"/>
-                      <a:round/>
-                      <a:headEnd type="none" w="med" len="med"/>
-                      <a:tailEnd type="none" w="med" len="med"/>
-                    </a:lnT>
-                    <a:lnB w="12700" cap="flat" cmpd="sng" algn="ctr">
-                      <a:solidFill>
-                        <a:srgbClr val="EEEEEE"/>
-                      </a:solidFill>
-                      <a:prstDash val="solid"/>
-                      <a:round/>
-                      <a:headEnd type="none" w="med" len="med"/>
-                      <a:tailEnd type="none" w="med" len="med"/>
-                    </a:lnB>
-                    <a:solidFill>
-                      <a:srgbClr val="3949AB"/>
-                    </a:solidFill>
-                  </a:tcPr>
-                </a:tc>
-                <a:tc>
-                  <a:txBody>
-                    <a:bodyPr/>
-                    <a:lstStyle/>
-                    <a:p>
-                      <a:pPr algn="ctr" indent="0" marL="0">
-                        <a:buNone/>
-                      </a:pPr>
-                      <a:r>
-                        <a:rPr lang="en-US" sz="1400" b="1" dirty="0">
-                          <a:solidFill>
-                            <a:srgbClr val="FFFFFF"/>
-                          </a:solidFill>
-                          <a:latin typeface="Arial" pitchFamily="34" charset="0"/>
-                          <a:ea typeface="Arial" pitchFamily="34" charset="-122"/>
-                          <a:cs typeface="Arial" pitchFamily="34" charset="-120"/>
-                        </a:rPr>
-                        <a:t>Qué pasa con el disco</a:t>
-                      </a:r>
-                      <a:endParaRPr lang="en-US" sz="1400" dirty="0">
-                        <a:latin typeface="Arial" charset="0"/>
-                        <a:ea typeface="Arial" charset="0"/>
-                        <a:cs typeface="Arial" charset="0"/>
-                      </a:endParaRPr>
-                    </a:p>
-                  </a:txBody>
-                  <a:tcPr marL="91440" marR="91440" marT="45720" marB="45720" anchor="ctr">
-                    <a:lnL w="12700" cap="flat" cmpd="sng" algn="ctr">
-                      <a:solidFill>
-                        <a:srgbClr val="EEEEEE"/>
-                      </a:solidFill>
-                      <a:prstDash val="solid"/>
-                      <a:round/>
-                      <a:headEnd type="none" w="med" len="med"/>
-                      <a:tailEnd type="none" w="med" len="med"/>
-                    </a:lnL>
-                    <a:lnR w="12700" cap="flat" cmpd="sng" algn="ctr">
-                      <a:solidFill>
-                        <a:srgbClr val="EEEEEE"/>
-                      </a:solidFill>
-                      <a:prstDash val="solid"/>
-                      <a:round/>
-                      <a:headEnd type="none" w="med" len="med"/>
-                      <a:tailEnd type="none" w="med" len="med"/>
-                    </a:lnR>
-                    <a:lnT w="12700" cap="flat" cmpd="sng" algn="ctr">
-                      <a:solidFill>
-                        <a:srgbClr val="EEEEEE"/>
-                      </a:solidFill>
-                      <a:prstDash val="solid"/>
-                      <a:round/>
-                      <a:headEnd type="none" w="med" len="med"/>
-                      <a:tailEnd type="none" w="med" len="med"/>
-                    </a:lnT>
-                    <a:lnB w="12700" cap="flat" cmpd="sng" algn="ctr">
-                      <a:solidFill>
-                        <a:srgbClr val="EEEEEE"/>
-                      </a:solidFill>
-                      <a:prstDash val="solid"/>
-                      <a:round/>
-                      <a:headEnd type="none" w="med" len="med"/>
-                      <a:tailEnd type="none" w="med" len="med"/>
-                    </a:lnB>
-                    <a:solidFill>
-                      <a:srgbClr val="3949AB"/>
-                    </a:solidFill>
-                  </a:tcPr>
-                </a:tc>
-                <a:tc>
-                  <a:txBody>
-                    <a:bodyPr/>
-                    <a:lstStyle/>
-                    <a:p>
-                      <a:pPr algn="ctr" indent="0" marL="0">
-                        <a:buNone/>
-                      </a:pPr>
-                      <a:r>
-                        <a:rPr lang="en-US" sz="1400" b="1" dirty="0">
-                          <a:solidFill>
-                            <a:srgbClr val="FFFFFF"/>
-                          </a:solidFill>
-                          <a:latin typeface="Arial" pitchFamily="34" charset="0"/>
-                          <a:ea typeface="Arial" pitchFamily="34" charset="-122"/>
-                          <a:cs typeface="Arial" pitchFamily="34" charset="-120"/>
-                        </a:rPr>
-                        <a:t>¿Factura cómputo?</a:t>
-                      </a:r>
-                      <a:endParaRPr lang="en-US" sz="1400" dirty="0">
-                        <a:latin typeface="Arial" charset="0"/>
-                        <a:ea typeface="Arial" charset="0"/>
-                        <a:cs typeface="Arial" charset="0"/>
-                      </a:endParaRPr>
-                    </a:p>
-                  </a:txBody>
-                  <a:tcPr marL="91440" marR="91440" marT="45720" marB="45720" anchor="ctr">
-                    <a:lnL w="12700" cap="flat" cmpd="sng" algn="ctr">
-                      <a:solidFill>
-                        <a:srgbClr val="EEEEEE"/>
-                      </a:solidFill>
-                      <a:prstDash val="solid"/>
-                      <a:round/>
-                      <a:headEnd type="none" w="med" len="med"/>
-                      <a:tailEnd type="none" w="med" len="med"/>
-                    </a:lnL>
-                    <a:lnR w="12700" cap="flat" cmpd="sng" algn="ctr">
-                      <a:solidFill>
-                        <a:srgbClr val="EEEEEE"/>
-                      </a:solidFill>
-                      <a:prstDash val="solid"/>
-                      <a:round/>
-                      <a:headEnd type="none" w="med" len="med"/>
-                      <a:tailEnd type="none" w="med" len="med"/>
-                    </a:lnR>
-                    <a:lnT w="12700" cap="flat" cmpd="sng" algn="ctr">
-                      <a:solidFill>
-                        <a:srgbClr val="EEEEEE"/>
-                      </a:solidFill>
-                      <a:prstDash val="solid"/>
-                      <a:round/>
-                      <a:headEnd type="none" w="med" len="med"/>
-                      <a:tailEnd type="none" w="med" len="med"/>
-                    </a:lnT>
-                    <a:lnB w="12700" cap="flat" cmpd="sng" algn="ctr">
-                      <a:solidFill>
-                        <a:srgbClr val="EEEEEE"/>
-                      </a:solidFill>
-                      <a:prstDash val="solid"/>
-                      <a:round/>
-                      <a:headEnd type="none" w="med" len="med"/>
-                      <a:tailEnd type="none" w="med" len="med"/>
-                    </a:lnB>
-                    <a:solidFill>
-                      <a:srgbClr val="3949AB"/>
-                    </a:solidFill>
-                  </a:tcPr>
-                </a:tc>
-              </a:tr>
-              <a:tr h="868680">
-                <a:tc>
-                  <a:txBody>
-                    <a:bodyPr/>
-                    <a:lstStyle/>
-                    <a:p>
-                      <a:pPr indent="0" marL="0">
-                        <a:buNone/>
-                      </a:pPr>
-                      <a:r>
-                        <a:rPr lang="en-US" sz="1300" b="1" dirty="0">
-                          <a:solidFill>
-                            <a:srgbClr val="212121"/>
-                          </a:solidFill>
-                          <a:latin typeface="Arial" pitchFamily="34" charset="0"/>
-                          <a:ea typeface="Arial" pitchFamily="34" charset="-122"/>
-                          <a:cs typeface="Arial" pitchFamily="34" charset="-120"/>
-                        </a:rPr>
-                        <a:t>En marcha (running)</a:t>
-                      </a:r>
-                      <a:endParaRPr lang="en-US" sz="1300" dirty="0">
-                        <a:latin typeface="Arial" charset="0"/>
-                        <a:ea typeface="Arial" charset="0"/>
-                        <a:cs typeface="Arial" charset="0"/>
-                      </a:endParaRPr>
-                    </a:p>
-                  </a:txBody>
-                  <a:tcPr marL="91440" marR="91440" marT="45720" marB="45720" anchor="ctr">
-                    <a:lnL w="12700" cap="flat" cmpd="sng" algn="ctr">
-                      <a:solidFill>
-                        <a:srgbClr val="EEEEEE"/>
-                      </a:solidFill>
-                      <a:prstDash val="solid"/>
-                      <a:round/>
-                      <a:headEnd type="none" w="med" len="med"/>
-                      <a:tailEnd type="none" w="med" len="med"/>
-                    </a:lnL>
-                    <a:lnR w="12700" cap="flat" cmpd="sng" algn="ctr">
-                      <a:solidFill>
-                        <a:srgbClr val="EEEEEE"/>
-                      </a:solidFill>
-                      <a:prstDash val="solid"/>
-                      <a:round/>
-                      <a:headEnd type="none" w="med" len="med"/>
-                      <a:tailEnd type="none" w="med" len="med"/>
-                    </a:lnR>
-                    <a:lnT w="12700" cap="flat" cmpd="sng" algn="ctr">
-                      <a:solidFill>
-                        <a:srgbClr val="EEEEEE"/>
-                      </a:solidFill>
-                      <a:prstDash val="solid"/>
-                      <a:round/>
-                      <a:headEnd type="none" w="med" len="med"/>
-                      <a:tailEnd type="none" w="med" len="med"/>
-                    </a:lnT>
-                    <a:lnB w="12700" cap="flat" cmpd="sng" algn="ctr">
-                      <a:solidFill>
-                        <a:srgbClr val="EEEEEE"/>
-                      </a:solidFill>
-                      <a:prstDash val="solid"/>
-                      <a:round/>
-                      <a:headEnd type="none" w="med" len="med"/>
-                      <a:tailEnd type="none" w="med" len="med"/>
-                    </a:lnB>
-                    <a:solidFill>
-                      <a:srgbClr val="FFFFFF"/>
-                    </a:solidFill>
-                  </a:tcPr>
-                </a:tc>
-                <a:tc>
-                  <a:txBody>
-                    <a:bodyPr/>
-                    <a:lstStyle/>
-                    <a:p>
-                      <a:pPr indent="0" marL="0">
-                        <a:buNone/>
-                      </a:pPr>
-                      <a:r>
-                        <a:rPr lang="en-US" sz="1300" dirty="0">
-                          <a:solidFill>
-                            <a:srgbClr val="212121"/>
-                          </a:solidFill>
-                          <a:latin typeface="Arial" pitchFamily="34" charset="0"/>
-                          <a:ea typeface="Arial" pitchFamily="34" charset="-122"/>
-                          <a:cs typeface="Arial" pitchFamily="34" charset="-120"/>
-                        </a:rPr>
-                        <a:t>Activa, consumiendo recursos</a:t>
-                      </a:r>
-                      <a:endParaRPr lang="en-US" sz="1300" dirty="0">
-                        <a:latin typeface="Arial" charset="0"/>
-                        <a:ea typeface="Arial" charset="0"/>
-                        <a:cs typeface="Arial" charset="0"/>
-                      </a:endParaRPr>
-                    </a:p>
-                  </a:txBody>
-                  <a:tcPr marL="91440" marR="91440" marT="45720" marB="45720" anchor="ctr">
-                    <a:lnL w="12700" cap="flat" cmpd="sng" algn="ctr">
-                      <a:solidFill>
-                        <a:srgbClr val="EEEEEE"/>
-                      </a:solidFill>
-                      <a:prstDash val="solid"/>
-                      <a:round/>
-                      <a:headEnd type="none" w="med" len="med"/>
-                      <a:tailEnd type="none" w="med" len="med"/>
-                    </a:lnL>
-                    <a:lnR w="12700" cap="flat" cmpd="sng" algn="ctr">
-                      <a:solidFill>
-                        <a:srgbClr val="EEEEEE"/>
-                      </a:solidFill>
-                      <a:prstDash val="solid"/>
-                      <a:round/>
-                      <a:headEnd type="none" w="med" len="med"/>
-                      <a:tailEnd type="none" w="med" len="med"/>
-                    </a:lnR>
-                    <a:lnT w="12700" cap="flat" cmpd="sng" algn="ctr">
-                      <a:solidFill>
-                        <a:srgbClr val="EEEEEE"/>
-                      </a:solidFill>
-                      <a:prstDash val="solid"/>
-                      <a:round/>
-                      <a:headEnd type="none" w="med" len="med"/>
-                      <a:tailEnd type="none" w="med" len="med"/>
-                    </a:lnT>
-                    <a:lnB w="12700" cap="flat" cmpd="sng" algn="ctr">
-                      <a:solidFill>
-                        <a:srgbClr val="EEEEEE"/>
-                      </a:solidFill>
-                      <a:prstDash val="solid"/>
-                      <a:round/>
-                      <a:headEnd type="none" w="med" len="med"/>
-                      <a:tailEnd type="none" w="med" len="med"/>
-                    </a:lnB>
-                    <a:solidFill>
-                      <a:srgbClr val="FFFFFF"/>
-                    </a:solidFill>
-                  </a:tcPr>
-                </a:tc>
-                <a:tc>
-                  <a:txBody>
-                    <a:bodyPr/>
-                    <a:lstStyle/>
-                    <a:p>
-                      <a:pPr indent="0" marL="0">
-                        <a:buNone/>
-                      </a:pPr>
-                      <a:r>
-                        <a:rPr lang="en-US" sz="1300" dirty="0">
-                          <a:solidFill>
-                            <a:srgbClr val="212121"/>
-                          </a:solidFill>
-                          <a:latin typeface="Arial" pitchFamily="34" charset="0"/>
-                          <a:ea typeface="Arial" pitchFamily="34" charset="-122"/>
-                          <a:cs typeface="Arial" pitchFamily="34" charset="-120"/>
-                        </a:rPr>
-                        <a:t>Activo</a:t>
-                      </a:r>
-                      <a:endParaRPr lang="en-US" sz="1300" dirty="0">
-                        <a:latin typeface="Arial" charset="0"/>
-                        <a:ea typeface="Arial" charset="0"/>
-                        <a:cs typeface="Arial" charset="0"/>
-                      </a:endParaRPr>
-                    </a:p>
-                  </a:txBody>
-                  <a:tcPr marL="91440" marR="91440" marT="45720" marB="45720" anchor="ctr">
-                    <a:lnL w="12700" cap="flat" cmpd="sng" algn="ctr">
-                      <a:solidFill>
-                        <a:srgbClr val="EEEEEE"/>
-                      </a:solidFill>
-                      <a:prstDash val="solid"/>
-                      <a:round/>
-                      <a:headEnd type="none" w="med" len="med"/>
-                      <a:tailEnd type="none" w="med" len="med"/>
-                    </a:lnL>
-                    <a:lnR w="12700" cap="flat" cmpd="sng" algn="ctr">
-                      <a:solidFill>
-                        <a:srgbClr val="EEEEEE"/>
-                      </a:solidFill>
-                      <a:prstDash val="solid"/>
-                      <a:round/>
-                      <a:headEnd type="none" w="med" len="med"/>
-                      <a:tailEnd type="none" w="med" len="med"/>
-                    </a:lnR>
-                    <a:lnT w="12700" cap="flat" cmpd="sng" algn="ctr">
-                      <a:solidFill>
-                        <a:srgbClr val="EEEEEE"/>
-                      </a:solidFill>
-                      <a:prstDash val="solid"/>
-                      <a:round/>
-                      <a:headEnd type="none" w="med" len="med"/>
-                      <a:tailEnd type="none" w="med" len="med"/>
-                    </a:lnT>
-                    <a:lnB w="12700" cap="flat" cmpd="sng" algn="ctr">
-                      <a:solidFill>
-                        <a:srgbClr val="EEEEEE"/>
-                      </a:solidFill>
-                      <a:prstDash val="solid"/>
-                      <a:round/>
-                      <a:headEnd type="none" w="med" len="med"/>
-                      <a:tailEnd type="none" w="med" len="med"/>
-                    </a:lnB>
-                    <a:solidFill>
-                      <a:srgbClr val="FFFFFF"/>
-                    </a:solidFill>
-                  </a:tcPr>
-                </a:tc>
-                <a:tc>
-                  <a:txBody>
-                    <a:bodyPr/>
-                    <a:lstStyle/>
-                    <a:p>
-                      <a:pPr indent="0" marL="0">
-                        <a:buNone/>
-                      </a:pPr>
-                      <a:r>
-                        <a:rPr lang="en-US" sz="1300" dirty="0">
-                          <a:solidFill>
-                            <a:srgbClr val="212121"/>
-                          </a:solidFill>
-                          <a:latin typeface="Arial" pitchFamily="34" charset="0"/>
-                          <a:ea typeface="Arial" pitchFamily="34" charset="-122"/>
-                          <a:cs typeface="Arial" pitchFamily="34" charset="-120"/>
-                        </a:rPr>
-                        <a:t>Sí</a:t>
-                      </a:r>
-                      <a:endParaRPr lang="en-US" sz="1300" dirty="0">
-                        <a:latin typeface="Arial" charset="0"/>
-                        <a:ea typeface="Arial" charset="0"/>
-                        <a:cs typeface="Arial" charset="0"/>
-                      </a:endParaRPr>
-                    </a:p>
-                  </a:txBody>
-                  <a:tcPr marL="91440" marR="91440" marT="45720" marB="45720" anchor="ctr">
-                    <a:lnL w="12700" cap="flat" cmpd="sng" algn="ctr">
-                      <a:solidFill>
-                        <a:srgbClr val="EEEEEE"/>
-                      </a:solidFill>
-                      <a:prstDash val="solid"/>
-                      <a:round/>
-                      <a:headEnd type="none" w="med" len="med"/>
-                      <a:tailEnd type="none" w="med" len="med"/>
-                    </a:lnL>
-                    <a:lnR w="12700" cap="flat" cmpd="sng" algn="ctr">
-                      <a:solidFill>
-                        <a:srgbClr val="EEEEEE"/>
-                      </a:solidFill>
-                      <a:prstDash val="solid"/>
-                      <a:round/>
-                      <a:headEnd type="none" w="med" len="med"/>
-                      <a:tailEnd type="none" w="med" len="med"/>
-                    </a:lnR>
-                    <a:lnT w="12700" cap="flat" cmpd="sng" algn="ctr">
-                      <a:solidFill>
-                        <a:srgbClr val="EEEEEE"/>
-                      </a:solidFill>
-                      <a:prstDash val="solid"/>
-                      <a:round/>
-                      <a:headEnd type="none" w="med" len="med"/>
-                      <a:tailEnd type="none" w="med" len="med"/>
-                    </a:lnT>
-                    <a:lnB w="12700" cap="flat" cmpd="sng" algn="ctr">
-                      <a:solidFill>
-                        <a:srgbClr val="EEEEEE"/>
-                      </a:solidFill>
-                      <a:prstDash val="solid"/>
-                      <a:round/>
-                      <a:headEnd type="none" w="med" len="med"/>
-                      <a:tailEnd type="none" w="med" len="med"/>
-                    </a:lnB>
-                    <a:solidFill>
-                      <a:srgbClr val="FFFFFF"/>
-                    </a:solidFill>
-                  </a:tcPr>
-                </a:tc>
-              </a:tr>
-              <a:tr h="868680">
-                <a:tc>
-                  <a:txBody>
-                    <a:bodyPr/>
-                    <a:lstStyle/>
-                    <a:p>
-                      <a:pPr indent="0" marL="0">
-                        <a:buNone/>
-                      </a:pPr>
-                      <a:r>
-                        <a:rPr lang="en-US" sz="1300" b="1" dirty="0">
-                          <a:solidFill>
-                            <a:srgbClr val="212121"/>
-                          </a:solidFill>
-                          <a:latin typeface="Arial" pitchFamily="34" charset="0"/>
-                          <a:ea typeface="Arial" pitchFamily="34" charset="-122"/>
-                          <a:cs typeface="Arial" pitchFamily="34" charset="-120"/>
-                        </a:rPr>
-                        <a:t>Parada (stopped)</a:t>
-                      </a:r>
-                      <a:endParaRPr lang="en-US" sz="1300" dirty="0">
-                        <a:latin typeface="Arial" charset="0"/>
-                        <a:ea typeface="Arial" charset="0"/>
-                        <a:cs typeface="Arial" charset="0"/>
-                      </a:endParaRPr>
-                    </a:p>
-                  </a:txBody>
-                  <a:tcPr marL="91440" marR="91440" marT="45720" marB="45720" anchor="ctr">
-                    <a:lnL w="12700" cap="flat" cmpd="sng" algn="ctr">
-                      <a:solidFill>
-                        <a:srgbClr val="EEEEEE"/>
-                      </a:solidFill>
-                      <a:prstDash val="solid"/>
-                      <a:round/>
-                      <a:headEnd type="none" w="med" len="med"/>
-                      <a:tailEnd type="none" w="med" len="med"/>
-                    </a:lnL>
-                    <a:lnR w="12700" cap="flat" cmpd="sng" algn="ctr">
-                      <a:solidFill>
-                        <a:srgbClr val="EEEEEE"/>
-                      </a:solidFill>
-                      <a:prstDash val="solid"/>
-                      <a:round/>
-                      <a:headEnd type="none" w="med" len="med"/>
-                      <a:tailEnd type="none" w="med" len="med"/>
-                    </a:lnR>
-                    <a:lnT w="12700" cap="flat" cmpd="sng" algn="ctr">
-                      <a:solidFill>
-                        <a:srgbClr val="EEEEEE"/>
-                      </a:solidFill>
-                      <a:prstDash val="solid"/>
-                      <a:round/>
-                      <a:headEnd type="none" w="med" len="med"/>
-                      <a:tailEnd type="none" w="med" len="med"/>
-                    </a:lnT>
-                    <a:lnB w="12700" cap="flat" cmpd="sng" algn="ctr">
-                      <a:solidFill>
-                        <a:srgbClr val="EEEEEE"/>
-                      </a:solidFill>
-                      <a:prstDash val="solid"/>
-                      <a:round/>
-                      <a:headEnd type="none" w="med" len="med"/>
-                      <a:tailEnd type="none" w="med" len="med"/>
-                    </a:lnB>
-                    <a:solidFill>
-                      <a:srgbClr val="F5F5F5"/>
-                    </a:solidFill>
-                  </a:tcPr>
-                </a:tc>
-                <a:tc>
-                  <a:txBody>
-                    <a:bodyPr/>
-                    <a:lstStyle/>
-                    <a:p>
-                      <a:pPr indent="0" marL="0">
-                        <a:buNone/>
-                      </a:pPr>
-                      <a:r>
-                        <a:rPr lang="en-US" sz="1300" dirty="0">
-                          <a:solidFill>
-                            <a:srgbClr val="212121"/>
-                          </a:solidFill>
-                          <a:latin typeface="Arial" pitchFamily="34" charset="0"/>
-                          <a:ea typeface="Arial" pitchFamily="34" charset="-122"/>
-                          <a:cs typeface="Arial" pitchFamily="34" charset="-120"/>
-                        </a:rPr>
-                        <a:t>Apagada, pero sigue existiendo</a:t>
-                      </a:r>
-                      <a:endParaRPr lang="en-US" sz="1300" dirty="0">
-                        <a:latin typeface="Arial" charset="0"/>
-                        <a:ea typeface="Arial" charset="0"/>
-                        <a:cs typeface="Arial" charset="0"/>
-                      </a:endParaRPr>
-                    </a:p>
-                  </a:txBody>
-                  <a:tcPr marL="91440" marR="91440" marT="45720" marB="45720" anchor="ctr">
-                    <a:lnL w="12700" cap="flat" cmpd="sng" algn="ctr">
-                      <a:solidFill>
-                        <a:srgbClr val="EEEEEE"/>
-                      </a:solidFill>
-                      <a:prstDash val="solid"/>
-                      <a:round/>
-                      <a:headEnd type="none" w="med" len="med"/>
-                      <a:tailEnd type="none" w="med" len="med"/>
-                    </a:lnL>
-                    <a:lnR w="12700" cap="flat" cmpd="sng" algn="ctr">
-                      <a:solidFill>
-                        <a:srgbClr val="EEEEEE"/>
-                      </a:solidFill>
-                      <a:prstDash val="solid"/>
-                      <a:round/>
-                      <a:headEnd type="none" w="med" len="med"/>
-                      <a:tailEnd type="none" w="med" len="med"/>
-                    </a:lnR>
-                    <a:lnT w="12700" cap="flat" cmpd="sng" algn="ctr">
-                      <a:solidFill>
-                        <a:srgbClr val="EEEEEE"/>
-                      </a:solidFill>
-                      <a:prstDash val="solid"/>
-                      <a:round/>
-                      <a:headEnd type="none" w="med" len="med"/>
-                      <a:tailEnd type="none" w="med" len="med"/>
-                    </a:lnT>
-                    <a:lnB w="12700" cap="flat" cmpd="sng" algn="ctr">
-                      <a:solidFill>
-                        <a:srgbClr val="EEEEEE"/>
-                      </a:solidFill>
-                      <a:prstDash val="solid"/>
-                      <a:round/>
-                      <a:headEnd type="none" w="med" len="med"/>
-                      <a:tailEnd type="none" w="med" len="med"/>
-                    </a:lnB>
-                    <a:solidFill>
-                      <a:srgbClr val="F5F5F5"/>
-                    </a:solidFill>
-                  </a:tcPr>
-                </a:tc>
-                <a:tc>
-                  <a:txBody>
-                    <a:bodyPr/>
-                    <a:lstStyle/>
-                    <a:p>
-                      <a:pPr indent="0" marL="0">
-                        <a:buNone/>
-                      </a:pPr>
-                      <a:r>
-                        <a:rPr lang="en-US" sz="1300" dirty="0">
-                          <a:solidFill>
-                            <a:srgbClr val="212121"/>
-                          </a:solidFill>
-                          <a:latin typeface="Arial" pitchFamily="34" charset="0"/>
-                          <a:ea typeface="Arial" pitchFamily="34" charset="-122"/>
-                          <a:cs typeface="Arial" pitchFamily="34" charset="-120"/>
-                        </a:rPr>
-                        <a:t>Sigue existiendo y facturándose</a:t>
-                      </a:r>
-                      <a:endParaRPr lang="en-US" sz="1300" dirty="0">
-                        <a:latin typeface="Arial" charset="0"/>
-                        <a:ea typeface="Arial" charset="0"/>
-                        <a:cs typeface="Arial" charset="0"/>
-                      </a:endParaRPr>
-                    </a:p>
-                  </a:txBody>
-                  <a:tcPr marL="91440" marR="91440" marT="45720" marB="45720" anchor="ctr">
-                    <a:lnL w="12700" cap="flat" cmpd="sng" algn="ctr">
-                      <a:solidFill>
-                        <a:srgbClr val="EEEEEE"/>
-                      </a:solidFill>
-                      <a:prstDash val="solid"/>
-                      <a:round/>
-                      <a:headEnd type="none" w="med" len="med"/>
-                      <a:tailEnd type="none" w="med" len="med"/>
-                    </a:lnL>
-                    <a:lnR w="12700" cap="flat" cmpd="sng" algn="ctr">
-                      <a:solidFill>
-                        <a:srgbClr val="EEEEEE"/>
-                      </a:solidFill>
-                      <a:prstDash val="solid"/>
-                      <a:round/>
-                      <a:headEnd type="none" w="med" len="med"/>
-                      <a:tailEnd type="none" w="med" len="med"/>
-                    </a:lnR>
-                    <a:lnT w="12700" cap="flat" cmpd="sng" algn="ctr">
-                      <a:solidFill>
-                        <a:srgbClr val="EEEEEE"/>
-                      </a:solidFill>
-                      <a:prstDash val="solid"/>
-                      <a:round/>
-                      <a:headEnd type="none" w="med" len="med"/>
-                      <a:tailEnd type="none" w="med" len="med"/>
-                    </a:lnT>
-                    <a:lnB w="12700" cap="flat" cmpd="sng" algn="ctr">
-                      <a:solidFill>
-                        <a:srgbClr val="EEEEEE"/>
-                      </a:solidFill>
-                      <a:prstDash val="solid"/>
-                      <a:round/>
-                      <a:headEnd type="none" w="med" len="med"/>
-                      <a:tailEnd type="none" w="med" len="med"/>
-                    </a:lnB>
-                    <a:solidFill>
-                      <a:srgbClr val="F5F5F5"/>
-                    </a:solidFill>
-                  </a:tcPr>
-                </a:tc>
-                <a:tc>
-                  <a:txBody>
-                    <a:bodyPr/>
-                    <a:lstStyle/>
-                    <a:p>
-                      <a:pPr indent="0" marL="0">
-                        <a:buNone/>
-                      </a:pPr>
-                      <a:r>
-                        <a:rPr lang="en-US" sz="1300" dirty="0">
-                          <a:solidFill>
-                            <a:srgbClr val="212121"/>
-                          </a:solidFill>
-                          <a:latin typeface="Arial" pitchFamily="34" charset="0"/>
-                          <a:ea typeface="Arial" pitchFamily="34" charset="-122"/>
-                          <a:cs typeface="Arial" pitchFamily="34" charset="-120"/>
-                        </a:rPr>
-                        <a:t>No el cómputo, sí el almacenamiento</a:t>
-                      </a:r>
-                      <a:endParaRPr lang="en-US" sz="1300" dirty="0">
-                        <a:latin typeface="Arial" charset="0"/>
-                        <a:ea typeface="Arial" charset="0"/>
-                        <a:cs typeface="Arial" charset="0"/>
-                      </a:endParaRPr>
-                    </a:p>
-                  </a:txBody>
-                  <a:tcPr marL="91440" marR="91440" marT="45720" marB="45720" anchor="ctr">
-                    <a:lnL w="12700" cap="flat" cmpd="sng" algn="ctr">
-                      <a:solidFill>
-                        <a:srgbClr val="EEEEEE"/>
-                      </a:solidFill>
-                      <a:prstDash val="solid"/>
-                      <a:round/>
-                      <a:headEnd type="none" w="med" len="med"/>
-                      <a:tailEnd type="none" w="med" len="med"/>
-                    </a:lnL>
-                    <a:lnR w="12700" cap="flat" cmpd="sng" algn="ctr">
-                      <a:solidFill>
-                        <a:srgbClr val="EEEEEE"/>
-                      </a:solidFill>
-                      <a:prstDash val="solid"/>
-                      <a:round/>
-                      <a:headEnd type="none" w="med" len="med"/>
-                      <a:tailEnd type="none" w="med" len="med"/>
-                    </a:lnR>
-                    <a:lnT w="12700" cap="flat" cmpd="sng" algn="ctr">
-                      <a:solidFill>
-                        <a:srgbClr val="EEEEEE"/>
-                      </a:solidFill>
-                      <a:prstDash val="solid"/>
-                      <a:round/>
-                      <a:headEnd type="none" w="med" len="med"/>
-                      <a:tailEnd type="none" w="med" len="med"/>
-                    </a:lnT>
-                    <a:lnB w="12700" cap="flat" cmpd="sng" algn="ctr">
-                      <a:solidFill>
-                        <a:srgbClr val="EEEEEE"/>
-                      </a:solidFill>
-                      <a:prstDash val="solid"/>
-                      <a:round/>
-                      <a:headEnd type="none" w="med" len="med"/>
-                      <a:tailEnd type="none" w="med" len="med"/>
-                    </a:lnB>
-                    <a:solidFill>
-                      <a:srgbClr val="F5F5F5"/>
-                    </a:solidFill>
-                  </a:tcPr>
-                </a:tc>
-              </a:tr>
-              <a:tr h="868680">
-                <a:tc>
-                  <a:txBody>
-                    <a:bodyPr/>
-                    <a:lstStyle/>
-                    <a:p>
-                      <a:pPr indent="0" marL="0">
-                        <a:buNone/>
-                      </a:pPr>
-                      <a:r>
-                        <a:rPr lang="en-US" sz="1300" b="1" dirty="0">
-                          <a:solidFill>
-                            <a:srgbClr val="212121"/>
-                          </a:solidFill>
-                          <a:latin typeface="Arial" pitchFamily="34" charset="0"/>
-                          <a:ea typeface="Arial" pitchFamily="34" charset="-122"/>
-                          <a:cs typeface="Arial" pitchFamily="34" charset="-120"/>
-                        </a:rPr>
-                        <a:t>Terminada (terminated)</a:t>
-                      </a:r>
-                      <a:endParaRPr lang="en-US" sz="1300" dirty="0">
-                        <a:latin typeface="Arial" charset="0"/>
-                        <a:ea typeface="Arial" charset="0"/>
-                        <a:cs typeface="Arial" charset="0"/>
-                      </a:endParaRPr>
-                    </a:p>
-                  </a:txBody>
-                  <a:tcPr marL="91440" marR="91440" marT="45720" marB="45720" anchor="ctr">
-                    <a:lnL w="12700" cap="flat" cmpd="sng" algn="ctr">
-                      <a:solidFill>
-                        <a:srgbClr val="EEEEEE"/>
-                      </a:solidFill>
-                      <a:prstDash val="solid"/>
-                      <a:round/>
-                      <a:headEnd type="none" w="med" len="med"/>
-                      <a:tailEnd type="none" w="med" len="med"/>
-                    </a:lnL>
-                    <a:lnR w="12700" cap="flat" cmpd="sng" algn="ctr">
-                      <a:solidFill>
-                        <a:srgbClr val="EEEEEE"/>
-                      </a:solidFill>
-                      <a:prstDash val="solid"/>
-                      <a:round/>
-                      <a:headEnd type="none" w="med" len="med"/>
-                      <a:tailEnd type="none" w="med" len="med"/>
-                    </a:lnR>
-                    <a:lnT w="12700" cap="flat" cmpd="sng" algn="ctr">
-                      <a:solidFill>
-                        <a:srgbClr val="EEEEEE"/>
-                      </a:solidFill>
-                      <a:prstDash val="solid"/>
-                      <a:round/>
-                      <a:headEnd type="none" w="med" len="med"/>
-                      <a:tailEnd type="none" w="med" len="med"/>
-                    </a:lnT>
-                    <a:lnB w="12700" cap="flat" cmpd="sng" algn="ctr">
-                      <a:solidFill>
-                        <a:srgbClr val="EEEEEE"/>
-                      </a:solidFill>
-                      <a:prstDash val="solid"/>
-                      <a:round/>
-                      <a:headEnd type="none" w="med" len="med"/>
-                      <a:tailEnd type="none" w="med" len="med"/>
-                    </a:lnB>
-                    <a:solidFill>
-                      <a:srgbClr val="FFFFFF"/>
-                    </a:solidFill>
-                  </a:tcPr>
-                </a:tc>
-                <a:tc>
-                  <a:txBody>
-                    <a:bodyPr/>
-                    <a:lstStyle/>
-                    <a:p>
-                      <a:pPr indent="0" marL="0">
-                        <a:buNone/>
-                      </a:pPr>
-                      <a:r>
-                        <a:rPr lang="en-US" sz="1300" dirty="0">
-                          <a:solidFill>
-                            <a:srgbClr val="212121"/>
-                          </a:solidFill>
-                          <a:latin typeface="Arial" pitchFamily="34" charset="0"/>
-                          <a:ea typeface="Arial" pitchFamily="34" charset="-122"/>
-                          <a:cs typeface="Arial" pitchFamily="34" charset="-120"/>
-                        </a:rPr>
-                        <a:t>Eliminada por completo, no se puede recuperar</a:t>
-                      </a:r>
-                      <a:endParaRPr lang="en-US" sz="1300" dirty="0">
-                        <a:latin typeface="Arial" charset="0"/>
-                        <a:ea typeface="Arial" charset="0"/>
-                        <a:cs typeface="Arial" charset="0"/>
-                      </a:endParaRPr>
-                    </a:p>
-                  </a:txBody>
-                  <a:tcPr marL="91440" marR="91440" marT="45720" marB="45720" anchor="ctr">
-                    <a:lnL w="12700" cap="flat" cmpd="sng" algn="ctr">
-                      <a:solidFill>
-                        <a:srgbClr val="EEEEEE"/>
-                      </a:solidFill>
-                      <a:prstDash val="solid"/>
-                      <a:round/>
-                      <a:headEnd type="none" w="med" len="med"/>
-                      <a:tailEnd type="none" w="med" len="med"/>
-                    </a:lnL>
-                    <a:lnR w="12700" cap="flat" cmpd="sng" algn="ctr">
-                      <a:solidFill>
-                        <a:srgbClr val="EEEEEE"/>
-                      </a:solidFill>
-                      <a:prstDash val="solid"/>
-                      <a:round/>
-                      <a:headEnd type="none" w="med" len="med"/>
-                      <a:tailEnd type="none" w="med" len="med"/>
-                    </a:lnR>
-                    <a:lnT w="12700" cap="flat" cmpd="sng" algn="ctr">
-                      <a:solidFill>
-                        <a:srgbClr val="EEEEEE"/>
-                      </a:solidFill>
-                      <a:prstDash val="solid"/>
-                      <a:round/>
-                      <a:headEnd type="none" w="med" len="med"/>
-                      <a:tailEnd type="none" w="med" len="med"/>
-                    </a:lnT>
-                    <a:lnB w="12700" cap="flat" cmpd="sng" algn="ctr">
-                      <a:solidFill>
-                        <a:srgbClr val="EEEEEE"/>
-                      </a:solidFill>
-                      <a:prstDash val="solid"/>
-                      <a:round/>
-                      <a:headEnd type="none" w="med" len="med"/>
-                      <a:tailEnd type="none" w="med" len="med"/>
-                    </a:lnB>
-                    <a:solidFill>
-                      <a:srgbClr val="FFFFFF"/>
-                    </a:solidFill>
-                  </a:tcPr>
-                </a:tc>
-                <a:tc>
-                  <a:txBody>
-                    <a:bodyPr/>
-                    <a:lstStyle/>
-                    <a:p>
-                      <a:pPr indent="0" marL="0">
-                        <a:buNone/>
-                      </a:pPr>
-                      <a:r>
-                        <a:rPr lang="en-US" sz="1300" dirty="0">
-                          <a:solidFill>
-                            <a:srgbClr val="212121"/>
-                          </a:solidFill>
-                          <a:latin typeface="Arial" pitchFamily="34" charset="0"/>
-                          <a:ea typeface="Arial" pitchFamily="34" charset="-122"/>
-                          <a:cs typeface="Arial" pitchFamily="34" charset="-120"/>
-                        </a:rPr>
-                        <a:t>Se borra (salvo configuración)</a:t>
-                      </a:r>
-                      <a:endParaRPr lang="en-US" sz="1300" dirty="0">
-                        <a:latin typeface="Arial" charset="0"/>
-                        <a:ea typeface="Arial" charset="0"/>
-                        <a:cs typeface="Arial" charset="0"/>
-                      </a:endParaRPr>
-                    </a:p>
-                  </a:txBody>
-                  <a:tcPr marL="91440" marR="91440" marT="45720" marB="45720" anchor="ctr">
-                    <a:lnL w="12700" cap="flat" cmpd="sng" algn="ctr">
-                      <a:solidFill>
-                        <a:srgbClr val="EEEEEE"/>
-                      </a:solidFill>
-                      <a:prstDash val="solid"/>
-                      <a:round/>
-                      <a:headEnd type="none" w="med" len="med"/>
-                      <a:tailEnd type="none" w="med" len="med"/>
-                    </a:lnL>
-                    <a:lnR w="12700" cap="flat" cmpd="sng" algn="ctr">
-                      <a:solidFill>
-                        <a:srgbClr val="EEEEEE"/>
-                      </a:solidFill>
-                      <a:prstDash val="solid"/>
-                      <a:round/>
-                      <a:headEnd type="none" w="med" len="med"/>
-                      <a:tailEnd type="none" w="med" len="med"/>
-                    </a:lnR>
-                    <a:lnT w="12700" cap="flat" cmpd="sng" algn="ctr">
-                      <a:solidFill>
-                        <a:srgbClr val="EEEEEE"/>
-                      </a:solidFill>
-                      <a:prstDash val="solid"/>
-                      <a:round/>
-                      <a:headEnd type="none" w="med" len="med"/>
-                      <a:tailEnd type="none" w="med" len="med"/>
-                    </a:lnT>
-                    <a:lnB w="12700" cap="flat" cmpd="sng" algn="ctr">
-                      <a:solidFill>
-                        <a:srgbClr val="EEEEEE"/>
-                      </a:solidFill>
-                      <a:prstDash val="solid"/>
-                      <a:round/>
-                      <a:headEnd type="none" w="med" len="med"/>
-                      <a:tailEnd type="none" w="med" len="med"/>
-                    </a:lnB>
-                    <a:solidFill>
-                      <a:srgbClr val="FFFFFF"/>
-                    </a:solidFill>
-                  </a:tcPr>
-                </a:tc>
-                <a:tc>
-                  <a:txBody>
-                    <a:bodyPr/>
-                    <a:lstStyle/>
-                    <a:p>
-                      <a:pPr indent="0" marL="0">
-                        <a:buNone/>
-                      </a:pPr>
-                      <a:r>
-                        <a:rPr lang="en-US" sz="1300" dirty="0">
-                          <a:solidFill>
-                            <a:srgbClr val="212121"/>
-                          </a:solidFill>
-                          <a:latin typeface="Arial" pitchFamily="34" charset="0"/>
-                          <a:ea typeface="Arial" pitchFamily="34" charset="-122"/>
-                          <a:cs typeface="Arial" pitchFamily="34" charset="-120"/>
-                        </a:rPr>
-                        <a:t>No, nada</a:t>
-                      </a:r>
-                      <a:endParaRPr lang="en-US" sz="1300" dirty="0">
-                        <a:latin typeface="Arial" charset="0"/>
-                        <a:ea typeface="Arial" charset="0"/>
-                        <a:cs typeface="Arial" charset="0"/>
-                      </a:endParaRPr>
-                    </a:p>
-                  </a:txBody>
-                  <a:tcPr marL="91440" marR="91440" marT="45720" marB="45720" anchor="ctr">
-                    <a:lnL w="12700" cap="flat" cmpd="sng" algn="ctr">
-                      <a:solidFill>
-                        <a:srgbClr val="EEEEEE"/>
-                      </a:solidFill>
-                      <a:prstDash val="solid"/>
-                      <a:round/>
-                      <a:headEnd type="none" w="med" len="med"/>
-                      <a:tailEnd type="none" w="med" len="med"/>
-                    </a:lnL>
-                    <a:lnR w="12700" cap="flat" cmpd="sng" algn="ctr">
-                      <a:solidFill>
-                        <a:srgbClr val="EEEEEE"/>
-                      </a:solidFill>
-                      <a:prstDash val="solid"/>
-                      <a:round/>
-                      <a:headEnd type="none" w="med" len="med"/>
-                      <a:tailEnd type="none" w="med" len="med"/>
-                    </a:lnR>
-                    <a:lnT w="12700" cap="flat" cmpd="sng" algn="ctr">
-                      <a:solidFill>
-                        <a:srgbClr val="EEEEEE"/>
-                      </a:solidFill>
-                      <a:prstDash val="solid"/>
-                      <a:round/>
-                      <a:headEnd type="none" w="med" len="med"/>
-                      <a:tailEnd type="none" w="med" len="med"/>
-                    </a:lnT>
-                    <a:lnB w="12700" cap="flat" cmpd="sng" algn="ctr">
-                      <a:solidFill>
-                        <a:srgbClr val="EEEEEE"/>
-                      </a:solidFill>
-                      <a:prstDash val="solid"/>
-                      <a:round/>
-                      <a:headEnd type="none" w="med" len="med"/>
-                      <a:tailEnd type="none" w="med" len="med"/>
-                    </a:lnB>
-                    <a:solidFill>
-                      <a:srgbClr val="FFFFFF"/>
-                    </a:solidFill>
-                  </a:tcPr>
-                </a:tc>
-              </a:tr>
-            </a:tbl>
-          </a:graphicData>
-        </a:graphic>
-      </p:graphicFrame>
-      <p:sp>
-        <p:nvSpPr>
-          <p:cNvPr id="6" name="Shape 3"/>
-          <p:cNvSpPr/>
-          <p:nvPr/>
-        </p:nvSpPr>
-        <p:spPr>
-          <a:xfrm>
-            <a:off x="548640" y="4846320"/>
+      <p:sp>
+        <p:nvSpPr>
+          <p:cNvPr id="5" name="Shape 3"/>
+          <p:cNvSpPr/>
+          <p:nvPr/>
+        </p:nvSpPr>
+        <p:spPr>
+          <a:xfrm>
+            <a:off x="548640" y="1143000"/>
+            <a:ext cx="11091672" cy="1051560"/>
+          </a:xfrm>
+          <a:prstGeom prst="roundRect">
+            <a:avLst/>
+          </a:prstGeom>
+          <a:solidFill>
+            <a:srgbClr val="FFF8E1"/>
+          </a:solidFill>
+          <a:ln w="19050">
+            <a:solidFill>
+              <a:srgbClr val="FFA000"/>
+            </a:solidFill>
+            <a:prstDash val="solid"/>
+          </a:ln>
+        </p:spPr>
+        <p:txBody>
+          <a:bodyPr/>
+          <a:lstStyle/>
+          <a:p>
+            <a:endParaRPr lang="es-ES"/>
+          </a:p>
+        </p:txBody>
+      </p:sp>
+      <p:sp>
+        <p:nvSpPr>
+          <p:cNvPr id="6" name="Text 4"/>
+          <p:cNvSpPr/>
+          <p:nvPr/>
+        </p:nvSpPr>
+        <p:spPr>
+          <a:xfrm>
+            <a:off x="822960" y="1234440"/>
+            <a:ext cx="10543032" cy="868680"/>
+          </a:xfrm>
+          <a:prstGeom prst="rect">
+            <a:avLst/>
+          </a:prstGeom>
+          <a:noFill/>
+          <a:ln/>
+        </p:spPr>
+        <p:txBody>
+          <a:bodyPr wrap="square" rtlCol="0" anchor="ctr"/>
+          <a:lstStyle/>
+          <a:p>
+            <a:pPr marL="0" indent="0">
+              <a:buNone/>
+            </a:pPr>
+            <a:r>
+              <a:rPr lang="en-US" sz="1500" dirty="0">
+                <a:solidFill>
+                  <a:srgbClr val="212121"/>
+                </a:solidFill>
+                <a:latin typeface="Arial" pitchFamily="34" charset="0"/>
+                <a:ea typeface="Arial" pitchFamily="34" charset="-122"/>
+                <a:cs typeface="Arial" pitchFamily="34" charset="-120"/>
+              </a:rPr>
+              <a:t>User data (ya lo usaste) automatiza el arranque de una instancia. Hoy subes un escalón: una plantilla de lanzamiento empaqueta todos los parámetros —imagen, tipo, subred, SG, user data— en un recurso reutilizable.</a:t>
+            </a:r>
+            <a:endParaRPr lang="en-US" sz="1500" dirty="0"/>
+          </a:p>
+        </p:txBody>
+      </p:sp>
+      <p:sp>
+        <p:nvSpPr>
+          <p:cNvPr id="7" name="Shape 5"/>
+          <p:cNvSpPr/>
+          <p:nvPr/>
+        </p:nvSpPr>
+        <p:spPr>
+          <a:xfrm>
+            <a:off x="548640" y="2423160"/>
+            <a:ext cx="3291840" cy="2011680"/>
+          </a:xfrm>
+          <a:prstGeom prst="roundRect">
+            <a:avLst/>
+          </a:prstGeom>
+          <a:solidFill>
+            <a:srgbClr val="E8EAF6"/>
+          </a:solidFill>
+          <a:ln w="15875">
+            <a:solidFill>
+              <a:srgbClr val="3949AB"/>
+            </a:solidFill>
+            <a:prstDash val="solid"/>
+          </a:ln>
+        </p:spPr>
+        <p:txBody>
+          <a:bodyPr/>
+          <a:lstStyle/>
+          <a:p>
+            <a:endParaRPr lang="es-ES"/>
+          </a:p>
+        </p:txBody>
+      </p:sp>
+      <p:sp>
+        <p:nvSpPr>
+          <p:cNvPr id="8" name="Text 6"/>
+          <p:cNvSpPr/>
+          <p:nvPr/>
+        </p:nvSpPr>
+        <p:spPr>
+          <a:xfrm>
+            <a:off x="731520" y="2496312"/>
+            <a:ext cx="2926080" cy="548640"/>
+          </a:xfrm>
+          <a:prstGeom prst="rect">
+            <a:avLst/>
+          </a:prstGeom>
+          <a:noFill/>
+          <a:ln/>
+        </p:spPr>
+        <p:txBody>
+          <a:bodyPr wrap="square" rtlCol="0" anchor="ctr"/>
+          <a:lstStyle/>
+          <a:p>
+            <a:pPr marL="0" indent="0">
+              <a:buNone/>
+            </a:pPr>
+            <a:r>
+              <a:rPr lang="en-US" sz="1800" b="1" dirty="0">
+                <a:solidFill>
+                  <a:srgbClr val="1A237E"/>
+                </a:solidFill>
+                <a:latin typeface="Courier New" pitchFamily="34" charset="0"/>
+                <a:ea typeface="Courier New" pitchFamily="34" charset="-122"/>
+                <a:cs typeface="Courier New" pitchFamily="34" charset="-120"/>
+              </a:rPr>
+              <a:t>Plantilla de lanzamiento</a:t>
+            </a:r>
+            <a:endParaRPr lang="en-US" sz="1800" dirty="0"/>
+          </a:p>
+        </p:txBody>
+      </p:sp>
+      <p:sp>
+        <p:nvSpPr>
+          <p:cNvPr id="9" name="Text 7"/>
+          <p:cNvSpPr/>
+          <p:nvPr/>
+        </p:nvSpPr>
+        <p:spPr>
+          <a:xfrm>
+            <a:off x="731520" y="3044952"/>
+            <a:ext cx="2926080" cy="1316736"/>
+          </a:xfrm>
+          <a:prstGeom prst="rect">
+            <a:avLst/>
+          </a:prstGeom>
+          <a:noFill/>
+          <a:ln/>
+        </p:spPr>
+        <p:txBody>
+          <a:bodyPr wrap="square" rtlCol="0" anchor="t"/>
+          <a:lstStyle/>
+          <a:p>
+            <a:pPr marL="0" indent="0">
+              <a:buNone/>
+            </a:pPr>
+            <a:r>
+              <a:rPr lang="en-US" sz="1500" dirty="0">
+                <a:solidFill>
+                  <a:srgbClr val="212121"/>
+                </a:solidFill>
+                <a:latin typeface="Arial" pitchFamily="34" charset="0"/>
+                <a:ea typeface="Arial" pitchFamily="34" charset="-122"/>
+                <a:cs typeface="Arial" pitchFamily="34" charset="-120"/>
+              </a:rPr>
+              <a:t>imagen + tipo + red + user data</a:t>
+            </a:r>
+            <a:endParaRPr lang="en-US" sz="1500" dirty="0"/>
+          </a:p>
+        </p:txBody>
+      </p:sp>
+      <p:sp>
+        <p:nvSpPr>
+          <p:cNvPr id="10" name="Shape 8"/>
+          <p:cNvSpPr/>
+          <p:nvPr/>
+        </p:nvSpPr>
+        <p:spPr>
+          <a:xfrm>
+            <a:off x="4206240" y="2423160"/>
+            <a:ext cx="2325624" cy="2011680"/>
+          </a:xfrm>
+          <a:prstGeom prst="roundRect">
+            <a:avLst/>
+          </a:prstGeom>
+          <a:solidFill>
+            <a:srgbClr val="E8EAF6"/>
+          </a:solidFill>
+          <a:ln w="15875">
+            <a:solidFill>
+              <a:srgbClr val="3949AB"/>
+            </a:solidFill>
+            <a:prstDash val="solid"/>
+          </a:ln>
+        </p:spPr>
+        <p:txBody>
+          <a:bodyPr/>
+          <a:lstStyle/>
+          <a:p>
+            <a:endParaRPr lang="es-ES"/>
+          </a:p>
+        </p:txBody>
+      </p:sp>
+      <p:sp>
+        <p:nvSpPr>
+          <p:cNvPr id="11" name="Text 9"/>
+          <p:cNvSpPr/>
+          <p:nvPr/>
+        </p:nvSpPr>
+        <p:spPr>
+          <a:xfrm>
+            <a:off x="4206240" y="2423160"/>
+            <a:ext cx="2325624" cy="2011680"/>
+          </a:xfrm>
+          <a:prstGeom prst="rect">
+            <a:avLst/>
+          </a:prstGeom>
+          <a:noFill/>
+          <a:ln/>
+        </p:spPr>
+        <p:txBody>
+          <a:bodyPr wrap="square" rtlCol="0" anchor="ctr"/>
+          <a:lstStyle/>
+          <a:p>
+            <a:pPr marL="0" indent="0" algn="ctr">
+              <a:buNone/>
+            </a:pPr>
+            <a:r>
+              <a:rPr lang="en-US" sz="1500" b="1" dirty="0">
+                <a:solidFill>
+                  <a:srgbClr val="1A237E"/>
+                </a:solidFill>
+                <a:latin typeface="Arial" pitchFamily="34" charset="0"/>
+                <a:ea typeface="Arial" pitchFamily="34" charset="-122"/>
+                <a:cs typeface="Arial" pitchFamily="34" charset="-120"/>
+              </a:rPr>
+              <a:t>Instancia 1</a:t>
+            </a:r>
+            <a:endParaRPr lang="en-US" sz="1500" dirty="0"/>
+          </a:p>
+        </p:txBody>
+      </p:sp>
+      <p:sp>
+        <p:nvSpPr>
+          <p:cNvPr id="12" name="Shape 10"/>
+          <p:cNvSpPr/>
+          <p:nvPr/>
+        </p:nvSpPr>
+        <p:spPr>
+          <a:xfrm>
+            <a:off x="6760464" y="2423160"/>
+            <a:ext cx="2325624" cy="2011680"/>
+          </a:xfrm>
+          <a:prstGeom prst="roundRect">
+            <a:avLst/>
+          </a:prstGeom>
+          <a:solidFill>
+            <a:srgbClr val="E8EAF6"/>
+          </a:solidFill>
+          <a:ln w="15875">
+            <a:solidFill>
+              <a:srgbClr val="3949AB"/>
+            </a:solidFill>
+            <a:prstDash val="solid"/>
+          </a:ln>
+        </p:spPr>
+        <p:txBody>
+          <a:bodyPr/>
+          <a:lstStyle/>
+          <a:p>
+            <a:endParaRPr lang="es-ES"/>
+          </a:p>
+        </p:txBody>
+      </p:sp>
+      <p:sp>
+        <p:nvSpPr>
+          <p:cNvPr id="13" name="Text 11"/>
+          <p:cNvSpPr/>
+          <p:nvPr/>
+        </p:nvSpPr>
+        <p:spPr>
+          <a:xfrm>
+            <a:off x="6760464" y="2423160"/>
+            <a:ext cx="2325624" cy="2011680"/>
+          </a:xfrm>
+          <a:prstGeom prst="rect">
+            <a:avLst/>
+          </a:prstGeom>
+          <a:noFill/>
+          <a:ln/>
+        </p:spPr>
+        <p:txBody>
+          <a:bodyPr wrap="square" rtlCol="0" anchor="ctr"/>
+          <a:lstStyle/>
+          <a:p>
+            <a:pPr marL="0" indent="0" algn="ctr">
+              <a:buNone/>
+            </a:pPr>
+            <a:r>
+              <a:rPr lang="en-US" sz="1500" b="1" dirty="0">
+                <a:solidFill>
+                  <a:srgbClr val="1A237E"/>
+                </a:solidFill>
+                <a:latin typeface="Arial" pitchFamily="34" charset="0"/>
+                <a:ea typeface="Arial" pitchFamily="34" charset="-122"/>
+                <a:cs typeface="Arial" pitchFamily="34" charset="-120"/>
+              </a:rPr>
+              <a:t>Instancia 2</a:t>
+            </a:r>
+            <a:endParaRPr lang="en-US" sz="1500" dirty="0"/>
+          </a:p>
+        </p:txBody>
+      </p:sp>
+      <p:sp>
+        <p:nvSpPr>
+          <p:cNvPr id="14" name="Shape 12"/>
+          <p:cNvSpPr/>
+          <p:nvPr/>
+        </p:nvSpPr>
+        <p:spPr>
+          <a:xfrm>
+            <a:off x="9314688" y="2423160"/>
+            <a:ext cx="2325624" cy="2011680"/>
+          </a:xfrm>
+          <a:prstGeom prst="roundRect">
+            <a:avLst/>
+          </a:prstGeom>
+          <a:solidFill>
+            <a:srgbClr val="E8EAF6"/>
+          </a:solidFill>
+          <a:ln w="15875">
+            <a:solidFill>
+              <a:srgbClr val="3949AB"/>
+            </a:solidFill>
+            <a:prstDash val="solid"/>
+          </a:ln>
+        </p:spPr>
+        <p:txBody>
+          <a:bodyPr/>
+          <a:lstStyle/>
+          <a:p>
+            <a:endParaRPr lang="es-ES"/>
+          </a:p>
+        </p:txBody>
+      </p:sp>
+      <p:sp>
+        <p:nvSpPr>
+          <p:cNvPr id="15" name="Text 13"/>
+          <p:cNvSpPr/>
+          <p:nvPr/>
+        </p:nvSpPr>
+        <p:spPr>
+          <a:xfrm>
+            <a:off x="9314688" y="2423160"/>
+            <a:ext cx="2325624" cy="2011680"/>
+          </a:xfrm>
+          <a:prstGeom prst="rect">
+            <a:avLst/>
+          </a:prstGeom>
+          <a:noFill/>
+          <a:ln/>
+        </p:spPr>
+        <p:txBody>
+          <a:bodyPr wrap="square" rtlCol="0" anchor="ctr"/>
+          <a:lstStyle/>
+          <a:p>
+            <a:pPr marL="0" indent="0" algn="ctr">
+              <a:buNone/>
+            </a:pPr>
+            <a:r>
+              <a:rPr lang="en-US" sz="1500" b="1" dirty="0">
+                <a:solidFill>
+                  <a:srgbClr val="1A237E"/>
+                </a:solidFill>
+                <a:latin typeface="Arial" pitchFamily="34" charset="0"/>
+                <a:ea typeface="Arial" pitchFamily="34" charset="-122"/>
+                <a:cs typeface="Arial" pitchFamily="34" charset="-120"/>
+              </a:rPr>
+              <a:t>Instancia N...</a:t>
+            </a:r>
+            <a:endParaRPr lang="en-US" sz="1500" dirty="0"/>
+          </a:p>
+        </p:txBody>
+      </p:sp>
+      <p:sp>
+        <p:nvSpPr>
+          <p:cNvPr id="16" name="Shape 14"/>
+          <p:cNvSpPr/>
+          <p:nvPr/>
+        </p:nvSpPr>
+        <p:spPr>
+          <a:xfrm>
+            <a:off x="548640" y="4709160"/>
             <a:ext cx="11091672" cy="1280160"/>
           </a:xfrm>
           <a:prstGeom prst="roundRect">
@@ -7924,16 +8315,23 @@
             <a:prstDash val="solid"/>
           </a:ln>
         </p:spPr>
-      </p:sp>
-      <p:sp>
-        <p:nvSpPr>
-          <p:cNvPr id="7" name="Text 4"/>
-          <p:cNvSpPr/>
-          <p:nvPr/>
-        </p:nvSpPr>
-        <p:spPr>
-          <a:xfrm>
-            <a:off x="822960" y="4956048"/>
+        <p:txBody>
+          <a:bodyPr/>
+          <a:lstStyle/>
+          <a:p>
+            <a:endParaRPr lang="es-ES"/>
+          </a:p>
+        </p:txBody>
+      </p:sp>
+      <p:sp>
+        <p:nvSpPr>
+          <p:cNvPr id="17" name="Text 15"/>
+          <p:cNvSpPr/>
+          <p:nvPr/>
+        </p:nvSpPr>
+        <p:spPr>
+          <a:xfrm>
+            <a:off x="822960" y="4818888"/>
             <a:ext cx="10543032" cy="1060704"/>
           </a:xfrm>
           <a:prstGeom prst="rect">
@@ -7946,11 +8344,11 @@
           <a:bodyPr wrap="square" rtlCol="0" anchor="t"/>
           <a:lstStyle/>
           <a:p>
-            <a:pPr indent="0" marL="0">
+            <a:pPr marL="0" indent="0">
               <a:buNone/>
             </a:pPr>
             <a:r>
-              <a:rPr lang="en-US" sz="1700" b="1" dirty="0">
+              <a:rPr lang="en-US" sz="1600" b="1" dirty="0">
                 <a:solidFill>
                   <a:srgbClr val="1A237E"/>
                 </a:solidFill>
@@ -7958,17 +8356,17 @@
                 <a:ea typeface="Arial" pitchFamily="34" charset="-122"/>
                 <a:cs typeface="Arial" pitchFamily="34" charset="-120"/>
               </a:rPr>
-              <a:t>💸 Parar no vacía tu factura, solo la reduce
+              <a:t>Una plantilla no crea infraestructura, solo la reutiliza
 </a:t>
             </a:r>
-            <a:endParaRPr lang="en-US" sz="1700" dirty="0"/>
-          </a:p>
-          <a:p>
-            <a:pPr indent="0" marL="0">
+            <a:endParaRPr lang="en-US" sz="1600" dirty="0"/>
+          </a:p>
+          <a:p>
+            <a:pPr marL="0" indent="0">
               <a:buNone/>
             </a:pPr>
             <a:r>
-              <a:rPr lang="en-US" sz="1600" dirty="0">
+              <a:rPr lang="en-US" sz="1500" dirty="0">
                 <a:solidFill>
                   <a:srgbClr val="212121"/>
                 </a:solidFill>
@@ -7976,9 +8374,9 @@
                 <a:ea typeface="Arial" pitchFamily="34" charset="-122"/>
                 <a:cs typeface="Arial" pitchFamily="34" charset="-120"/>
               </a:rPr>
-              <a:t>El volumen de disco asociado sigue existiendo y teniendo coste. El ritual de apagado significa parar lo que quieras conservar, y terminar de verdad lo que ya no necesitas.</a:t>
+              <a:t>Guarda los ID de tu subred y tu SG, válidos solo en tu cuenta y región. Para replicar toda una infraestructura hace falta otra herramienta: infraestructura como código (Tema 6).</a:t>
             </a:r>
-            <a:endParaRPr lang="en-US" sz="1700" dirty="0"/>
+            <a:endParaRPr lang="en-US" sz="1600" dirty="0"/>
           </a:p>
         </p:txBody>
       </p:sp>
@@ -8031,6 +8429,13 @@
             <a:prstDash val="solid"/>
           </a:ln>
         </p:spPr>
+        <p:txBody>
+          <a:bodyPr/>
+          <a:lstStyle/>
+          <a:p>
+            <a:endParaRPr lang="es-ES"/>
+          </a:p>
+        </p:txBody>
       </p:sp>
       <p:sp>
         <p:nvSpPr>
@@ -8053,7 +8458,7 @@
           <a:bodyPr wrap="square" rtlCol="0" anchor="ctr"/>
           <a:lstStyle/>
           <a:p>
-            <a:pPr indent="0" marL="0">
+            <a:pPr marL="0" indent="0">
               <a:buNone/>
             </a:pPr>
             <a:r>
@@ -8065,7 +8470,7 @@
                 <a:ea typeface="Arial" pitchFamily="34" charset="-122"/>
                 <a:cs typeface="Arial" pitchFamily="34" charset="-120"/>
               </a:rPr>
-              <a:t>User data y plantillas de lanzamiento</a:t>
+              <a:t>Ideas clave</a:t>
             </a:r>
             <a:endParaRPr lang="en-US" sz="2400" dirty="0"/>
           </a:p>
@@ -8092,7 +8497,7 @@
           <a:bodyPr wrap="square" rtlCol="0" anchor="ctr"/>
           <a:lstStyle/>
           <a:p>
-            <a:pPr algn="r" indent="0" marL="0">
+            <a:pPr marL="0" indent="0" algn="r">
               <a:buNone/>
             </a:pPr>
             <a:r>
@@ -8112,157 +8517,14 @@
       </p:sp>
       <p:sp>
         <p:nvSpPr>
-          <p:cNvPr id="5" name="Text 3"/>
-          <p:cNvSpPr/>
-          <p:nvPr/>
-        </p:nvSpPr>
-        <p:spPr>
-          <a:xfrm>
-            <a:off x="548640" y="1188720"/>
-            <a:ext cx="11091672" cy="1463040"/>
-          </a:xfrm>
-          <a:prstGeom prst="rect">
-            <a:avLst/>
-          </a:prstGeom>
-          <a:noFill/>
-          <a:ln/>
-        </p:spPr>
-        <p:txBody>
-          <a:bodyPr wrap="square" rtlCol="0" anchor="t"/>
-          <a:lstStyle/>
-          <a:p>
-            <a:pPr indent="0" marL="0">
-              <a:buNone/>
-            </a:pPr>
-            <a:r>
-              <a:rPr lang="en-US" sz="1800" dirty="0">
-                <a:solidFill>
-                  <a:srgbClr val="212121"/>
-                </a:solidFill>
-                <a:latin typeface="Arial" pitchFamily="34" charset="0"/>
-                <a:ea typeface="Arial" pitchFamily="34" charset="-122"/>
-                <a:cs typeface="Arial" pitchFamily="34" charset="-120"/>
-              </a:rPr>
-              <a:t>User data es un script que se ejecuta automáticamente la primera vez que arranca una instancia. Una plantilla de lanzamiento va un escalón más allá: empaqueta todos los parámetros de una instancia —imagen, tipo, subred, grupo de seguridad, user data— en un único recurso reutilizable.</a:t>
-            </a:r>
-            <a:endParaRPr lang="en-US" sz="1800" dirty="0"/>
-          </a:p>
-        </p:txBody>
-      </p:sp>
-      <p:sp>
-        <p:nvSpPr>
-          <p:cNvPr id="6" name="Shape 4"/>
-          <p:cNvSpPr/>
-          <p:nvPr/>
-        </p:nvSpPr>
-        <p:spPr>
-          <a:xfrm>
-            <a:off x="3677107" y="2971800"/>
-            <a:ext cx="4834738" cy="822960"/>
-          </a:xfrm>
-          <a:prstGeom prst="roundRect">
-            <a:avLst/>
-          </a:prstGeom>
-          <a:solidFill>
-            <a:srgbClr val="E8EAF6"/>
-          </a:solidFill>
-          <a:ln w="19050">
-            <a:solidFill>
-              <a:srgbClr val="3949AB"/>
-            </a:solidFill>
-            <a:prstDash val="solid"/>
-          </a:ln>
-        </p:spPr>
-      </p:sp>
-      <p:sp>
-        <p:nvSpPr>
-          <p:cNvPr id="7" name="Text 5"/>
-          <p:cNvSpPr/>
-          <p:nvPr/>
-        </p:nvSpPr>
-        <p:spPr>
-          <a:xfrm>
-            <a:off x="3677107" y="2971800"/>
-            <a:ext cx="4834738" cy="822960"/>
-          </a:xfrm>
-          <a:prstGeom prst="rect">
-            <a:avLst/>
-          </a:prstGeom>
-          <a:noFill/>
-          <a:ln/>
-        </p:spPr>
-        <p:txBody>
-          <a:bodyPr wrap="square" rtlCol="0" anchor="ctr"/>
-          <a:lstStyle/>
-          <a:p>
-            <a:pPr algn="ctr" indent="0" marL="0">
-              <a:buNone/>
-            </a:pPr>
-            <a:r>
-              <a:rPr lang="en-US" sz="1700" b="1" dirty="0">
-                <a:solidFill>
-                  <a:srgbClr val="212121"/>
-                </a:solidFill>
-                <a:latin typeface="Arial" pitchFamily="34" charset="0"/>
-                <a:ea typeface="Arial" pitchFamily="34" charset="-122"/>
-                <a:cs typeface="Arial" pitchFamily="34" charset="-120"/>
-              </a:rPr>
-              <a:t>Plantilla de lanzamiento</a:t>
-            </a:r>
-            <a:endParaRPr lang="en-US" sz="1700" dirty="0"/>
-          </a:p>
-          <a:p>
-            <a:pPr algn="ctr" indent="0" marL="0">
-              <a:buNone/>
-            </a:pPr>
-            <a:r>
-              <a:rPr lang="en-US" sz="1700" b="1" dirty="0">
-                <a:solidFill>
-                  <a:srgbClr val="212121"/>
-                </a:solidFill>
-                <a:latin typeface="Arial" pitchFamily="34" charset="0"/>
-                <a:ea typeface="Arial" pitchFamily="34" charset="-122"/>
-                <a:cs typeface="Arial" pitchFamily="34" charset="-120"/>
-              </a:rPr>
-              <a:t>imagen + tipo + red + user data</a:t>
-            </a:r>
-            <a:endParaRPr lang="en-US" sz="1700" dirty="0"/>
-          </a:p>
-        </p:txBody>
-      </p:sp>
-      <p:sp>
-        <p:nvSpPr>
-          <p:cNvPr id="8" name="Shape 6"/>
-          <p:cNvSpPr/>
-          <p:nvPr/>
-        </p:nvSpPr>
-        <p:spPr>
-          <a:xfrm>
-            <a:off x="6094476" y="3794760"/>
-            <a:ext cx="914" cy="182880"/>
-          </a:xfrm>
-          <a:prstGeom prst="line">
-            <a:avLst/>
-          </a:prstGeom>
-          <a:noFill/>
-          <a:ln w="15875">
-            <a:solidFill>
-              <a:srgbClr val="3949AB"/>
-            </a:solidFill>
-            <a:prstDash val="solid"/>
-          </a:ln>
-        </p:spPr>
-      </p:sp>
-      <p:sp>
-        <p:nvSpPr>
-          <p:cNvPr id="9" name="Shape 7"/>
-          <p:cNvSpPr/>
-          <p:nvPr/>
-        </p:nvSpPr>
-        <p:spPr>
-          <a:xfrm>
-            <a:off x="548640" y="4160520"/>
-            <a:ext cx="3453384" cy="731520"/>
+          <p:cNvPr id="5" name="Shape 3"/>
+          <p:cNvSpPr/>
+          <p:nvPr/>
+        </p:nvSpPr>
+        <p:spPr>
+          <a:xfrm>
+            <a:off x="548640" y="1371600"/>
+            <a:ext cx="5408676" cy="1508760"/>
           </a:xfrm>
           <a:prstGeom prst="roundRect">
             <a:avLst/>
@@ -8277,17 +8539,56 @@
             <a:prstDash val="solid"/>
           </a:ln>
         </p:spPr>
-      </p:sp>
-      <p:sp>
-        <p:nvSpPr>
-          <p:cNvPr id="10" name="Text 8"/>
-          <p:cNvSpPr/>
-          <p:nvPr/>
-        </p:nvSpPr>
-        <p:spPr>
-          <a:xfrm>
-            <a:off x="594360" y="4160520"/>
-            <a:ext cx="3361944" cy="731520"/>
+        <p:txBody>
+          <a:bodyPr/>
+          <a:lstStyle/>
+          <a:p>
+            <a:endParaRPr lang="es-ES"/>
+          </a:p>
+        </p:txBody>
+      </p:sp>
+      <p:sp>
+        <p:nvSpPr>
+          <p:cNvPr id="6" name="Shape 4"/>
+          <p:cNvSpPr/>
+          <p:nvPr/>
+        </p:nvSpPr>
+        <p:spPr>
+          <a:xfrm>
+            <a:off x="731520" y="1805940"/>
+            <a:ext cx="640080" cy="640080"/>
+          </a:xfrm>
+          <a:prstGeom prst="ellipse">
+            <a:avLst/>
+          </a:prstGeom>
+          <a:solidFill>
+            <a:srgbClr val="3949AB"/>
+          </a:solidFill>
+          <a:ln w="12700">
+            <a:solidFill>
+              <a:srgbClr val="3949AB"/>
+            </a:solidFill>
+            <a:prstDash val="solid"/>
+          </a:ln>
+        </p:spPr>
+        <p:txBody>
+          <a:bodyPr/>
+          <a:lstStyle/>
+          <a:p>
+            <a:endParaRPr lang="es-ES"/>
+          </a:p>
+        </p:txBody>
+      </p:sp>
+      <p:sp>
+        <p:nvSpPr>
+          <p:cNvPr id="7" name="Text 5"/>
+          <p:cNvSpPr/>
+          <p:nvPr/>
+        </p:nvSpPr>
+        <p:spPr>
+          <a:xfrm>
+            <a:off x="731520" y="1805940"/>
+            <a:ext cx="640080" cy="640080"/>
           </a:xfrm>
           <a:prstGeom prst="rect">
             <a:avLst/>
@@ -8299,11 +8600,50 @@
           <a:bodyPr wrap="square" rtlCol="0" anchor="ctr"/>
           <a:lstStyle/>
           <a:p>
-            <a:pPr algn="ctr" indent="0" marL="0">
+            <a:pPr marL="0" indent="0" algn="ctr">
               <a:buNone/>
             </a:pPr>
             <a:r>
-              <a:rPr lang="en-US" sz="1600" dirty="0">
+              <a:rPr lang="en-US" sz="2000" b="1" dirty="0">
+                <a:solidFill>
+                  <a:srgbClr val="FFFFFF"/>
+                </a:solidFill>
+                <a:latin typeface="Arial" pitchFamily="34" charset="0"/>
+                <a:ea typeface="Arial" pitchFamily="34" charset="-122"/>
+                <a:cs typeface="Arial" pitchFamily="34" charset="-120"/>
+              </a:rPr>
+              <a:t>1</a:t>
+            </a:r>
+            <a:endParaRPr lang="en-US" sz="2000" dirty="0"/>
+          </a:p>
+        </p:txBody>
+      </p:sp>
+      <p:sp>
+        <p:nvSpPr>
+          <p:cNvPr id="8" name="Text 6"/>
+          <p:cNvSpPr/>
+          <p:nvPr/>
+        </p:nvSpPr>
+        <p:spPr>
+          <a:xfrm>
+            <a:off x="1508760" y="1371600"/>
+            <a:ext cx="4265676" cy="1508760"/>
+          </a:xfrm>
+          <a:prstGeom prst="rect">
+            <a:avLst/>
+          </a:prstGeom>
+          <a:noFill/>
+          <a:ln/>
+        </p:spPr>
+        <p:txBody>
+          <a:bodyPr wrap="square" rtlCol="0" anchor="ctr"/>
+          <a:lstStyle/>
+          <a:p>
+            <a:pPr marL="0" indent="0">
+              <a:buNone/>
+            </a:pPr>
+            <a:r>
+              <a:rPr lang="en-US" sz="1550" dirty="0">
                 <a:solidFill>
                   <a:srgbClr val="212121"/>
                 </a:solidFill>
@@ -8311,45 +8651,22 @@
                 <a:ea typeface="Arial" pitchFamily="34" charset="-122"/>
                 <a:cs typeface="Arial" pitchFamily="34" charset="-120"/>
               </a:rPr>
-              <a:t>Instancia 1</a:t>
+              <a:t>El tipo combina familia (para qué está optimizada) y tamaño (cuánta CPU/memoria) — más grande no siempre es mejor.</a:t>
             </a:r>
-            <a:endParaRPr lang="en-US" sz="1600" dirty="0"/>
-          </a:p>
-        </p:txBody>
-      </p:sp>
-      <p:sp>
-        <p:nvSpPr>
-          <p:cNvPr id="11" name="Shape 9"/>
-          <p:cNvSpPr/>
-          <p:nvPr/>
-        </p:nvSpPr>
-        <p:spPr>
-          <a:xfrm>
-            <a:off x="2275332" y="3977640"/>
-            <a:ext cx="914" cy="182880"/>
-          </a:xfrm>
-          <a:prstGeom prst="line">
-            <a:avLst/>
-          </a:prstGeom>
-          <a:noFill/>
-          <a:ln w="15875">
-            <a:solidFill>
-              <a:srgbClr val="3949AB"/>
-            </a:solidFill>
-            <a:prstDash val="solid"/>
-          </a:ln>
-        </p:spPr>
-      </p:sp>
-      <p:sp>
-        <p:nvSpPr>
-          <p:cNvPr id="12" name="Shape 10"/>
-          <p:cNvSpPr/>
-          <p:nvPr/>
-        </p:nvSpPr>
-        <p:spPr>
-          <a:xfrm>
-            <a:off x="4367784" y="4160520"/>
-            <a:ext cx="3453384" cy="731520"/>
+            <a:endParaRPr lang="en-US" sz="1550" dirty="0"/>
+          </a:p>
+        </p:txBody>
+      </p:sp>
+      <p:sp>
+        <p:nvSpPr>
+          <p:cNvPr id="9" name="Shape 7"/>
+          <p:cNvSpPr/>
+          <p:nvPr/>
+        </p:nvSpPr>
+        <p:spPr>
+          <a:xfrm>
+            <a:off x="6231636" y="1371600"/>
+            <a:ext cx="5408676" cy="1508760"/>
           </a:xfrm>
           <a:prstGeom prst="roundRect">
             <a:avLst/>
@@ -8364,17 +8681,56 @@
             <a:prstDash val="solid"/>
           </a:ln>
         </p:spPr>
-      </p:sp>
-      <p:sp>
-        <p:nvSpPr>
-          <p:cNvPr id="13" name="Text 11"/>
-          <p:cNvSpPr/>
-          <p:nvPr/>
-        </p:nvSpPr>
-        <p:spPr>
-          <a:xfrm>
-            <a:off x="4413504" y="4160520"/>
-            <a:ext cx="3361944" cy="731520"/>
+        <p:txBody>
+          <a:bodyPr/>
+          <a:lstStyle/>
+          <a:p>
+            <a:endParaRPr lang="es-ES"/>
+          </a:p>
+        </p:txBody>
+      </p:sp>
+      <p:sp>
+        <p:nvSpPr>
+          <p:cNvPr id="10" name="Shape 8"/>
+          <p:cNvSpPr/>
+          <p:nvPr/>
+        </p:nvSpPr>
+        <p:spPr>
+          <a:xfrm>
+            <a:off x="6414516" y="1805940"/>
+            <a:ext cx="640080" cy="640080"/>
+          </a:xfrm>
+          <a:prstGeom prst="ellipse">
+            <a:avLst/>
+          </a:prstGeom>
+          <a:solidFill>
+            <a:srgbClr val="3949AB"/>
+          </a:solidFill>
+          <a:ln w="12700">
+            <a:solidFill>
+              <a:srgbClr val="3949AB"/>
+            </a:solidFill>
+            <a:prstDash val="solid"/>
+          </a:ln>
+        </p:spPr>
+        <p:txBody>
+          <a:bodyPr/>
+          <a:lstStyle/>
+          <a:p>
+            <a:endParaRPr lang="es-ES"/>
+          </a:p>
+        </p:txBody>
+      </p:sp>
+      <p:sp>
+        <p:nvSpPr>
+          <p:cNvPr id="11" name="Text 9"/>
+          <p:cNvSpPr/>
+          <p:nvPr/>
+        </p:nvSpPr>
+        <p:spPr>
+          <a:xfrm>
+            <a:off x="6414516" y="1805940"/>
+            <a:ext cx="640080" cy="640080"/>
           </a:xfrm>
           <a:prstGeom prst="rect">
             <a:avLst/>
@@ -8386,11 +8742,50 @@
           <a:bodyPr wrap="square" rtlCol="0" anchor="ctr"/>
           <a:lstStyle/>
           <a:p>
-            <a:pPr algn="ctr" indent="0" marL="0">
+            <a:pPr marL="0" indent="0" algn="ctr">
               <a:buNone/>
             </a:pPr>
             <a:r>
-              <a:rPr lang="en-US" sz="1600" dirty="0">
+              <a:rPr lang="en-US" sz="2000" b="1" dirty="0">
+                <a:solidFill>
+                  <a:srgbClr val="FFFFFF"/>
+                </a:solidFill>
+                <a:latin typeface="Arial" pitchFamily="34" charset="0"/>
+                <a:ea typeface="Arial" pitchFamily="34" charset="-122"/>
+                <a:cs typeface="Arial" pitchFamily="34" charset="-120"/>
+              </a:rPr>
+              <a:t>2</a:t>
+            </a:r>
+            <a:endParaRPr lang="en-US" sz="2000" dirty="0"/>
+          </a:p>
+        </p:txBody>
+      </p:sp>
+      <p:sp>
+        <p:nvSpPr>
+          <p:cNvPr id="12" name="Text 10"/>
+          <p:cNvSpPr/>
+          <p:nvPr/>
+        </p:nvSpPr>
+        <p:spPr>
+          <a:xfrm>
+            <a:off x="7191756" y="1371600"/>
+            <a:ext cx="4265676" cy="1508760"/>
+          </a:xfrm>
+          <a:prstGeom prst="rect">
+            <a:avLst/>
+          </a:prstGeom>
+          <a:noFill/>
+          <a:ln/>
+        </p:spPr>
+        <p:txBody>
+          <a:bodyPr wrap="square" rtlCol="0" anchor="ctr"/>
+          <a:lstStyle/>
+          <a:p>
+            <a:pPr marL="0" indent="0">
+              <a:buNone/>
+            </a:pPr>
+            <a:r>
+              <a:rPr lang="en-US" sz="1550" dirty="0">
                 <a:solidFill>
                   <a:srgbClr val="212121"/>
                 </a:solidFill>
@@ -8398,45 +8793,22 @@
                 <a:ea typeface="Arial" pitchFamily="34" charset="-122"/>
                 <a:cs typeface="Arial" pitchFamily="34" charset="-120"/>
               </a:rPr>
-              <a:t>Instancia 2</a:t>
+              <a:t>Una AMI es la fotografía completa de un disco de arranque, lista para lanzar instancias idénticas.</a:t>
             </a:r>
-            <a:endParaRPr lang="en-US" sz="1600" dirty="0"/>
-          </a:p>
-        </p:txBody>
-      </p:sp>
-      <p:sp>
-        <p:nvSpPr>
-          <p:cNvPr id="14" name="Shape 12"/>
-          <p:cNvSpPr/>
-          <p:nvPr/>
-        </p:nvSpPr>
-        <p:spPr>
-          <a:xfrm>
-            <a:off x="6094476" y="3977640"/>
-            <a:ext cx="914" cy="182880"/>
-          </a:xfrm>
-          <a:prstGeom prst="line">
-            <a:avLst/>
-          </a:prstGeom>
-          <a:noFill/>
-          <a:ln w="15875">
-            <a:solidFill>
-              <a:srgbClr val="3949AB"/>
-            </a:solidFill>
-            <a:prstDash val="solid"/>
-          </a:ln>
-        </p:spPr>
-      </p:sp>
-      <p:sp>
-        <p:nvSpPr>
-          <p:cNvPr id="15" name="Shape 13"/>
-          <p:cNvSpPr/>
-          <p:nvPr/>
-        </p:nvSpPr>
-        <p:spPr>
-          <a:xfrm>
-            <a:off x="8186928" y="4160520"/>
-            <a:ext cx="3453384" cy="731520"/>
+            <a:endParaRPr lang="en-US" sz="1550" dirty="0"/>
+          </a:p>
+        </p:txBody>
+      </p:sp>
+      <p:sp>
+        <p:nvSpPr>
+          <p:cNvPr id="13" name="Shape 11"/>
+          <p:cNvSpPr/>
+          <p:nvPr/>
+        </p:nvSpPr>
+        <p:spPr>
+          <a:xfrm>
+            <a:off x="548640" y="3154680"/>
+            <a:ext cx="5408676" cy="1508760"/>
           </a:xfrm>
           <a:prstGeom prst="roundRect">
             <a:avLst/>
@@ -8451,17 +8823,56 @@
             <a:prstDash val="solid"/>
           </a:ln>
         </p:spPr>
-      </p:sp>
-      <p:sp>
-        <p:nvSpPr>
-          <p:cNvPr id="16" name="Text 14"/>
-          <p:cNvSpPr/>
-          <p:nvPr/>
-        </p:nvSpPr>
-        <p:spPr>
-          <a:xfrm>
-            <a:off x="8232648" y="4160520"/>
-            <a:ext cx="3361944" cy="731520"/>
+        <p:txBody>
+          <a:bodyPr/>
+          <a:lstStyle/>
+          <a:p>
+            <a:endParaRPr lang="es-ES"/>
+          </a:p>
+        </p:txBody>
+      </p:sp>
+      <p:sp>
+        <p:nvSpPr>
+          <p:cNvPr id="14" name="Shape 12"/>
+          <p:cNvSpPr/>
+          <p:nvPr/>
+        </p:nvSpPr>
+        <p:spPr>
+          <a:xfrm>
+            <a:off x="731520" y="3589020"/>
+            <a:ext cx="640080" cy="640080"/>
+          </a:xfrm>
+          <a:prstGeom prst="ellipse">
+            <a:avLst/>
+          </a:prstGeom>
+          <a:solidFill>
+            <a:srgbClr val="3949AB"/>
+          </a:solidFill>
+          <a:ln w="12700">
+            <a:solidFill>
+              <a:srgbClr val="3949AB"/>
+            </a:solidFill>
+            <a:prstDash val="solid"/>
+          </a:ln>
+        </p:spPr>
+        <p:txBody>
+          <a:bodyPr/>
+          <a:lstStyle/>
+          <a:p>
+            <a:endParaRPr lang="es-ES"/>
+          </a:p>
+        </p:txBody>
+      </p:sp>
+      <p:sp>
+        <p:nvSpPr>
+          <p:cNvPr id="15" name="Text 13"/>
+          <p:cNvSpPr/>
+          <p:nvPr/>
+        </p:nvSpPr>
+        <p:spPr>
+          <a:xfrm>
+            <a:off x="731520" y="3589020"/>
+            <a:ext cx="640080" cy="640080"/>
           </a:xfrm>
           <a:prstGeom prst="rect">
             <a:avLst/>
@@ -8473,11 +8884,50 @@
           <a:bodyPr wrap="square" rtlCol="0" anchor="ctr"/>
           <a:lstStyle/>
           <a:p>
-            <a:pPr algn="ctr" indent="0" marL="0">
+            <a:pPr marL="0" indent="0" algn="ctr">
               <a:buNone/>
             </a:pPr>
             <a:r>
-              <a:rPr lang="en-US" sz="1600" dirty="0">
+              <a:rPr lang="en-US" sz="2000" b="1" dirty="0">
+                <a:solidFill>
+                  <a:srgbClr val="FFFFFF"/>
+                </a:solidFill>
+                <a:latin typeface="Arial" pitchFamily="34" charset="0"/>
+                <a:ea typeface="Arial" pitchFamily="34" charset="-122"/>
+                <a:cs typeface="Arial" pitchFamily="34" charset="-120"/>
+              </a:rPr>
+              <a:t>3</a:t>
+            </a:r>
+            <a:endParaRPr lang="en-US" sz="2000" dirty="0"/>
+          </a:p>
+        </p:txBody>
+      </p:sp>
+      <p:sp>
+        <p:nvSpPr>
+          <p:cNvPr id="16" name="Text 14"/>
+          <p:cNvSpPr/>
+          <p:nvPr/>
+        </p:nvSpPr>
+        <p:spPr>
+          <a:xfrm>
+            <a:off x="1508760" y="3154680"/>
+            <a:ext cx="4265676" cy="1508760"/>
+          </a:xfrm>
+          <a:prstGeom prst="rect">
+            <a:avLst/>
+          </a:prstGeom>
+          <a:noFill/>
+          <a:ln/>
+        </p:spPr>
+        <p:txBody>
+          <a:bodyPr wrap="square" rtlCol="0" anchor="ctr"/>
+          <a:lstStyle/>
+          <a:p>
+            <a:pPr marL="0" indent="0">
+              <a:buNone/>
+            </a:pPr>
+            <a:r>
+              <a:rPr lang="en-US" sz="1550" dirty="0">
                 <a:solidFill>
                   <a:srgbClr val="212121"/>
                 </a:solidFill>
@@ -8485,9 +8935,9 @@
                 <a:ea typeface="Arial" pitchFamily="34" charset="-122"/>
                 <a:cs typeface="Arial" pitchFamily="34" charset="-120"/>
               </a:rPr>
-              <a:t>Instancia N...</a:t>
+              <a:t>El almacenamiento (EBS) es un recurso independiente conectado a la instancia, no una parte indivisible.</a:t>
             </a:r>
-            <a:endParaRPr lang="en-US" sz="1600" dirty="0"/>
+            <a:endParaRPr lang="en-US" sz="1550" dirty="0"/>
           </a:p>
         </p:txBody>
       </p:sp>
@@ -8499,13 +8949,15 @@
         </p:nvSpPr>
         <p:spPr>
           <a:xfrm>
-            <a:off x="9913620" y="3977640"/>
-            <a:ext cx="914" cy="182880"/>
-          </a:xfrm>
-          <a:prstGeom prst="line">
-            <a:avLst/>
-          </a:prstGeom>
-          <a:noFill/>
+            <a:off x="6231636" y="3154680"/>
+            <a:ext cx="5408676" cy="1508760"/>
+          </a:xfrm>
+          <a:prstGeom prst="roundRect">
+            <a:avLst/>
+          </a:prstGeom>
+          <a:solidFill>
+            <a:srgbClr val="E8EAF6"/>
+          </a:solidFill>
           <a:ln w="15875">
             <a:solidFill>
               <a:srgbClr val="3949AB"/>
@@ -8513,6 +8965,13 @@
             <a:prstDash val="solid"/>
           </a:ln>
         </p:spPr>
+        <p:txBody>
+          <a:bodyPr/>
+          <a:lstStyle/>
+          <a:p>
+            <a:endParaRPr lang="es-ES"/>
+          </a:p>
+        </p:txBody>
       </p:sp>
       <p:sp>
         <p:nvSpPr>
@@ -8522,13 +8981,125 @@
         </p:nvSpPr>
         <p:spPr>
           <a:xfrm>
-            <a:off x="2275332" y="3977640"/>
-            <a:ext cx="7638288" cy="914"/>
-          </a:xfrm>
-          <a:prstGeom prst="line">
+            <a:off x="6414516" y="3589020"/>
+            <a:ext cx="640080" cy="640080"/>
+          </a:xfrm>
+          <a:prstGeom prst="ellipse">
+            <a:avLst/>
+          </a:prstGeom>
+          <a:solidFill>
+            <a:srgbClr val="3949AB"/>
+          </a:solidFill>
+          <a:ln w="12700">
+            <a:solidFill>
+              <a:srgbClr val="3949AB"/>
+            </a:solidFill>
+            <a:prstDash val="solid"/>
+          </a:ln>
+        </p:spPr>
+        <p:txBody>
+          <a:bodyPr/>
+          <a:lstStyle/>
+          <a:p>
+            <a:endParaRPr lang="es-ES"/>
+          </a:p>
+        </p:txBody>
+      </p:sp>
+      <p:sp>
+        <p:nvSpPr>
+          <p:cNvPr id="19" name="Text 17"/>
+          <p:cNvSpPr/>
+          <p:nvPr/>
+        </p:nvSpPr>
+        <p:spPr>
+          <a:xfrm>
+            <a:off x="6414516" y="3589020"/>
+            <a:ext cx="640080" cy="640080"/>
+          </a:xfrm>
+          <a:prstGeom prst="rect">
             <a:avLst/>
           </a:prstGeom>
           <a:noFill/>
+          <a:ln/>
+        </p:spPr>
+        <p:txBody>
+          <a:bodyPr wrap="square" rtlCol="0" anchor="ctr"/>
+          <a:lstStyle/>
+          <a:p>
+            <a:pPr marL="0" indent="0" algn="ctr">
+              <a:buNone/>
+            </a:pPr>
+            <a:r>
+              <a:rPr lang="en-US" sz="2000" b="1" dirty="0">
+                <a:solidFill>
+                  <a:srgbClr val="FFFFFF"/>
+                </a:solidFill>
+                <a:latin typeface="Arial" pitchFamily="34" charset="0"/>
+                <a:ea typeface="Arial" pitchFamily="34" charset="-122"/>
+                <a:cs typeface="Arial" pitchFamily="34" charset="-120"/>
+              </a:rPr>
+              <a:t>4</a:t>
+            </a:r>
+            <a:endParaRPr lang="en-US" sz="2000" dirty="0"/>
+          </a:p>
+        </p:txBody>
+      </p:sp>
+      <p:sp>
+        <p:nvSpPr>
+          <p:cNvPr id="20" name="Text 18"/>
+          <p:cNvSpPr/>
+          <p:nvPr/>
+        </p:nvSpPr>
+        <p:spPr>
+          <a:xfrm>
+            <a:off x="7191756" y="3154680"/>
+            <a:ext cx="4265676" cy="1508760"/>
+          </a:xfrm>
+          <a:prstGeom prst="rect">
+            <a:avLst/>
+          </a:prstGeom>
+          <a:noFill/>
+          <a:ln/>
+        </p:spPr>
+        <p:txBody>
+          <a:bodyPr wrap="square" rtlCol="0" anchor="ctr"/>
+          <a:lstStyle/>
+          <a:p>
+            <a:pPr marL="0" indent="0">
+              <a:buNone/>
+            </a:pPr>
+            <a:r>
+              <a:rPr lang="en-US" sz="1550" dirty="0">
+                <a:solidFill>
+                  <a:srgbClr val="212121"/>
+                </a:solidFill>
+                <a:latin typeface="Arial" pitchFamily="34" charset="0"/>
+                <a:ea typeface="Arial" pitchFamily="34" charset="-122"/>
+                <a:cs typeface="Arial" pitchFamily="34" charset="-120"/>
+              </a:rPr>
+              <a:t>Parar conserva la instancia y el disco sin facturar cómputo; terminar la elimina por completo.</a:t>
+            </a:r>
+            <a:endParaRPr lang="en-US" sz="1550" dirty="0"/>
+          </a:p>
+        </p:txBody>
+      </p:sp>
+      <p:sp>
+        <p:nvSpPr>
+          <p:cNvPr id="21" name="Shape 19"/>
+          <p:cNvSpPr/>
+          <p:nvPr/>
+        </p:nvSpPr>
+        <p:spPr>
+          <a:xfrm>
+            <a:off x="548640" y="4937760"/>
+            <a:ext cx="5408676" cy="1508760"/>
+          </a:xfrm>
+          <a:prstGeom prst="roundRect">
+            <a:avLst/>
+          </a:prstGeom>
+          <a:solidFill>
+            <a:srgbClr val="E8EAF6"/>
+          </a:solidFill>
           <a:ln w="15875">
             <a:solidFill>
               <a:srgbClr val="3949AB"/>
@@ -8536,6 +9107,123 @@
             <a:prstDash val="solid"/>
           </a:ln>
         </p:spPr>
+        <p:txBody>
+          <a:bodyPr/>
+          <a:lstStyle/>
+          <a:p>
+            <a:endParaRPr lang="es-ES"/>
+          </a:p>
+        </p:txBody>
+      </p:sp>
+      <p:sp>
+        <p:nvSpPr>
+          <p:cNvPr id="22" name="Shape 20"/>
+          <p:cNvSpPr/>
+          <p:nvPr/>
+        </p:nvSpPr>
+        <p:spPr>
+          <a:xfrm>
+            <a:off x="731520" y="5372100"/>
+            <a:ext cx="640080" cy="640080"/>
+          </a:xfrm>
+          <a:prstGeom prst="ellipse">
+            <a:avLst/>
+          </a:prstGeom>
+          <a:solidFill>
+            <a:srgbClr val="3949AB"/>
+          </a:solidFill>
+          <a:ln w="12700">
+            <a:solidFill>
+              <a:srgbClr val="3949AB"/>
+            </a:solidFill>
+            <a:prstDash val="solid"/>
+          </a:ln>
+        </p:spPr>
+        <p:txBody>
+          <a:bodyPr/>
+          <a:lstStyle/>
+          <a:p>
+            <a:endParaRPr lang="es-ES"/>
+          </a:p>
+        </p:txBody>
+      </p:sp>
+      <p:sp>
+        <p:nvSpPr>
+          <p:cNvPr id="23" name="Text 21"/>
+          <p:cNvSpPr/>
+          <p:nvPr/>
+        </p:nvSpPr>
+        <p:spPr>
+          <a:xfrm>
+            <a:off x="731520" y="5372100"/>
+            <a:ext cx="640080" cy="640080"/>
+          </a:xfrm>
+          <a:prstGeom prst="rect">
+            <a:avLst/>
+          </a:prstGeom>
+          <a:noFill/>
+          <a:ln/>
+        </p:spPr>
+        <p:txBody>
+          <a:bodyPr wrap="square" rtlCol="0" anchor="ctr"/>
+          <a:lstStyle/>
+          <a:p>
+            <a:pPr marL="0" indent="0" algn="ctr">
+              <a:buNone/>
+            </a:pPr>
+            <a:r>
+              <a:rPr lang="en-US" sz="2000" b="1" dirty="0">
+                <a:solidFill>
+                  <a:srgbClr val="FFFFFF"/>
+                </a:solidFill>
+                <a:latin typeface="Arial" pitchFamily="34" charset="0"/>
+                <a:ea typeface="Arial" pitchFamily="34" charset="-122"/>
+                <a:cs typeface="Arial" pitchFamily="34" charset="-120"/>
+              </a:rPr>
+              <a:t>5</a:t>
+            </a:r>
+            <a:endParaRPr lang="en-US" sz="2000" dirty="0"/>
+          </a:p>
+        </p:txBody>
+      </p:sp>
+      <p:sp>
+        <p:nvSpPr>
+          <p:cNvPr id="24" name="Text 22"/>
+          <p:cNvSpPr/>
+          <p:nvPr/>
+        </p:nvSpPr>
+        <p:spPr>
+          <a:xfrm>
+            <a:off x="1508760" y="4937760"/>
+            <a:ext cx="4265676" cy="1508760"/>
+          </a:xfrm>
+          <a:prstGeom prst="rect">
+            <a:avLst/>
+          </a:prstGeom>
+          <a:noFill/>
+          <a:ln/>
+        </p:spPr>
+        <p:txBody>
+          <a:bodyPr wrap="square" rtlCol="0" anchor="ctr"/>
+          <a:lstStyle/>
+          <a:p>
+            <a:pPr marL="0" indent="0">
+              <a:buNone/>
+            </a:pPr>
+            <a:r>
+              <a:rPr lang="en-US" sz="1550" dirty="0">
+                <a:solidFill>
+                  <a:srgbClr val="212121"/>
+                </a:solidFill>
+                <a:latin typeface="Arial" pitchFamily="34" charset="0"/>
+                <a:ea typeface="Arial" pitchFamily="34" charset="-122"/>
+                <a:cs typeface="Arial" pitchFamily="34" charset="-120"/>
+              </a:rPr>
+              <a:t>User data automatiza una instancia; una plantilla de lanzamiento empaqueta todo para lanzar muchas — base del escalado del Tema 4.</a:t>
+            </a:r>
+            <a:endParaRPr lang="en-US" sz="1550" dirty="0"/>
+          </a:p>
+        </p:txBody>
       </p:sp>
     </p:spTree>
   </p:cSld>
@@ -8838,4 +9526,319 @@
     </a:ext>
   </a:extLst>
 </a:theme>
+</file>
+
+<file path=ppt/theme/theme2.xml><?xml version="1.0" encoding="utf-8"?>
+<a:theme xmlns:a="http://schemas.openxmlformats.org/drawingml/2006/main" name="Tema de Office">
+  <a:themeElements>
+    <a:clrScheme name="Office">
+      <a:dk1>
+        <a:sysClr val="windowText" lastClr="000000"/>
+      </a:dk1>
+      <a:lt1>
+        <a:sysClr val="window" lastClr="FFFFFF"/>
+      </a:lt1>
+      <a:dk2>
+        <a:srgbClr val="0E2841"/>
+      </a:dk2>
+      <a:lt2>
+        <a:srgbClr val="E8E8E8"/>
+      </a:lt2>
+      <a:accent1>
+        <a:srgbClr val="156082"/>
+      </a:accent1>
+      <a:accent2>
+        <a:srgbClr val="E97132"/>
+      </a:accent2>
+      <a:accent3>
+        <a:srgbClr val="196B24"/>
+      </a:accent3>
+      <a:accent4>
+        <a:srgbClr val="0F9ED5"/>
+      </a:accent4>
+      <a:accent5>
+        <a:srgbClr val="A02B93"/>
+      </a:accent5>
+      <a:accent6>
+        <a:srgbClr val="4EA72E"/>
+      </a:accent6>
+      <a:hlink>
+        <a:srgbClr val="467886"/>
+      </a:hlink>
+      <a:folHlink>
+        <a:srgbClr val="96607D"/>
+      </a:folHlink>
+    </a:clrScheme>
+    <a:fontScheme name="Office">
+      <a:majorFont>
+        <a:latin typeface="Aptos Display" panose="02110004020202020204"/>
+        <a:ea typeface=""/>
+        <a:cs typeface=""/>
+        <a:font script="Jpan" typeface="游ゴシック Light"/>
+        <a:font script="Hang" typeface="맑은 고딕"/>
+        <a:font script="Hans" typeface="等线 Light"/>
+        <a:font script="Hant" typeface="新細明體"/>
+        <a:font script="Arab" typeface="Times New Roman"/>
+        <a:font script="Hebr" typeface="Times New Roman"/>
+        <a:font script="Thai" typeface="Angsana New"/>
+        <a:font script="Ethi" typeface="Nyala"/>
+        <a:font script="Beng" typeface="Vrinda"/>
+        <a:font script="Gujr" typeface="Shruti"/>
+        <a:font script="Khmr" typeface="MoolBoran"/>
+        <a:font script="Knda" typeface="Tunga"/>
+        <a:font script="Guru" typeface="Raavi"/>
+        <a:font script="Cans" typeface="Euphemia"/>
+        <a:font script="Cher" typeface="Plantagenet Cherokee"/>
+        <a:font script="Yiii" typeface="Microsoft Yi Baiti"/>
+        <a:font script="Tibt" typeface="Microsoft Himalaya"/>
+        <a:font script="Thaa" typeface="MV Boli"/>
+        <a:font script="Deva" typeface="Mangal"/>
+        <a:font script="Telu" typeface="Gautami"/>
+        <a:font script="Taml" typeface="Latha"/>
+        <a:font script="Syrc" typeface="Estrangelo Edessa"/>
+        <a:font script="Orya" typeface="Kalinga"/>
+        <a:font script="Mlym" typeface="Kartika"/>
+        <a:font script="Laoo" typeface="DokChampa"/>
+        <a:font script="Sinh" typeface="Iskoola Pota"/>
+        <a:font script="Mong" typeface="Mongolian Baiti"/>
+        <a:font script="Viet" typeface="Times New Roman"/>
+        <a:font script="Uigh" typeface="Microsoft Uighur"/>
+        <a:font script="Geor" typeface="Sylfaen"/>
+        <a:font script="Armn" typeface="Arial"/>
+        <a:font script="Bugi" typeface="Leelawadee UI"/>
+        <a:font script="Bopo" typeface="Microsoft JhengHei"/>
+        <a:font script="Java" typeface="Javanese Text"/>
+        <a:font script="Lisu" typeface="Segoe UI"/>
+        <a:font script="Mymr" typeface="Myanmar Text"/>
+        <a:font script="Nkoo" typeface="Ebrima"/>
+        <a:font script="Olck" typeface="Nirmala UI"/>
+        <a:font script="Osma" typeface="Ebrima"/>
+        <a:font script="Phag" typeface="Phagspa"/>
+        <a:font script="Syrn" typeface="Estrangelo Edessa"/>
+        <a:font script="Syrj" typeface="Estrangelo Edessa"/>
+        <a:font script="Syre" typeface="Estrangelo Edessa"/>
+        <a:font script="Sora" typeface="Nirmala UI"/>
+        <a:font script="Tale" typeface="Microsoft Tai Le"/>
+        <a:font script="Talu" typeface="Microsoft New Tai Lue"/>
+        <a:font script="Tfng" typeface="Ebrima"/>
+      </a:majorFont>
+      <a:minorFont>
+        <a:latin typeface="Aptos" panose="02110004020202020204"/>
+        <a:ea typeface=""/>
+        <a:cs typeface=""/>
+        <a:font script="Jpan" typeface="游ゴシック"/>
+        <a:font script="Hang" typeface="맑은 고딕"/>
+        <a:font script="Hans" typeface="等线"/>
+        <a:font script="Hant" typeface="新細明體"/>
+        <a:font script="Arab" typeface="Arial"/>
+        <a:font script="Hebr" typeface="Arial"/>
+        <a:font script="Thai" typeface="Cordia New"/>
+        <a:font script="Ethi" typeface="Nyala"/>
+        <a:font script="Beng" typeface="Vrinda"/>
+        <a:font script="Gujr" typeface="Shruti"/>
+        <a:font script="Khmr" typeface="DaunPenh"/>
+        <a:font script="Knda" typeface="Tunga"/>
+        <a:font script="Guru" typeface="Raavi"/>
+        <a:font script="Cans" typeface="Euphemia"/>
+        <a:font script="Cher" typeface="Plantagenet Cherokee"/>
+        <a:font script="Yiii" typeface="Microsoft Yi Baiti"/>
+        <a:font script="Tibt" typeface="Microsoft Himalaya"/>
+        <a:font script="Thaa" typeface="MV Boli"/>
+        <a:font script="Deva" typeface="Mangal"/>
+        <a:font script="Telu" typeface="Gautami"/>
+        <a:font script="Taml" typeface="Latha"/>
+        <a:font script="Syrc" typeface="Estrangelo Edessa"/>
+        <a:font script="Orya" typeface="Kalinga"/>
+        <a:font script="Mlym" typeface="Kartika"/>
+        <a:font script="Laoo" typeface="DokChampa"/>
+        <a:font script="Sinh" typeface="Iskoola Pota"/>
+        <a:font script="Mong" typeface="Mongolian Baiti"/>
+        <a:font script="Viet" typeface="Arial"/>
+        <a:font script="Uigh" typeface="Microsoft Uighur"/>
+        <a:font script="Geor" typeface="Sylfaen"/>
+        <a:font script="Armn" typeface="Arial"/>
+        <a:font script="Bugi" typeface="Leelawadee UI"/>
+        <a:font script="Bopo" typeface="Microsoft JhengHei"/>
+        <a:font script="Java" typeface="Javanese Text"/>
+        <a:font script="Lisu" typeface="Segoe UI"/>
+        <a:font script="Mymr" typeface="Myanmar Text"/>
+        <a:font script="Nkoo" typeface="Ebrima"/>
+        <a:font script="Olck" typeface="Nirmala UI"/>
+        <a:font script="Osma" typeface="Ebrima"/>
+        <a:font script="Phag" typeface="Phagspa"/>
+        <a:font script="Syrn" typeface="Estrangelo Edessa"/>
+        <a:font script="Syrj" typeface="Estrangelo Edessa"/>
+        <a:font script="Syre" typeface="Estrangelo Edessa"/>
+        <a:font script="Sora" typeface="Nirmala UI"/>
+        <a:font script="Tale" typeface="Microsoft Tai Le"/>
+        <a:font script="Talu" typeface="Microsoft New Tai Lue"/>
+        <a:font script="Tfng" typeface="Ebrima"/>
+      </a:minorFont>
+    </a:fontScheme>
+    <a:fmtScheme name="Office">
+      <a:fillStyleLst>
+        <a:solidFill>
+          <a:schemeClr val="phClr"/>
+        </a:solidFill>
+        <a:gradFill rotWithShape="1">
+          <a:gsLst>
+            <a:gs pos="0">
+              <a:schemeClr val="phClr">
+                <a:lumMod val="110000"/>
+                <a:satMod val="105000"/>
+                <a:tint val="67000"/>
+              </a:schemeClr>
+            </a:gs>
+            <a:gs pos="50000">
+              <a:schemeClr val="phClr">
+                <a:lumMod val="105000"/>
+                <a:satMod val="103000"/>
+                <a:tint val="73000"/>
+              </a:schemeClr>
+            </a:gs>
+            <a:gs pos="100000">
+              <a:schemeClr val="phClr">
+                <a:lumMod val="105000"/>
+                <a:satMod val="109000"/>
+                <a:tint val="81000"/>
+              </a:schemeClr>
+            </a:gs>
+          </a:gsLst>
+          <a:lin ang="5400000" scaled="0"/>
+        </a:gradFill>
+        <a:gradFill rotWithShape="1">
+          <a:gsLst>
+            <a:gs pos="0">
+              <a:schemeClr val="phClr">
+                <a:satMod val="103000"/>
+                <a:lumMod val="102000"/>
+                <a:tint val="94000"/>
+              </a:schemeClr>
+            </a:gs>
+            <a:gs pos="50000">
+              <a:schemeClr val="phClr">
+                <a:satMod val="110000"/>
+                <a:lumMod val="100000"/>
+                <a:shade val="100000"/>
+              </a:schemeClr>
+            </a:gs>
+            <a:gs pos="100000">
+              <a:schemeClr val="phClr">
+                <a:lumMod val="99000"/>
+                <a:satMod val="120000"/>
+                <a:shade val="78000"/>
+              </a:schemeClr>
+            </a:gs>
+          </a:gsLst>
+          <a:lin ang="5400000" scaled="0"/>
+        </a:gradFill>
+      </a:fillStyleLst>
+      <a:lnStyleLst>
+        <a:ln w="12700" cap="flat" cmpd="sng" algn="ctr">
+          <a:solidFill>
+            <a:schemeClr val="phClr"/>
+          </a:solidFill>
+          <a:prstDash val="solid"/>
+          <a:miter lim="800000"/>
+        </a:ln>
+        <a:ln w="19050" cap="flat" cmpd="sng" algn="ctr">
+          <a:solidFill>
+            <a:schemeClr val="phClr"/>
+          </a:solidFill>
+          <a:prstDash val="solid"/>
+          <a:miter lim="800000"/>
+        </a:ln>
+        <a:ln w="25400" cap="flat" cmpd="sng" algn="ctr">
+          <a:solidFill>
+            <a:schemeClr val="phClr"/>
+          </a:solidFill>
+          <a:prstDash val="solid"/>
+          <a:miter lim="800000"/>
+        </a:ln>
+      </a:lnStyleLst>
+      <a:effectStyleLst>
+        <a:effectStyle>
+          <a:effectLst/>
+        </a:effectStyle>
+        <a:effectStyle>
+          <a:effectLst/>
+        </a:effectStyle>
+        <a:effectStyle>
+          <a:effectLst>
+            <a:outerShdw blurRad="57150" dist="19050" dir="5400000" algn="ctr" rotWithShape="0">
+              <a:srgbClr val="000000">
+                <a:alpha val="63000"/>
+              </a:srgbClr>
+            </a:outerShdw>
+          </a:effectLst>
+        </a:effectStyle>
+      </a:effectStyleLst>
+      <a:bgFillStyleLst>
+        <a:solidFill>
+          <a:schemeClr val="phClr"/>
+        </a:solidFill>
+        <a:solidFill>
+          <a:schemeClr val="phClr">
+            <a:tint val="95000"/>
+            <a:satMod val="170000"/>
+          </a:schemeClr>
+        </a:solidFill>
+        <a:gradFill rotWithShape="1">
+          <a:gsLst>
+            <a:gs pos="0">
+              <a:schemeClr val="phClr">
+                <a:tint val="93000"/>
+                <a:satMod val="150000"/>
+                <a:shade val="98000"/>
+                <a:lumMod val="102000"/>
+              </a:schemeClr>
+            </a:gs>
+            <a:gs pos="50000">
+              <a:schemeClr val="phClr">
+                <a:tint val="98000"/>
+                <a:satMod val="130000"/>
+                <a:shade val="90000"/>
+                <a:lumMod val="103000"/>
+              </a:schemeClr>
+            </a:gs>
+            <a:gs pos="100000">
+              <a:schemeClr val="phClr">
+                <a:shade val="63000"/>
+                <a:satMod val="120000"/>
+              </a:schemeClr>
+            </a:gs>
+          </a:gsLst>
+          <a:lin ang="5400000" scaled="0"/>
+        </a:gradFill>
+      </a:bgFillStyleLst>
+    </a:fmtScheme>
+  </a:themeElements>
+  <a:objectDefaults>
+    <a:lnDef>
+      <a:spPr/>
+      <a:bodyPr/>
+      <a:lstStyle/>
+      <a:style>
+        <a:lnRef idx="2">
+          <a:schemeClr val="accent1"/>
+        </a:lnRef>
+        <a:fillRef idx="0">
+          <a:schemeClr val="accent1"/>
+        </a:fillRef>
+        <a:effectRef idx="1">
+          <a:schemeClr val="accent1"/>
+        </a:effectRef>
+        <a:fontRef idx="minor">
+          <a:schemeClr val="tx1"/>
+        </a:fontRef>
+      </a:style>
+    </a:lnDef>
+  </a:objectDefaults>
+  <a:extraClrSchemeLst/>
+  <a:extLst>
+    <a:ext uri="{05A4C25C-085E-4340-85A3-A5531E510DB2}">
+      <thm15:themeFamily xmlns:thm15="http://schemas.microsoft.com/office/thememl/2012/main" name="Office Theme" id="{2E142A2C-CD16-42D6-873A-C26D2A0506FA}" vid="{1BDDFF52-6CD6-40A5-AB3C-68EB2F1E4D0A}"/>
+    </a:ext>
+  </a:extLst>
+</a:theme>
 </file>